--- a/output/wordlabs-live-3day.pptx
+++ b/output/wordlabs-live-3day.pptx
@@ -6071,7 +6071,7 @@
                 <a:ea typeface="Calibri" pitchFamily="34" charset="-122"/>
                 <a:cs typeface="Calibri" pitchFamily="34" charset="-120"/>
               </a:rPr>
-              <a:t> market was a </a:t>
+              <a:t> puppy seemed so </a:t>
             </a:r>
             <a:pPr algn="l" indent="0" marL="0">
               <a:buNone/>
@@ -6088,7 +6088,7 @@
                 <a:ea typeface="Calibri" pitchFamily="34" charset="-122"/>
                 <a:cs typeface="Calibri" pitchFamily="34" charset="-120"/>
               </a:rPr>
-              <a:t>livelihood</a:t>
+              <a:t>alive</a:t>
             </a:r>
             <a:pPr algn="l" indent="0" marL="0">
               <a:buNone/>
@@ -6102,7 +6102,7 @@
                 <a:ea typeface="Calibri" pitchFamily="34" charset="-122"/>
                 <a:cs typeface="Calibri" pitchFamily="34" charset="-120"/>
               </a:rPr>
-              <a:t> for many families in the town.</a:t>
+              <a:t> as it raced around the backyard.</a:t>
             </a:r>
             <a:endParaRPr lang="en-US" sz="1800" dirty="0"/>
           </a:p>
@@ -6385,7 +6385,7 @@
                 <a:ea typeface="Trebuchet MS" pitchFamily="34" charset="-122"/>
                 <a:cs typeface="Trebuchet MS" pitchFamily="34" charset="-120"/>
               </a:rPr>
-              <a:t>livelihood</a:t>
+              <a:t>alive</a:t>
             </a:r>
             <a:endParaRPr lang="en-US" sz="1400" dirty="0"/>
           </a:p>
@@ -11258,7 +11258,7 @@
                 <a:ea typeface="Trebuchet MS" pitchFamily="34" charset="-122"/>
                 <a:cs typeface="Trebuchet MS" pitchFamily="34" charset="-120"/>
               </a:rPr>
-              <a:t>livelihood</a:t>
+              <a:t>alive</a:t>
             </a:r>
             <a:endParaRPr lang="en-US" sz="2800" dirty="0"/>
           </a:p>
@@ -12085,7 +12085,7 @@
                 <a:ea typeface="Trebuchet MS" pitchFamily="34" charset="-122"/>
                 <a:cs typeface="Trebuchet MS" pitchFamily="34" charset="-120"/>
               </a:rPr>
-              <a:t>livelihood</a:t>
+              <a:t>alive</a:t>
             </a:r>
             <a:endParaRPr lang="en-US" sz="2800" dirty="0"/>
           </a:p>
@@ -12165,7 +12165,7 @@
         </p:nvSpPr>
         <p:spPr>
           <a:xfrm>
-            <a:off x="2221992" y="2258568"/>
+            <a:off x="2938272" y="2258568"/>
             <a:ext cx="1828800" cy="292608"/>
           </a:xfrm>
           <a:prstGeom prst="rect">
@@ -12174,11 +12174,11 @@
             </a:avLst>
           </a:prstGeom>
           <a:solidFill>
-            <a:srgbClr val="CCFBF1"/>
+            <a:srgbClr val="DDD6FE"/>
           </a:solidFill>
           <a:ln w="19050">
             <a:solidFill>
-              <a:srgbClr val="0D9488"/>
+              <a:srgbClr val="7C3AED"/>
             </a:solidFill>
             <a:prstDash val="solid"/>
           </a:ln>
@@ -12199,7 +12199,7 @@
         </p:nvSpPr>
         <p:spPr>
           <a:xfrm>
-            <a:off x="2221992" y="2258568"/>
+            <a:off x="2938272" y="2258568"/>
             <a:ext cx="1828800" cy="292608"/>
           </a:xfrm>
           <a:prstGeom prst="rect">
@@ -12218,13 +12218,13 @@
             <a:r>
               <a:rPr lang="en-US" sz="1300" b="1" dirty="0">
                 <a:solidFill>
-                  <a:srgbClr val="0F766E"/>
+                  <a:srgbClr val="4C1D95"/>
                 </a:solidFill>
                 <a:latin typeface="Trebuchet MS" pitchFamily="34" charset="0"/>
                 <a:ea typeface="Trebuchet MS" pitchFamily="34" charset="-122"/>
                 <a:cs typeface="Trebuchet MS" pitchFamily="34" charset="-120"/>
               </a:rPr>
-              <a:t>live</a:t>
+              <a:t>a</a:t>
             </a:r>
             <a:endParaRPr lang="en-US" sz="1300" dirty="0"/>
           </a:p>
@@ -12238,7 +12238,7 @@
         </p:nvSpPr>
         <p:spPr>
           <a:xfrm>
-            <a:off x="2221992" y="2569464"/>
+            <a:off x="2938272" y="2569464"/>
             <a:ext cx="1828800" cy="201168"/>
           </a:xfrm>
           <a:prstGeom prst="rect">
@@ -12263,7 +12263,7 @@
                 <a:ea typeface="Calibri" pitchFamily="34" charset="-122"/>
                 <a:cs typeface="Calibri" pitchFamily="34" charset="-120"/>
               </a:rPr>
-              <a:t>to be alive, exist</a:t>
+              <a:t>in a state of</a:t>
             </a:r>
             <a:endParaRPr lang="en-US" sz="850" dirty="0"/>
           </a:p>
@@ -12277,7 +12277,7 @@
         </p:nvSpPr>
         <p:spPr>
           <a:xfrm>
-            <a:off x="4370832" y="2258568"/>
+            <a:off x="5803392" y="2258568"/>
             <a:ext cx="1828800" cy="292608"/>
           </a:xfrm>
           <a:prstGeom prst="rect">
@@ -12286,11 +12286,11 @@
             </a:avLst>
           </a:prstGeom>
           <a:solidFill>
-            <a:srgbClr val="FCE7F3"/>
+            <a:srgbClr val="CCFBF1"/>
           </a:solidFill>
           <a:ln w="19050">
             <a:solidFill>
-              <a:srgbClr val="DB2777"/>
+              <a:srgbClr val="0D9488"/>
             </a:solidFill>
             <a:prstDash val="solid"/>
           </a:ln>
@@ -12311,7 +12311,7 @@
         </p:nvSpPr>
         <p:spPr>
           <a:xfrm>
-            <a:off x="4370832" y="2258568"/>
+            <a:off x="5803392" y="2258568"/>
             <a:ext cx="1828800" cy="292608"/>
           </a:xfrm>
           <a:prstGeom prst="rect">
@@ -12330,13 +12330,13 @@
             <a:r>
               <a:rPr lang="en-US" sz="1300" b="1" dirty="0">
                 <a:solidFill>
-                  <a:srgbClr val="9D174D"/>
+                  <a:srgbClr val="0F766E"/>
                 </a:solidFill>
                 <a:latin typeface="Trebuchet MS" pitchFamily="34" charset="0"/>
                 <a:ea typeface="Trebuchet MS" pitchFamily="34" charset="-122"/>
                 <a:cs typeface="Trebuchet MS" pitchFamily="34" charset="-120"/>
               </a:rPr>
-              <a:t>li</a:t>
+              <a:t>live</a:t>
             </a:r>
             <a:endParaRPr lang="en-US" sz="1300" dirty="0"/>
           </a:p>
@@ -12350,7 +12350,7 @@
         </p:nvSpPr>
         <p:spPr>
           <a:xfrm>
-            <a:off x="4370832" y="2569464"/>
+            <a:off x="5803392" y="2569464"/>
             <a:ext cx="1828800" cy="201168"/>
           </a:xfrm>
           <a:prstGeom prst="rect">
@@ -12375,7 +12375,7 @@
                 <a:ea typeface="Calibri" pitchFamily="34" charset="-122"/>
                 <a:cs typeface="Calibri" pitchFamily="34" charset="-120"/>
               </a:rPr>
-              <a:t>connecting form</a:t>
+              <a:t>to be alive, exist</a:t>
             </a:r>
             <a:endParaRPr lang="en-US" sz="850" dirty="0"/>
           </a:p>
@@ -12389,30 +12389,23 @@
         </p:nvSpPr>
         <p:spPr>
           <a:xfrm>
-            <a:off x="6519672" y="2258568"/>
-            <a:ext cx="1828800" cy="292608"/>
+            <a:off x="365760" y="3273552"/>
+            <a:ext cx="1371600" cy="658368"/>
           </a:xfrm>
           <a:prstGeom prst="rect">
             <a:avLst>
-              <a:gd name="adj" fmla="val 25000"/>
+              <a:gd name="adj" fmla="val 8333"/>
             </a:avLst>
           </a:prstGeom>
           <a:solidFill>
-            <a:srgbClr val="FCE7F3"/>
-          </a:solidFill>
-          <a:ln w="19050">
-            <a:solidFill>
-              <a:srgbClr val="DB2777"/>
-            </a:solidFill>
-            <a:prstDash val="solid"/>
-          </a:ln>
-          <a:effectLst>
-            <a:outerShdw sx="100000" sy="100000" kx="0" ky="0" algn="bl" rotWithShape="0" blurRad="101600" dist="38100" dir="8100000">
-              <a:srgbClr val="000000">
-                <a:alpha val="12000"/>
-              </a:srgbClr>
-            </a:outerShdw>
-          </a:effectLst>
+            <a:srgbClr val="E2E8F0"/>
+          </a:solidFill>
+          <a:ln w="12700">
+            <a:solidFill>
+              <a:srgbClr val="E2E8F0"/>
+            </a:solidFill>
+            <a:prstDash val="solid"/>
+          </a:ln>
         </p:spPr>
       </p:sp>
       <p:sp>
@@ -12423,8 +12416,8 @@
         </p:nvSpPr>
         <p:spPr>
           <a:xfrm>
-            <a:off x="6519672" y="2258568"/>
-            <a:ext cx="1828800" cy="292608"/>
+            <a:off x="365760" y="3273552"/>
+            <a:ext cx="1371600" cy="658368"/>
           </a:xfrm>
           <a:prstGeom prst="rect">
             <a:avLst/>
@@ -12440,73 +12433,100 @@
               <a:buNone/>
             </a:pPr>
             <a:r>
-              <a:rPr lang="en-US" sz="1300" b="1" dirty="0">
-                <a:solidFill>
-                  <a:srgbClr val="9D174D"/>
+              <a:rPr lang="en-US" sz="1100" b="1" dirty="0">
+                <a:solidFill>
+                  <a:srgbClr val="475569"/>
                 </a:solidFill>
                 <a:latin typeface="Trebuchet MS" pitchFamily="34" charset="0"/>
                 <a:ea typeface="Trebuchet MS" pitchFamily="34" charset="-122"/>
                 <a:cs typeface="Trebuchet MS" pitchFamily="34" charset="-120"/>
               </a:rPr>
-              <a:t>hood</a:t>
-            </a:r>
-            <a:endParaRPr lang="en-US" sz="1300" dirty="0"/>
-          </a:p>
-        </p:txBody>
-      </p:sp>
-      <p:sp>
-        <p:nvSpPr>
-          <p:cNvPr id="24" name="Text 22"/>
-          <p:cNvSpPr/>
-          <p:nvPr/>
-        </p:nvSpPr>
-        <p:spPr>
-          <a:xfrm>
-            <a:off x="6519672" y="2569464"/>
-            <a:ext cx="1828800" cy="201168"/>
-          </a:xfrm>
-          <a:prstGeom prst="rect">
-            <a:avLst/>
-          </a:prstGeom>
-          <a:noFill/>
-          <a:ln/>
-        </p:spPr>
-        <p:txBody>
-          <a:bodyPr wrap="square" lIns="0" tIns="0" rIns="0" bIns="0" rtlCol="0" anchor="t"/>
-          <a:lstStyle/>
-          <a:p>
-            <a:pPr algn="ctr" indent="0" marL="0">
-              <a:buNone/>
-            </a:pPr>
-            <a:r>
-              <a:rPr lang="en-US" sz="850" dirty="0">
-                <a:solidFill>
-                  <a:srgbClr val="475569"/>
+              <a:t>Syllables</a:t>
+            </a:r>
+            <a:endParaRPr lang="en-US" sz="1100" dirty="0"/>
+          </a:p>
+        </p:txBody>
+      </p:sp>
+      <p:sp>
+        <p:nvSpPr>
+          <p:cNvPr id="24" name="Shape 22"/>
+          <p:cNvSpPr/>
+          <p:nvPr/>
+        </p:nvSpPr>
+        <p:spPr>
+          <a:xfrm>
+            <a:off x="1874520" y="3273552"/>
+            <a:ext cx="6903720" cy="658368"/>
+          </a:xfrm>
+          <a:prstGeom prst="rect">
+            <a:avLst>
+              <a:gd name="adj" fmla="val 8333"/>
+            </a:avLst>
+          </a:prstGeom>
+          <a:solidFill>
+            <a:srgbClr val="F8FAFC"/>
+          </a:solidFill>
+          <a:ln w="12700">
+            <a:solidFill>
+              <a:srgbClr val="E2E8F0"/>
+            </a:solidFill>
+            <a:prstDash val="dash"/>
+          </a:ln>
+        </p:spPr>
+      </p:sp>
+      <p:sp>
+        <p:nvSpPr>
+          <p:cNvPr id="25" name="Text 23"/>
+          <p:cNvSpPr/>
+          <p:nvPr/>
+        </p:nvSpPr>
+        <p:spPr>
+          <a:xfrm>
+            <a:off x="1874520" y="3273552"/>
+            <a:ext cx="6903720" cy="658368"/>
+          </a:xfrm>
+          <a:prstGeom prst="rect">
+            <a:avLst/>
+          </a:prstGeom>
+          <a:noFill/>
+          <a:ln/>
+        </p:spPr>
+        <p:txBody>
+          <a:bodyPr wrap="square" rtlCol="0" anchor="ctr"/>
+          <a:lstStyle/>
+          <a:p>
+            <a:pPr algn="ctr" indent="0" marL="0">
+              <a:buNone/>
+            </a:pPr>
+            <a:r>
+              <a:rPr lang="en-US" sz="1100" i="1" dirty="0">
+                <a:solidFill>
+                  <a:srgbClr val="CBD5E1"/>
                 </a:solidFill>
                 <a:latin typeface="Calibri" pitchFamily="34" charset="0"/>
                 <a:ea typeface="Calibri" pitchFamily="34" charset="-122"/>
                 <a:cs typeface="Calibri" pitchFamily="34" charset="-120"/>
               </a:rPr>
-              <a:t>state or condition of</a:t>
-            </a:r>
-            <a:endParaRPr lang="en-US" sz="850" dirty="0"/>
-          </a:p>
-        </p:txBody>
-      </p:sp>
-      <p:sp>
-        <p:nvSpPr>
-          <p:cNvPr id="25" name="Shape 23"/>
-          <p:cNvSpPr/>
-          <p:nvPr/>
-        </p:nvSpPr>
-        <p:spPr>
-          <a:xfrm>
-            <a:off x="365760" y="3273552"/>
-            <a:ext cx="1371600" cy="658368"/>
+              <a:t>Write here...</a:t>
+            </a:r>
+            <a:endParaRPr lang="en-US" sz="1100" dirty="0"/>
+          </a:p>
+        </p:txBody>
+      </p:sp>
+      <p:sp>
+        <p:nvSpPr>
+          <p:cNvPr id="26" name="Shape 24"/>
+          <p:cNvSpPr/>
+          <p:nvPr/>
+        </p:nvSpPr>
+        <p:spPr>
+          <a:xfrm>
+            <a:off x="365760" y="4096512"/>
+            <a:ext cx="1371600" cy="804672"/>
           </a:xfrm>
           <a:prstGeom prst="rect">
             <a:avLst>
-              <a:gd name="adj" fmla="val 8333"/>
+              <a:gd name="adj" fmla="val 6818"/>
             </a:avLst>
           </a:prstGeom>
           <a:solidFill>
@@ -12522,14 +12542,14 @@
       </p:sp>
       <p:sp>
         <p:nvSpPr>
-          <p:cNvPr id="26" name="Text 24"/>
-          <p:cNvSpPr/>
-          <p:nvPr/>
-        </p:nvSpPr>
-        <p:spPr>
-          <a:xfrm>
-            <a:off x="365760" y="3273552"/>
-            <a:ext cx="1371600" cy="658368"/>
+          <p:cNvPr id="27" name="Text 25"/>
+          <p:cNvSpPr/>
+          <p:nvPr/>
+        </p:nvSpPr>
+        <p:spPr>
+          <a:xfrm>
+            <a:off x="365760" y="4096512"/>
+            <a:ext cx="1371600" cy="804672"/>
           </a:xfrm>
           <a:prstGeom prst="rect">
             <a:avLst/>
@@ -12553,7 +12573,7 @@
                 <a:ea typeface="Trebuchet MS" pitchFamily="34" charset="-122"/>
                 <a:cs typeface="Trebuchet MS" pitchFamily="34" charset="-120"/>
               </a:rPr>
-              <a:t>Syllables</a:t>
+              <a:t>Phonemes</a:t>
             </a:r>
             <a:endParaRPr lang="en-US" sz="1100" dirty="0"/>
           </a:p>
@@ -12561,80 +12581,14 @@
       </p:sp>
       <p:sp>
         <p:nvSpPr>
-          <p:cNvPr id="27" name="Shape 25"/>
-          <p:cNvSpPr/>
-          <p:nvPr/>
-        </p:nvSpPr>
-        <p:spPr>
-          <a:xfrm>
-            <a:off x="1874520" y="3273552"/>
-            <a:ext cx="6903720" cy="658368"/>
-          </a:xfrm>
-          <a:prstGeom prst="rect">
-            <a:avLst>
-              <a:gd name="adj" fmla="val 8333"/>
-            </a:avLst>
-          </a:prstGeom>
-          <a:solidFill>
-            <a:srgbClr val="F8FAFC"/>
-          </a:solidFill>
-          <a:ln w="12700">
-            <a:solidFill>
-              <a:srgbClr val="E2E8F0"/>
-            </a:solidFill>
-            <a:prstDash val="dash"/>
-          </a:ln>
-        </p:spPr>
-      </p:sp>
-      <p:sp>
-        <p:nvSpPr>
-          <p:cNvPr id="28" name="Text 26"/>
-          <p:cNvSpPr/>
-          <p:nvPr/>
-        </p:nvSpPr>
-        <p:spPr>
-          <a:xfrm>
-            <a:off x="1874520" y="3273552"/>
-            <a:ext cx="6903720" cy="658368"/>
-          </a:xfrm>
-          <a:prstGeom prst="rect">
-            <a:avLst/>
-          </a:prstGeom>
-          <a:noFill/>
-          <a:ln/>
-        </p:spPr>
-        <p:txBody>
-          <a:bodyPr wrap="square" rtlCol="0" anchor="ctr"/>
-          <a:lstStyle/>
-          <a:p>
-            <a:pPr algn="ctr" indent="0" marL="0">
-              <a:buNone/>
-            </a:pPr>
-            <a:r>
-              <a:rPr lang="en-US" sz="1100" i="1" dirty="0">
-                <a:solidFill>
-                  <a:srgbClr val="CBD5E1"/>
-                </a:solidFill>
-                <a:latin typeface="Calibri" pitchFamily="34" charset="0"/>
-                <a:ea typeface="Calibri" pitchFamily="34" charset="-122"/>
-                <a:cs typeface="Calibri" pitchFamily="34" charset="-120"/>
-              </a:rPr>
-              <a:t>Write here...</a:t>
-            </a:r>
-            <a:endParaRPr lang="en-US" sz="1100" dirty="0"/>
-          </a:p>
-        </p:txBody>
-      </p:sp>
-      <p:sp>
-        <p:nvSpPr>
-          <p:cNvPr id="29" name="Shape 27"/>
-          <p:cNvSpPr/>
-          <p:nvPr/>
-        </p:nvSpPr>
-        <p:spPr>
-          <a:xfrm>
-            <a:off x="365760" y="4096512"/>
-            <a:ext cx="1371600" cy="804672"/>
+          <p:cNvPr id="28" name="Shape 26"/>
+          <p:cNvSpPr/>
+          <p:nvPr/>
+        </p:nvSpPr>
+        <p:spPr>
+          <a:xfrm>
+            <a:off x="1874520" y="4096512"/>
+            <a:ext cx="6903720" cy="804672"/>
           </a:xfrm>
           <a:prstGeom prst="rect">
             <a:avLst>
@@ -12642,85 +12596,19 @@
             </a:avLst>
           </a:prstGeom>
           <a:solidFill>
-            <a:srgbClr val="E2E8F0"/>
+            <a:srgbClr val="F8FAFC"/>
           </a:solidFill>
           <a:ln w="12700">
             <a:solidFill>
               <a:srgbClr val="E2E8F0"/>
             </a:solidFill>
-            <a:prstDash val="solid"/>
-          </a:ln>
-        </p:spPr>
-      </p:sp>
-      <p:sp>
-        <p:nvSpPr>
-          <p:cNvPr id="30" name="Text 28"/>
-          <p:cNvSpPr/>
-          <p:nvPr/>
-        </p:nvSpPr>
-        <p:spPr>
-          <a:xfrm>
-            <a:off x="365760" y="4096512"/>
-            <a:ext cx="1371600" cy="804672"/>
-          </a:xfrm>
-          <a:prstGeom prst="rect">
-            <a:avLst/>
-          </a:prstGeom>
-          <a:noFill/>
-          <a:ln/>
-        </p:spPr>
-        <p:txBody>
-          <a:bodyPr wrap="square" lIns="0" tIns="0" rIns="0" bIns="0" rtlCol="0" anchor="ctr"/>
-          <a:lstStyle/>
-          <a:p>
-            <a:pPr algn="ctr" indent="0" marL="0">
-              <a:buNone/>
-            </a:pPr>
-            <a:r>
-              <a:rPr lang="en-US" sz="1100" b="1" dirty="0">
-                <a:solidFill>
-                  <a:srgbClr val="475569"/>
-                </a:solidFill>
-                <a:latin typeface="Trebuchet MS" pitchFamily="34" charset="0"/>
-                <a:ea typeface="Trebuchet MS" pitchFamily="34" charset="-122"/>
-                <a:cs typeface="Trebuchet MS" pitchFamily="34" charset="-120"/>
-              </a:rPr>
-              <a:t>Phonemes</a:t>
-            </a:r>
-            <a:endParaRPr lang="en-US" sz="1100" dirty="0"/>
-          </a:p>
-        </p:txBody>
-      </p:sp>
-      <p:sp>
-        <p:nvSpPr>
-          <p:cNvPr id="31" name="Shape 29"/>
-          <p:cNvSpPr/>
-          <p:nvPr/>
-        </p:nvSpPr>
-        <p:spPr>
-          <a:xfrm>
-            <a:off x="1874520" y="4096512"/>
-            <a:ext cx="6903720" cy="804672"/>
-          </a:xfrm>
-          <a:prstGeom prst="rect">
-            <a:avLst>
-              <a:gd name="adj" fmla="val 6818"/>
-            </a:avLst>
-          </a:prstGeom>
-          <a:solidFill>
-            <a:srgbClr val="F8FAFC"/>
-          </a:solidFill>
-          <a:ln w="12700">
-            <a:solidFill>
-              <a:srgbClr val="E2E8F0"/>
-            </a:solidFill>
             <a:prstDash val="dash"/>
           </a:ln>
         </p:spPr>
       </p:sp>
       <p:sp>
         <p:nvSpPr>
-          <p:cNvPr id="32" name="Text 30"/>
+          <p:cNvPr id="29" name="Text 27"/>
           <p:cNvSpPr/>
           <p:nvPr/>
         </p:nvSpPr>
@@ -13182,7 +13070,7 @@
                 <a:ea typeface="Trebuchet MS" pitchFamily="34" charset="-122"/>
                 <a:cs typeface="Trebuchet MS" pitchFamily="34" charset="-120"/>
               </a:rPr>
-              <a:t>livelihood</a:t>
+              <a:t>alive</a:t>
             </a:r>
             <a:endParaRPr lang="en-US" sz="2800" dirty="0"/>
           </a:p>
@@ -13262,7 +13150,7 @@
         </p:nvSpPr>
         <p:spPr>
           <a:xfrm>
-            <a:off x="2221992" y="2258568"/>
+            <a:off x="2938272" y="2258568"/>
             <a:ext cx="1828800" cy="292608"/>
           </a:xfrm>
           <a:prstGeom prst="rect">
@@ -13271,11 +13159,11 @@
             </a:avLst>
           </a:prstGeom>
           <a:solidFill>
-            <a:srgbClr val="CCFBF1"/>
+            <a:srgbClr val="DDD6FE"/>
           </a:solidFill>
           <a:ln w="19050">
             <a:solidFill>
-              <a:srgbClr val="0D9488"/>
+              <a:srgbClr val="7C3AED"/>
             </a:solidFill>
             <a:prstDash val="solid"/>
           </a:ln>
@@ -13296,7 +13184,7 @@
         </p:nvSpPr>
         <p:spPr>
           <a:xfrm>
-            <a:off x="2221992" y="2258568"/>
+            <a:off x="2938272" y="2258568"/>
             <a:ext cx="1828800" cy="292608"/>
           </a:xfrm>
           <a:prstGeom prst="rect">
@@ -13315,13 +13203,13 @@
             <a:r>
               <a:rPr lang="en-US" sz="1300" b="1" dirty="0">
                 <a:solidFill>
-                  <a:srgbClr val="0F766E"/>
+                  <a:srgbClr val="4C1D95"/>
                 </a:solidFill>
                 <a:latin typeface="Trebuchet MS" pitchFamily="34" charset="0"/>
                 <a:ea typeface="Trebuchet MS" pitchFamily="34" charset="-122"/>
                 <a:cs typeface="Trebuchet MS" pitchFamily="34" charset="-120"/>
               </a:rPr>
-              <a:t>live</a:t>
+              <a:t>a</a:t>
             </a:r>
             <a:endParaRPr lang="en-US" sz="1300" dirty="0"/>
           </a:p>
@@ -13335,7 +13223,7 @@
         </p:nvSpPr>
         <p:spPr>
           <a:xfrm>
-            <a:off x="2221992" y="2569464"/>
+            <a:off x="2938272" y="2569464"/>
             <a:ext cx="1828800" cy="201168"/>
           </a:xfrm>
           <a:prstGeom prst="rect">
@@ -13360,7 +13248,7 @@
                 <a:ea typeface="Calibri" pitchFamily="34" charset="-122"/>
                 <a:cs typeface="Calibri" pitchFamily="34" charset="-120"/>
               </a:rPr>
-              <a:t>to be alive, exist</a:t>
+              <a:t>in a state of</a:t>
             </a:r>
             <a:endParaRPr lang="en-US" sz="850" dirty="0"/>
           </a:p>
@@ -13374,7 +13262,7 @@
         </p:nvSpPr>
         <p:spPr>
           <a:xfrm>
-            <a:off x="4370832" y="2258568"/>
+            <a:off x="5803392" y="2258568"/>
             <a:ext cx="1828800" cy="292608"/>
           </a:xfrm>
           <a:prstGeom prst="rect">
@@ -13383,11 +13271,11 @@
             </a:avLst>
           </a:prstGeom>
           <a:solidFill>
-            <a:srgbClr val="FCE7F3"/>
+            <a:srgbClr val="CCFBF1"/>
           </a:solidFill>
           <a:ln w="19050">
             <a:solidFill>
-              <a:srgbClr val="DB2777"/>
+              <a:srgbClr val="0D9488"/>
             </a:solidFill>
             <a:prstDash val="solid"/>
           </a:ln>
@@ -13408,7 +13296,7 @@
         </p:nvSpPr>
         <p:spPr>
           <a:xfrm>
-            <a:off x="4370832" y="2258568"/>
+            <a:off x="5803392" y="2258568"/>
             <a:ext cx="1828800" cy="292608"/>
           </a:xfrm>
           <a:prstGeom prst="rect">
@@ -13427,13 +13315,13 @@
             <a:r>
               <a:rPr lang="en-US" sz="1300" b="1" dirty="0">
                 <a:solidFill>
-                  <a:srgbClr val="9D174D"/>
+                  <a:srgbClr val="0F766E"/>
                 </a:solidFill>
                 <a:latin typeface="Trebuchet MS" pitchFamily="34" charset="0"/>
                 <a:ea typeface="Trebuchet MS" pitchFamily="34" charset="-122"/>
                 <a:cs typeface="Trebuchet MS" pitchFamily="34" charset="-120"/>
               </a:rPr>
-              <a:t>li</a:t>
+              <a:t>live</a:t>
             </a:r>
             <a:endParaRPr lang="en-US" sz="1300" dirty="0"/>
           </a:p>
@@ -13447,7 +13335,7 @@
         </p:nvSpPr>
         <p:spPr>
           <a:xfrm>
-            <a:off x="4370832" y="2569464"/>
+            <a:off x="5803392" y="2569464"/>
             <a:ext cx="1828800" cy="201168"/>
           </a:xfrm>
           <a:prstGeom prst="rect">
@@ -13472,7 +13360,7 @@
                 <a:ea typeface="Calibri" pitchFamily="34" charset="-122"/>
                 <a:cs typeface="Calibri" pitchFamily="34" charset="-120"/>
               </a:rPr>
-              <a:t>connecting form</a:t>
+              <a:t>to be alive, exist</a:t>
             </a:r>
             <a:endParaRPr lang="en-US" sz="850" dirty="0"/>
           </a:p>
@@ -13486,30 +13374,23 @@
         </p:nvSpPr>
         <p:spPr>
           <a:xfrm>
-            <a:off x="6519672" y="2258568"/>
-            <a:ext cx="1828800" cy="292608"/>
+            <a:off x="365760" y="3273552"/>
+            <a:ext cx="1371600" cy="658368"/>
           </a:xfrm>
           <a:prstGeom prst="rect">
             <a:avLst>
-              <a:gd name="adj" fmla="val 25000"/>
+              <a:gd name="adj" fmla="val 8333"/>
             </a:avLst>
           </a:prstGeom>
           <a:solidFill>
-            <a:srgbClr val="FCE7F3"/>
-          </a:solidFill>
-          <a:ln w="19050">
-            <a:solidFill>
-              <a:srgbClr val="DB2777"/>
-            </a:solidFill>
-            <a:prstDash val="solid"/>
-          </a:ln>
-          <a:effectLst>
-            <a:outerShdw sx="100000" sy="100000" kx="0" ky="0" algn="bl" rotWithShape="0" blurRad="101600" dist="38100" dir="8100000">
-              <a:srgbClr val="000000">
-                <a:alpha val="12000"/>
-              </a:srgbClr>
-            </a:outerShdw>
-          </a:effectLst>
+            <a:srgbClr val="E2E8F0"/>
+          </a:solidFill>
+          <a:ln w="12700">
+            <a:solidFill>
+              <a:srgbClr val="E2E8F0"/>
+            </a:solidFill>
+            <a:prstDash val="solid"/>
+          </a:ln>
         </p:spPr>
       </p:sp>
       <p:sp>
@@ -13520,8 +13401,8 @@
         </p:nvSpPr>
         <p:spPr>
           <a:xfrm>
-            <a:off x="6519672" y="2258568"/>
-            <a:ext cx="1828800" cy="292608"/>
+            <a:off x="365760" y="3273552"/>
+            <a:ext cx="1371600" cy="658368"/>
           </a:xfrm>
           <a:prstGeom prst="rect">
             <a:avLst/>
@@ -13537,69 +13418,30 @@
               <a:buNone/>
             </a:pPr>
             <a:r>
-              <a:rPr lang="en-US" sz="1300" b="1" dirty="0">
-                <a:solidFill>
-                  <a:srgbClr val="9D174D"/>
+              <a:rPr lang="en-US" sz="1100" b="1" dirty="0">
+                <a:solidFill>
+                  <a:srgbClr val="475569"/>
                 </a:solidFill>
                 <a:latin typeface="Trebuchet MS" pitchFamily="34" charset="0"/>
                 <a:ea typeface="Trebuchet MS" pitchFamily="34" charset="-122"/>
                 <a:cs typeface="Trebuchet MS" pitchFamily="34" charset="-120"/>
               </a:rPr>
-              <a:t>hood</a:t>
-            </a:r>
-            <a:endParaRPr lang="en-US" sz="1300" dirty="0"/>
-          </a:p>
-        </p:txBody>
-      </p:sp>
-      <p:sp>
-        <p:nvSpPr>
-          <p:cNvPr id="24" name="Text 22"/>
-          <p:cNvSpPr/>
-          <p:nvPr/>
-        </p:nvSpPr>
-        <p:spPr>
-          <a:xfrm>
-            <a:off x="6519672" y="2569464"/>
-            <a:ext cx="1828800" cy="201168"/>
-          </a:xfrm>
-          <a:prstGeom prst="rect">
-            <a:avLst/>
-          </a:prstGeom>
-          <a:noFill/>
-          <a:ln/>
-        </p:spPr>
-        <p:txBody>
-          <a:bodyPr wrap="square" lIns="0" tIns="0" rIns="0" bIns="0" rtlCol="0" anchor="t"/>
-          <a:lstStyle/>
-          <a:p>
-            <a:pPr algn="ctr" indent="0" marL="0">
-              <a:buNone/>
-            </a:pPr>
-            <a:r>
-              <a:rPr lang="en-US" sz="850" dirty="0">
-                <a:solidFill>
-                  <a:srgbClr val="475569"/>
-                </a:solidFill>
-                <a:latin typeface="Calibri" pitchFamily="34" charset="0"/>
-                <a:ea typeface="Calibri" pitchFamily="34" charset="-122"/>
-                <a:cs typeface="Calibri" pitchFamily="34" charset="-120"/>
-              </a:rPr>
-              <a:t>state or condition of</a:t>
-            </a:r>
-            <a:endParaRPr lang="en-US" sz="850" dirty="0"/>
-          </a:p>
-        </p:txBody>
-      </p:sp>
-      <p:sp>
-        <p:nvSpPr>
-          <p:cNvPr id="25" name="Shape 23"/>
-          <p:cNvSpPr/>
-          <p:nvPr/>
-        </p:nvSpPr>
-        <p:spPr>
-          <a:xfrm>
-            <a:off x="365760" y="3273552"/>
-            <a:ext cx="1371600" cy="658368"/>
+              <a:t>Syllables</a:t>
+            </a:r>
+            <a:endParaRPr lang="en-US" sz="1100" dirty="0"/>
+          </a:p>
+        </p:txBody>
+      </p:sp>
+      <p:sp>
+        <p:nvSpPr>
+          <p:cNvPr id="24" name="Shape 22"/>
+          <p:cNvSpPr/>
+          <p:nvPr/>
+        </p:nvSpPr>
+        <p:spPr>
+          <a:xfrm>
+            <a:off x="1874520" y="3273552"/>
+            <a:ext cx="6903720" cy="658368"/>
           </a:xfrm>
           <a:prstGeom prst="rect">
             <a:avLst>
@@ -13607,11 +13449,38 @@
             </a:avLst>
           </a:prstGeom>
           <a:solidFill>
-            <a:srgbClr val="E2E8F0"/>
-          </a:solidFill>
-          <a:ln w="12700">
-            <a:solidFill>
-              <a:srgbClr val="E2E8F0"/>
+            <a:srgbClr val="CCFBF1"/>
+          </a:solidFill>
+          <a:ln w="12700">
+            <a:solidFill>
+              <a:srgbClr val="0D9488"/>
+            </a:solidFill>
+            <a:prstDash val="solid"/>
+          </a:ln>
+        </p:spPr>
+      </p:sp>
+      <p:sp>
+        <p:nvSpPr>
+          <p:cNvPr id="25" name="Shape 23"/>
+          <p:cNvSpPr/>
+          <p:nvPr/>
+        </p:nvSpPr>
+        <p:spPr>
+          <a:xfrm>
+            <a:off x="2999232" y="3364992"/>
+            <a:ext cx="1645920" cy="475488"/>
+          </a:xfrm>
+          <a:prstGeom prst="rect">
+            <a:avLst>
+              <a:gd name="adj" fmla="val 9615"/>
+            </a:avLst>
+          </a:prstGeom>
+          <a:solidFill>
+            <a:srgbClr val="FFFFFF"/>
+          </a:solidFill>
+          <a:ln w="12700">
+            <a:solidFill>
+              <a:srgbClr val="0D9488"/>
             </a:solidFill>
             <a:prstDash val="solid"/>
           </a:ln>
@@ -13625,8 +13494,8 @@
         </p:nvSpPr>
         <p:spPr>
           <a:xfrm>
-            <a:off x="365760" y="3273552"/>
-            <a:ext cx="1371600" cy="658368"/>
+            <a:off x="2999232" y="3364992"/>
+            <a:ext cx="1645920" cy="475488"/>
           </a:xfrm>
           <a:prstGeom prst="rect">
             <a:avLst/>
@@ -13642,46 +13511,58 @@
               <a:buNone/>
             </a:pPr>
             <a:r>
-              <a:rPr lang="en-US" sz="1100" b="1" dirty="0">
-                <a:solidFill>
-                  <a:srgbClr val="475569"/>
+              <a:rPr lang="en-US" sz="1400" b="1" dirty="0">
+                <a:solidFill>
+                  <a:srgbClr val="0D9488"/>
                 </a:solidFill>
                 <a:latin typeface="Trebuchet MS" pitchFamily="34" charset="0"/>
                 <a:ea typeface="Trebuchet MS" pitchFamily="34" charset="-122"/>
                 <a:cs typeface="Trebuchet MS" pitchFamily="34" charset="-120"/>
               </a:rPr>
-              <a:t>Syllables</a:t>
-            </a:r>
-            <a:endParaRPr lang="en-US" sz="1100" dirty="0"/>
-          </a:p>
-        </p:txBody>
-      </p:sp>
-      <p:sp>
-        <p:nvSpPr>
-          <p:cNvPr id="27" name="Shape 25"/>
-          <p:cNvSpPr/>
-          <p:nvPr/>
-        </p:nvSpPr>
-        <p:spPr>
-          <a:xfrm>
-            <a:off x="1874520" y="3273552"/>
-            <a:ext cx="6903720" cy="658368"/>
-          </a:xfrm>
-          <a:prstGeom prst="rect">
-            <a:avLst>
-              <a:gd name="adj" fmla="val 8333"/>
-            </a:avLst>
-          </a:prstGeom>
-          <a:solidFill>
-            <a:srgbClr val="CCFBF1"/>
-          </a:solidFill>
-          <a:ln w="12700">
-            <a:solidFill>
-              <a:srgbClr val="0D9488"/>
-            </a:solidFill>
-            <a:prstDash val="solid"/>
-          </a:ln>
-        </p:spPr>
+              <a:t>a</a:t>
+            </a:r>
+            <a:endParaRPr lang="en-US" sz="1400" dirty="0"/>
+          </a:p>
+        </p:txBody>
+      </p:sp>
+      <p:sp>
+        <p:nvSpPr>
+          <p:cNvPr id="27" name="Text 25"/>
+          <p:cNvSpPr/>
+          <p:nvPr/>
+        </p:nvSpPr>
+        <p:spPr>
+          <a:xfrm>
+            <a:off x="4645152" y="3364992"/>
+            <a:ext cx="1097280" cy="475488"/>
+          </a:xfrm>
+          <a:prstGeom prst="rect">
+            <a:avLst/>
+          </a:prstGeom>
+          <a:noFill/>
+          <a:ln/>
+        </p:spPr>
+        <p:txBody>
+          <a:bodyPr wrap="square" lIns="0" tIns="0" rIns="0" bIns="0" rtlCol="0" anchor="ctr"/>
+          <a:lstStyle/>
+          <a:p>
+            <a:pPr algn="ctr" indent="0" marL="0">
+              <a:buNone/>
+            </a:pPr>
+            <a:r>
+              <a:rPr lang="en-US" sz="1600" b="1" dirty="0">
+                <a:solidFill>
+                  <a:srgbClr val="0D9488"/>
+                </a:solidFill>
+                <a:latin typeface="Trebuchet MS" pitchFamily="34" charset="0"/>
+                <a:ea typeface="Trebuchet MS" pitchFamily="34" charset="-122"/>
+                <a:cs typeface="Trebuchet MS" pitchFamily="34" charset="-120"/>
+              </a:rPr>
+              <a:t>·</a:t>
+            </a:r>
+            <a:endParaRPr lang="en-US" sz="1600" dirty="0"/>
+          </a:p>
+        </p:txBody>
       </p:sp>
       <p:sp>
         <p:nvSpPr>
@@ -13691,7 +13572,7 @@
         </p:nvSpPr>
         <p:spPr>
           <a:xfrm>
-            <a:off x="2313432" y="3364992"/>
+            <a:off x="5742432" y="3364992"/>
             <a:ext cx="1645920" cy="475488"/>
           </a:xfrm>
           <a:prstGeom prst="rect">
@@ -13718,7 +13599,7 @@
         </p:nvSpPr>
         <p:spPr>
           <a:xfrm>
-            <a:off x="2313432" y="3364992"/>
+            <a:off x="5742432" y="3364992"/>
             <a:ext cx="1645920" cy="475488"/>
           </a:xfrm>
           <a:prstGeom prst="rect">
@@ -13751,14 +13632,41 @@
       </p:sp>
       <p:sp>
         <p:nvSpPr>
-          <p:cNvPr id="30" name="Text 28"/>
-          <p:cNvSpPr/>
-          <p:nvPr/>
-        </p:nvSpPr>
-        <p:spPr>
-          <a:xfrm>
-            <a:off x="3959352" y="3364992"/>
-            <a:ext cx="411480" cy="475488"/>
+          <p:cNvPr id="30" name="Shape 28"/>
+          <p:cNvSpPr/>
+          <p:nvPr/>
+        </p:nvSpPr>
+        <p:spPr>
+          <a:xfrm>
+            <a:off x="365760" y="4096512"/>
+            <a:ext cx="1371600" cy="804672"/>
+          </a:xfrm>
+          <a:prstGeom prst="rect">
+            <a:avLst>
+              <a:gd name="adj" fmla="val 6818"/>
+            </a:avLst>
+          </a:prstGeom>
+          <a:solidFill>
+            <a:srgbClr val="E2E8F0"/>
+          </a:solidFill>
+          <a:ln w="12700">
+            <a:solidFill>
+              <a:srgbClr val="E2E8F0"/>
+            </a:solidFill>
+            <a:prstDash val="solid"/>
+          </a:ln>
+        </p:spPr>
+      </p:sp>
+      <p:sp>
+        <p:nvSpPr>
+          <p:cNvPr id="31" name="Text 29"/>
+          <p:cNvSpPr/>
+          <p:nvPr/>
+        </p:nvSpPr>
+        <p:spPr>
+          <a:xfrm>
+            <a:off x="365760" y="4096512"/>
+            <a:ext cx="1371600" cy="804672"/>
           </a:xfrm>
           <a:prstGeom prst="rect">
             <a:avLst/>
@@ -13774,201 +13682,30 @@
               <a:buNone/>
             </a:pPr>
             <a:r>
-              <a:rPr lang="en-US" sz="1600" b="1" dirty="0">
-                <a:solidFill>
-                  <a:srgbClr val="0D9488"/>
+              <a:rPr lang="en-US" sz="1100" b="1" dirty="0">
+                <a:solidFill>
+                  <a:srgbClr val="475569"/>
                 </a:solidFill>
                 <a:latin typeface="Trebuchet MS" pitchFamily="34" charset="0"/>
                 <a:ea typeface="Trebuchet MS" pitchFamily="34" charset="-122"/>
                 <a:cs typeface="Trebuchet MS" pitchFamily="34" charset="-120"/>
               </a:rPr>
-              <a:t>·</a:t>
-            </a:r>
-            <a:endParaRPr lang="en-US" sz="1600" dirty="0"/>
-          </a:p>
-        </p:txBody>
-      </p:sp>
-      <p:sp>
-        <p:nvSpPr>
-          <p:cNvPr id="31" name="Shape 29"/>
-          <p:cNvSpPr/>
-          <p:nvPr/>
-        </p:nvSpPr>
-        <p:spPr>
-          <a:xfrm>
-            <a:off x="4370832" y="3364992"/>
-            <a:ext cx="1645920" cy="475488"/>
-          </a:xfrm>
-          <a:prstGeom prst="rect">
-            <a:avLst>
-              <a:gd name="adj" fmla="val 9615"/>
-            </a:avLst>
-          </a:prstGeom>
-          <a:solidFill>
-            <a:srgbClr val="FFFFFF"/>
-          </a:solidFill>
-          <a:ln w="12700">
-            <a:solidFill>
-              <a:srgbClr val="0D9488"/>
-            </a:solidFill>
-            <a:prstDash val="solid"/>
-          </a:ln>
-        </p:spPr>
-      </p:sp>
-      <p:sp>
-        <p:nvSpPr>
-          <p:cNvPr id="32" name="Text 30"/>
-          <p:cNvSpPr/>
-          <p:nvPr/>
-        </p:nvSpPr>
-        <p:spPr>
-          <a:xfrm>
-            <a:off x="4370832" y="3364992"/>
-            <a:ext cx="1645920" cy="475488"/>
-          </a:xfrm>
-          <a:prstGeom prst="rect">
-            <a:avLst/>
-          </a:prstGeom>
-          <a:noFill/>
-          <a:ln/>
-        </p:spPr>
-        <p:txBody>
-          <a:bodyPr wrap="square" lIns="0" tIns="0" rIns="0" bIns="0" rtlCol="0" anchor="ctr"/>
-          <a:lstStyle/>
-          <a:p>
-            <a:pPr algn="ctr" indent="0" marL="0">
-              <a:buNone/>
-            </a:pPr>
-            <a:r>
-              <a:rPr lang="en-US" sz="1400" b="1" dirty="0">
-                <a:solidFill>
-                  <a:srgbClr val="0D9488"/>
-                </a:solidFill>
-                <a:latin typeface="Trebuchet MS" pitchFamily="34" charset="0"/>
-                <a:ea typeface="Trebuchet MS" pitchFamily="34" charset="-122"/>
-                <a:cs typeface="Trebuchet MS" pitchFamily="34" charset="-120"/>
-              </a:rPr>
-              <a:t>li</a:t>
-            </a:r>
-            <a:endParaRPr lang="en-US" sz="1400" dirty="0"/>
-          </a:p>
-        </p:txBody>
-      </p:sp>
-      <p:sp>
-        <p:nvSpPr>
-          <p:cNvPr id="33" name="Text 31"/>
-          <p:cNvSpPr/>
-          <p:nvPr/>
-        </p:nvSpPr>
-        <p:spPr>
-          <a:xfrm>
-            <a:off x="6016752" y="3364992"/>
-            <a:ext cx="411480" cy="475488"/>
-          </a:xfrm>
-          <a:prstGeom prst="rect">
-            <a:avLst/>
-          </a:prstGeom>
-          <a:noFill/>
-          <a:ln/>
-        </p:spPr>
-        <p:txBody>
-          <a:bodyPr wrap="square" lIns="0" tIns="0" rIns="0" bIns="0" rtlCol="0" anchor="ctr"/>
-          <a:lstStyle/>
-          <a:p>
-            <a:pPr algn="ctr" indent="0" marL="0">
-              <a:buNone/>
-            </a:pPr>
-            <a:r>
-              <a:rPr lang="en-US" sz="1600" b="1" dirty="0">
-                <a:solidFill>
-                  <a:srgbClr val="0D9488"/>
-                </a:solidFill>
-                <a:latin typeface="Trebuchet MS" pitchFamily="34" charset="0"/>
-                <a:ea typeface="Trebuchet MS" pitchFamily="34" charset="-122"/>
-                <a:cs typeface="Trebuchet MS" pitchFamily="34" charset="-120"/>
-              </a:rPr>
-              <a:t>·</a:t>
-            </a:r>
-            <a:endParaRPr lang="en-US" sz="1600" dirty="0"/>
-          </a:p>
-        </p:txBody>
-      </p:sp>
-      <p:sp>
-        <p:nvSpPr>
-          <p:cNvPr id="34" name="Shape 32"/>
-          <p:cNvSpPr/>
-          <p:nvPr/>
-        </p:nvSpPr>
-        <p:spPr>
-          <a:xfrm>
-            <a:off x="6428232" y="3364992"/>
-            <a:ext cx="1645920" cy="475488"/>
-          </a:xfrm>
-          <a:prstGeom prst="rect">
-            <a:avLst>
-              <a:gd name="adj" fmla="val 9615"/>
-            </a:avLst>
-          </a:prstGeom>
-          <a:solidFill>
-            <a:srgbClr val="FFFFFF"/>
-          </a:solidFill>
-          <a:ln w="12700">
-            <a:solidFill>
-              <a:srgbClr val="0D9488"/>
-            </a:solidFill>
-            <a:prstDash val="solid"/>
-          </a:ln>
-        </p:spPr>
-      </p:sp>
-      <p:sp>
-        <p:nvSpPr>
-          <p:cNvPr id="35" name="Text 33"/>
-          <p:cNvSpPr/>
-          <p:nvPr/>
-        </p:nvSpPr>
-        <p:spPr>
-          <a:xfrm>
-            <a:off x="6428232" y="3364992"/>
-            <a:ext cx="1645920" cy="475488"/>
-          </a:xfrm>
-          <a:prstGeom prst="rect">
-            <a:avLst/>
-          </a:prstGeom>
-          <a:noFill/>
-          <a:ln/>
-        </p:spPr>
-        <p:txBody>
-          <a:bodyPr wrap="square" lIns="0" tIns="0" rIns="0" bIns="0" rtlCol="0" anchor="ctr"/>
-          <a:lstStyle/>
-          <a:p>
-            <a:pPr algn="ctr" indent="0" marL="0">
-              <a:buNone/>
-            </a:pPr>
-            <a:r>
-              <a:rPr lang="en-US" sz="1400" b="1" dirty="0">
-                <a:solidFill>
-                  <a:srgbClr val="0D9488"/>
-                </a:solidFill>
-                <a:latin typeface="Trebuchet MS" pitchFamily="34" charset="0"/>
-                <a:ea typeface="Trebuchet MS" pitchFamily="34" charset="-122"/>
-                <a:cs typeface="Trebuchet MS" pitchFamily="34" charset="-120"/>
-              </a:rPr>
-              <a:t>hood</a:t>
-            </a:r>
-            <a:endParaRPr lang="en-US" sz="1400" dirty="0"/>
-          </a:p>
-        </p:txBody>
-      </p:sp>
-      <p:sp>
-        <p:nvSpPr>
-          <p:cNvPr id="36" name="Shape 34"/>
-          <p:cNvSpPr/>
-          <p:nvPr/>
-        </p:nvSpPr>
-        <p:spPr>
-          <a:xfrm>
-            <a:off x="365760" y="4096512"/>
-            <a:ext cx="1371600" cy="804672"/>
+              <a:t>Phonemes</a:t>
+            </a:r>
+            <a:endParaRPr lang="en-US" sz="1100" dirty="0"/>
+          </a:p>
+        </p:txBody>
+      </p:sp>
+      <p:sp>
+        <p:nvSpPr>
+          <p:cNvPr id="32" name="Shape 30"/>
+          <p:cNvSpPr/>
+          <p:nvPr/>
+        </p:nvSpPr>
+        <p:spPr>
+          <a:xfrm>
+            <a:off x="1874520" y="4096512"/>
+            <a:ext cx="6903720" cy="804672"/>
           </a:xfrm>
           <a:prstGeom prst="rect">
             <a:avLst>
@@ -13976,85 +13713,19 @@
             </a:avLst>
           </a:prstGeom>
           <a:solidFill>
-            <a:srgbClr val="E2E8F0"/>
+            <a:srgbClr val="F8FAFC"/>
           </a:solidFill>
           <a:ln w="12700">
             <a:solidFill>
               <a:srgbClr val="E2E8F0"/>
             </a:solidFill>
-            <a:prstDash val="solid"/>
-          </a:ln>
-        </p:spPr>
-      </p:sp>
-      <p:sp>
-        <p:nvSpPr>
-          <p:cNvPr id="37" name="Text 35"/>
-          <p:cNvSpPr/>
-          <p:nvPr/>
-        </p:nvSpPr>
-        <p:spPr>
-          <a:xfrm>
-            <a:off x="365760" y="4096512"/>
-            <a:ext cx="1371600" cy="804672"/>
-          </a:xfrm>
-          <a:prstGeom prst="rect">
-            <a:avLst/>
-          </a:prstGeom>
-          <a:noFill/>
-          <a:ln/>
-        </p:spPr>
-        <p:txBody>
-          <a:bodyPr wrap="square" lIns="0" tIns="0" rIns="0" bIns="0" rtlCol="0" anchor="ctr"/>
-          <a:lstStyle/>
-          <a:p>
-            <a:pPr algn="ctr" indent="0" marL="0">
-              <a:buNone/>
-            </a:pPr>
-            <a:r>
-              <a:rPr lang="en-US" sz="1100" b="1" dirty="0">
-                <a:solidFill>
-                  <a:srgbClr val="475569"/>
-                </a:solidFill>
-                <a:latin typeface="Trebuchet MS" pitchFamily="34" charset="0"/>
-                <a:ea typeface="Trebuchet MS" pitchFamily="34" charset="-122"/>
-                <a:cs typeface="Trebuchet MS" pitchFamily="34" charset="-120"/>
-              </a:rPr>
-              <a:t>Phonemes</a:t>
-            </a:r>
-            <a:endParaRPr lang="en-US" sz="1100" dirty="0"/>
-          </a:p>
-        </p:txBody>
-      </p:sp>
-      <p:sp>
-        <p:nvSpPr>
-          <p:cNvPr id="38" name="Shape 36"/>
-          <p:cNvSpPr/>
-          <p:nvPr/>
-        </p:nvSpPr>
-        <p:spPr>
-          <a:xfrm>
-            <a:off x="1874520" y="4096512"/>
-            <a:ext cx="6903720" cy="804672"/>
-          </a:xfrm>
-          <a:prstGeom prst="rect">
-            <a:avLst>
-              <a:gd name="adj" fmla="val 6818"/>
-            </a:avLst>
-          </a:prstGeom>
-          <a:solidFill>
-            <a:srgbClr val="F8FAFC"/>
-          </a:solidFill>
-          <a:ln w="12700">
-            <a:solidFill>
-              <a:srgbClr val="E2E8F0"/>
-            </a:solidFill>
             <a:prstDash val="dash"/>
           </a:ln>
         </p:spPr>
       </p:sp>
       <p:sp>
         <p:nvSpPr>
-          <p:cNvPr id="39" name="Text 37"/>
+          <p:cNvPr id="33" name="Text 31"/>
           <p:cNvSpPr/>
           <p:nvPr/>
         </p:nvSpPr>
@@ -14781,7 +14452,7 @@
                 <a:ea typeface="Trebuchet MS" pitchFamily="34" charset="-122"/>
                 <a:cs typeface="Trebuchet MS" pitchFamily="34" charset="-120"/>
               </a:rPr>
-              <a:t>livelihood</a:t>
+              <a:t>alive</a:t>
             </a:r>
             <a:endParaRPr lang="en-US" sz="2800" dirty="0"/>
           </a:p>
@@ -14861,7 +14532,7 @@
         </p:nvSpPr>
         <p:spPr>
           <a:xfrm>
-            <a:off x="2221992" y="2258568"/>
+            <a:off x="2938272" y="2258568"/>
             <a:ext cx="1828800" cy="292608"/>
           </a:xfrm>
           <a:prstGeom prst="rect">
@@ -14870,11 +14541,11 @@
             </a:avLst>
           </a:prstGeom>
           <a:solidFill>
-            <a:srgbClr val="CCFBF1"/>
+            <a:srgbClr val="DDD6FE"/>
           </a:solidFill>
           <a:ln w="19050">
             <a:solidFill>
-              <a:srgbClr val="0D9488"/>
+              <a:srgbClr val="7C3AED"/>
             </a:solidFill>
             <a:prstDash val="solid"/>
           </a:ln>
@@ -14895,7 +14566,7 @@
         </p:nvSpPr>
         <p:spPr>
           <a:xfrm>
-            <a:off x="2221992" y="2258568"/>
+            <a:off x="2938272" y="2258568"/>
             <a:ext cx="1828800" cy="292608"/>
           </a:xfrm>
           <a:prstGeom prst="rect">
@@ -14914,13 +14585,13 @@
             <a:r>
               <a:rPr lang="en-US" sz="1300" b="1" dirty="0">
                 <a:solidFill>
-                  <a:srgbClr val="0F766E"/>
+                  <a:srgbClr val="4C1D95"/>
                 </a:solidFill>
                 <a:latin typeface="Trebuchet MS" pitchFamily="34" charset="0"/>
                 <a:ea typeface="Trebuchet MS" pitchFamily="34" charset="-122"/>
                 <a:cs typeface="Trebuchet MS" pitchFamily="34" charset="-120"/>
               </a:rPr>
-              <a:t>live</a:t>
+              <a:t>a</a:t>
             </a:r>
             <a:endParaRPr lang="en-US" sz="1300" dirty="0"/>
           </a:p>
@@ -14934,7 +14605,7 @@
         </p:nvSpPr>
         <p:spPr>
           <a:xfrm>
-            <a:off x="2221992" y="2569464"/>
+            <a:off x="2938272" y="2569464"/>
             <a:ext cx="1828800" cy="201168"/>
           </a:xfrm>
           <a:prstGeom prst="rect">
@@ -14959,7 +14630,7 @@
                 <a:ea typeface="Calibri" pitchFamily="34" charset="-122"/>
                 <a:cs typeface="Calibri" pitchFamily="34" charset="-120"/>
               </a:rPr>
-              <a:t>to be alive, exist</a:t>
+              <a:t>in a state of</a:t>
             </a:r>
             <a:endParaRPr lang="en-US" sz="850" dirty="0"/>
           </a:p>
@@ -14973,7 +14644,7 @@
         </p:nvSpPr>
         <p:spPr>
           <a:xfrm>
-            <a:off x="4370832" y="2258568"/>
+            <a:off x="5803392" y="2258568"/>
             <a:ext cx="1828800" cy="292608"/>
           </a:xfrm>
           <a:prstGeom prst="rect">
@@ -14982,11 +14653,11 @@
             </a:avLst>
           </a:prstGeom>
           <a:solidFill>
-            <a:srgbClr val="FCE7F3"/>
+            <a:srgbClr val="CCFBF1"/>
           </a:solidFill>
           <a:ln w="19050">
             <a:solidFill>
-              <a:srgbClr val="DB2777"/>
+              <a:srgbClr val="0D9488"/>
             </a:solidFill>
             <a:prstDash val="solid"/>
           </a:ln>
@@ -15007,7 +14678,7 @@
         </p:nvSpPr>
         <p:spPr>
           <a:xfrm>
-            <a:off x="4370832" y="2258568"/>
+            <a:off x="5803392" y="2258568"/>
             <a:ext cx="1828800" cy="292608"/>
           </a:xfrm>
           <a:prstGeom prst="rect">
@@ -15026,13 +14697,13 @@
             <a:r>
               <a:rPr lang="en-US" sz="1300" b="1" dirty="0">
                 <a:solidFill>
-                  <a:srgbClr val="9D174D"/>
+                  <a:srgbClr val="0F766E"/>
                 </a:solidFill>
                 <a:latin typeface="Trebuchet MS" pitchFamily="34" charset="0"/>
                 <a:ea typeface="Trebuchet MS" pitchFamily="34" charset="-122"/>
                 <a:cs typeface="Trebuchet MS" pitchFamily="34" charset="-120"/>
               </a:rPr>
-              <a:t>li</a:t>
+              <a:t>live</a:t>
             </a:r>
             <a:endParaRPr lang="en-US" sz="1300" dirty="0"/>
           </a:p>
@@ -15046,7 +14717,7 @@
         </p:nvSpPr>
         <p:spPr>
           <a:xfrm>
-            <a:off x="4370832" y="2569464"/>
+            <a:off x="5803392" y="2569464"/>
             <a:ext cx="1828800" cy="201168"/>
           </a:xfrm>
           <a:prstGeom prst="rect">
@@ -15071,7 +14742,7 @@
                 <a:ea typeface="Calibri" pitchFamily="34" charset="-122"/>
                 <a:cs typeface="Calibri" pitchFamily="34" charset="-120"/>
               </a:rPr>
-              <a:t>connecting form</a:t>
+              <a:t>to be alive, exist</a:t>
             </a:r>
             <a:endParaRPr lang="en-US" sz="850" dirty="0"/>
           </a:p>
@@ -15085,30 +14756,23 @@
         </p:nvSpPr>
         <p:spPr>
           <a:xfrm>
-            <a:off x="6519672" y="2258568"/>
-            <a:ext cx="1828800" cy="292608"/>
+            <a:off x="365760" y="3273552"/>
+            <a:ext cx="1371600" cy="658368"/>
           </a:xfrm>
           <a:prstGeom prst="rect">
             <a:avLst>
-              <a:gd name="adj" fmla="val 25000"/>
+              <a:gd name="adj" fmla="val 8333"/>
             </a:avLst>
           </a:prstGeom>
           <a:solidFill>
-            <a:srgbClr val="FCE7F3"/>
-          </a:solidFill>
-          <a:ln w="19050">
-            <a:solidFill>
-              <a:srgbClr val="DB2777"/>
-            </a:solidFill>
-            <a:prstDash val="solid"/>
-          </a:ln>
-          <a:effectLst>
-            <a:outerShdw sx="100000" sy="100000" kx="0" ky="0" algn="bl" rotWithShape="0" blurRad="101600" dist="38100" dir="8100000">
-              <a:srgbClr val="000000">
-                <a:alpha val="12000"/>
-              </a:srgbClr>
-            </a:outerShdw>
-          </a:effectLst>
+            <a:srgbClr val="E2E8F0"/>
+          </a:solidFill>
+          <a:ln w="12700">
+            <a:solidFill>
+              <a:srgbClr val="E2E8F0"/>
+            </a:solidFill>
+            <a:prstDash val="solid"/>
+          </a:ln>
         </p:spPr>
       </p:sp>
       <p:sp>
@@ -15119,8 +14783,8 @@
         </p:nvSpPr>
         <p:spPr>
           <a:xfrm>
-            <a:off x="6519672" y="2258568"/>
-            <a:ext cx="1828800" cy="292608"/>
+            <a:off x="365760" y="3273552"/>
+            <a:ext cx="1371600" cy="658368"/>
           </a:xfrm>
           <a:prstGeom prst="rect">
             <a:avLst/>
@@ -15136,69 +14800,30 @@
               <a:buNone/>
             </a:pPr>
             <a:r>
-              <a:rPr lang="en-US" sz="1300" b="1" dirty="0">
-                <a:solidFill>
-                  <a:srgbClr val="9D174D"/>
+              <a:rPr lang="en-US" sz="1100" b="1" dirty="0">
+                <a:solidFill>
+                  <a:srgbClr val="475569"/>
                 </a:solidFill>
                 <a:latin typeface="Trebuchet MS" pitchFamily="34" charset="0"/>
                 <a:ea typeface="Trebuchet MS" pitchFamily="34" charset="-122"/>
                 <a:cs typeface="Trebuchet MS" pitchFamily="34" charset="-120"/>
               </a:rPr>
-              <a:t>hood</a:t>
-            </a:r>
-            <a:endParaRPr lang="en-US" sz="1300" dirty="0"/>
-          </a:p>
-        </p:txBody>
-      </p:sp>
-      <p:sp>
-        <p:nvSpPr>
-          <p:cNvPr id="24" name="Text 22"/>
-          <p:cNvSpPr/>
-          <p:nvPr/>
-        </p:nvSpPr>
-        <p:spPr>
-          <a:xfrm>
-            <a:off x="6519672" y="2569464"/>
-            <a:ext cx="1828800" cy="201168"/>
-          </a:xfrm>
-          <a:prstGeom prst="rect">
-            <a:avLst/>
-          </a:prstGeom>
-          <a:noFill/>
-          <a:ln/>
-        </p:spPr>
-        <p:txBody>
-          <a:bodyPr wrap="square" lIns="0" tIns="0" rIns="0" bIns="0" rtlCol="0" anchor="t"/>
-          <a:lstStyle/>
-          <a:p>
-            <a:pPr algn="ctr" indent="0" marL="0">
-              <a:buNone/>
-            </a:pPr>
-            <a:r>
-              <a:rPr lang="en-US" sz="850" dirty="0">
-                <a:solidFill>
-                  <a:srgbClr val="475569"/>
-                </a:solidFill>
-                <a:latin typeface="Calibri" pitchFamily="34" charset="0"/>
-                <a:ea typeface="Calibri" pitchFamily="34" charset="-122"/>
-                <a:cs typeface="Calibri" pitchFamily="34" charset="-120"/>
-              </a:rPr>
-              <a:t>state or condition of</a:t>
-            </a:r>
-            <a:endParaRPr lang="en-US" sz="850" dirty="0"/>
-          </a:p>
-        </p:txBody>
-      </p:sp>
-      <p:sp>
-        <p:nvSpPr>
-          <p:cNvPr id="25" name="Shape 23"/>
-          <p:cNvSpPr/>
-          <p:nvPr/>
-        </p:nvSpPr>
-        <p:spPr>
-          <a:xfrm>
-            <a:off x="365760" y="3273552"/>
-            <a:ext cx="1371600" cy="658368"/>
+              <a:t>Syllables</a:t>
+            </a:r>
+            <a:endParaRPr lang="en-US" sz="1100" dirty="0"/>
+          </a:p>
+        </p:txBody>
+      </p:sp>
+      <p:sp>
+        <p:nvSpPr>
+          <p:cNvPr id="24" name="Shape 22"/>
+          <p:cNvSpPr/>
+          <p:nvPr/>
+        </p:nvSpPr>
+        <p:spPr>
+          <a:xfrm>
+            <a:off x="1874520" y="3273552"/>
+            <a:ext cx="6903720" cy="658368"/>
           </a:xfrm>
           <a:prstGeom prst="rect">
             <a:avLst>
@@ -15206,11 +14831,38 @@
             </a:avLst>
           </a:prstGeom>
           <a:solidFill>
-            <a:srgbClr val="E2E8F0"/>
-          </a:solidFill>
-          <a:ln w="12700">
-            <a:solidFill>
-              <a:srgbClr val="E2E8F0"/>
+            <a:srgbClr val="CCFBF1"/>
+          </a:solidFill>
+          <a:ln w="12700">
+            <a:solidFill>
+              <a:srgbClr val="0D9488"/>
+            </a:solidFill>
+            <a:prstDash val="solid"/>
+          </a:ln>
+        </p:spPr>
+      </p:sp>
+      <p:sp>
+        <p:nvSpPr>
+          <p:cNvPr id="25" name="Shape 23"/>
+          <p:cNvSpPr/>
+          <p:nvPr/>
+        </p:nvSpPr>
+        <p:spPr>
+          <a:xfrm>
+            <a:off x="2999232" y="3364992"/>
+            <a:ext cx="1645920" cy="475488"/>
+          </a:xfrm>
+          <a:prstGeom prst="rect">
+            <a:avLst>
+              <a:gd name="adj" fmla="val 9615"/>
+            </a:avLst>
+          </a:prstGeom>
+          <a:solidFill>
+            <a:srgbClr val="FFFFFF"/>
+          </a:solidFill>
+          <a:ln w="12700">
+            <a:solidFill>
+              <a:srgbClr val="0D9488"/>
             </a:solidFill>
             <a:prstDash val="solid"/>
           </a:ln>
@@ -15224,8 +14876,8 @@
         </p:nvSpPr>
         <p:spPr>
           <a:xfrm>
-            <a:off x="365760" y="3273552"/>
-            <a:ext cx="1371600" cy="658368"/>
+            <a:off x="2999232" y="3364992"/>
+            <a:ext cx="1645920" cy="475488"/>
           </a:xfrm>
           <a:prstGeom prst="rect">
             <a:avLst/>
@@ -15241,15 +14893,186 @@
               <a:buNone/>
             </a:pPr>
             <a:r>
-              <a:rPr lang="en-US" sz="1100" b="1" dirty="0">
-                <a:solidFill>
-                  <a:srgbClr val="475569"/>
+              <a:rPr lang="en-US" sz="1400" b="1" dirty="0">
+                <a:solidFill>
+                  <a:srgbClr val="0D9488"/>
                 </a:solidFill>
                 <a:latin typeface="Trebuchet MS" pitchFamily="34" charset="0"/>
                 <a:ea typeface="Trebuchet MS" pitchFamily="34" charset="-122"/>
                 <a:cs typeface="Trebuchet MS" pitchFamily="34" charset="-120"/>
               </a:rPr>
-              <a:t>Syllables</a:t>
+              <a:t>a</a:t>
+            </a:r>
+            <a:endParaRPr lang="en-US" sz="1400" dirty="0"/>
+          </a:p>
+        </p:txBody>
+      </p:sp>
+      <p:sp>
+        <p:nvSpPr>
+          <p:cNvPr id="27" name="Text 25"/>
+          <p:cNvSpPr/>
+          <p:nvPr/>
+        </p:nvSpPr>
+        <p:spPr>
+          <a:xfrm>
+            <a:off x="4645152" y="3364992"/>
+            <a:ext cx="1097280" cy="475488"/>
+          </a:xfrm>
+          <a:prstGeom prst="rect">
+            <a:avLst/>
+          </a:prstGeom>
+          <a:noFill/>
+          <a:ln/>
+        </p:spPr>
+        <p:txBody>
+          <a:bodyPr wrap="square" lIns="0" tIns="0" rIns="0" bIns="0" rtlCol="0" anchor="ctr"/>
+          <a:lstStyle/>
+          <a:p>
+            <a:pPr algn="ctr" indent="0" marL="0">
+              <a:buNone/>
+            </a:pPr>
+            <a:r>
+              <a:rPr lang="en-US" sz="1600" b="1" dirty="0">
+                <a:solidFill>
+                  <a:srgbClr val="0D9488"/>
+                </a:solidFill>
+                <a:latin typeface="Trebuchet MS" pitchFamily="34" charset="0"/>
+                <a:ea typeface="Trebuchet MS" pitchFamily="34" charset="-122"/>
+                <a:cs typeface="Trebuchet MS" pitchFamily="34" charset="-120"/>
+              </a:rPr>
+              <a:t>·</a:t>
+            </a:r>
+            <a:endParaRPr lang="en-US" sz="1600" dirty="0"/>
+          </a:p>
+        </p:txBody>
+      </p:sp>
+      <p:sp>
+        <p:nvSpPr>
+          <p:cNvPr id="28" name="Shape 26"/>
+          <p:cNvSpPr/>
+          <p:nvPr/>
+        </p:nvSpPr>
+        <p:spPr>
+          <a:xfrm>
+            <a:off x="5742432" y="3364992"/>
+            <a:ext cx="1645920" cy="475488"/>
+          </a:xfrm>
+          <a:prstGeom prst="rect">
+            <a:avLst>
+              <a:gd name="adj" fmla="val 9615"/>
+            </a:avLst>
+          </a:prstGeom>
+          <a:solidFill>
+            <a:srgbClr val="FFFFFF"/>
+          </a:solidFill>
+          <a:ln w="12700">
+            <a:solidFill>
+              <a:srgbClr val="0D9488"/>
+            </a:solidFill>
+            <a:prstDash val="solid"/>
+          </a:ln>
+        </p:spPr>
+      </p:sp>
+      <p:sp>
+        <p:nvSpPr>
+          <p:cNvPr id="29" name="Text 27"/>
+          <p:cNvSpPr/>
+          <p:nvPr/>
+        </p:nvSpPr>
+        <p:spPr>
+          <a:xfrm>
+            <a:off x="5742432" y="3364992"/>
+            <a:ext cx="1645920" cy="475488"/>
+          </a:xfrm>
+          <a:prstGeom prst="rect">
+            <a:avLst/>
+          </a:prstGeom>
+          <a:noFill/>
+          <a:ln/>
+        </p:spPr>
+        <p:txBody>
+          <a:bodyPr wrap="square" lIns="0" tIns="0" rIns="0" bIns="0" rtlCol="0" anchor="ctr"/>
+          <a:lstStyle/>
+          <a:p>
+            <a:pPr algn="ctr" indent="0" marL="0">
+              <a:buNone/>
+            </a:pPr>
+            <a:r>
+              <a:rPr lang="en-US" sz="1400" b="1" dirty="0">
+                <a:solidFill>
+                  <a:srgbClr val="0D9488"/>
+                </a:solidFill>
+                <a:latin typeface="Trebuchet MS" pitchFamily="34" charset="0"/>
+                <a:ea typeface="Trebuchet MS" pitchFamily="34" charset="-122"/>
+                <a:cs typeface="Trebuchet MS" pitchFamily="34" charset="-120"/>
+              </a:rPr>
+              <a:t>live</a:t>
+            </a:r>
+            <a:endParaRPr lang="en-US" sz="1400" dirty="0"/>
+          </a:p>
+        </p:txBody>
+      </p:sp>
+      <p:sp>
+        <p:nvSpPr>
+          <p:cNvPr id="30" name="Shape 28"/>
+          <p:cNvSpPr/>
+          <p:nvPr/>
+        </p:nvSpPr>
+        <p:spPr>
+          <a:xfrm>
+            <a:off x="365760" y="4096512"/>
+            <a:ext cx="1371600" cy="804672"/>
+          </a:xfrm>
+          <a:prstGeom prst="rect">
+            <a:avLst>
+              <a:gd name="adj" fmla="val 6818"/>
+            </a:avLst>
+          </a:prstGeom>
+          <a:solidFill>
+            <a:srgbClr val="E2E8F0"/>
+          </a:solidFill>
+          <a:ln w="12700">
+            <a:solidFill>
+              <a:srgbClr val="E2E8F0"/>
+            </a:solidFill>
+            <a:prstDash val="solid"/>
+          </a:ln>
+        </p:spPr>
+      </p:sp>
+      <p:sp>
+        <p:nvSpPr>
+          <p:cNvPr id="31" name="Text 29"/>
+          <p:cNvSpPr/>
+          <p:nvPr/>
+        </p:nvSpPr>
+        <p:spPr>
+          <a:xfrm>
+            <a:off x="365760" y="4096512"/>
+            <a:ext cx="1371600" cy="804672"/>
+          </a:xfrm>
+          <a:prstGeom prst="rect">
+            <a:avLst/>
+          </a:prstGeom>
+          <a:noFill/>
+          <a:ln/>
+        </p:spPr>
+        <p:txBody>
+          <a:bodyPr wrap="square" lIns="0" tIns="0" rIns="0" bIns="0" rtlCol="0" anchor="ctr"/>
+          <a:lstStyle/>
+          <a:p>
+            <a:pPr algn="ctr" indent="0" marL="0">
+              <a:buNone/>
+            </a:pPr>
+            <a:r>
+              <a:rPr lang="en-US" sz="1100" b="1" dirty="0">
+                <a:solidFill>
+                  <a:srgbClr val="475569"/>
+                </a:solidFill>
+                <a:latin typeface="Trebuchet MS" pitchFamily="34" charset="0"/>
+                <a:ea typeface="Trebuchet MS" pitchFamily="34" charset="-122"/>
+                <a:cs typeface="Trebuchet MS" pitchFamily="34" charset="-120"/>
+              </a:rPr>
+              <a:t>Phonemes</a:t>
             </a:r>
             <a:endParaRPr lang="en-US" sz="1100" dirty="0"/>
           </a:p>
@@ -15257,13 +15080,13 @@
       </p:sp>
       <p:sp>
         <p:nvSpPr>
-          <p:cNvPr id="27" name="Shape 25"/>
-          <p:cNvSpPr/>
-          <p:nvPr/>
-        </p:nvSpPr>
-        <p:spPr>
-          <a:xfrm>
-            <a:off x="1874520" y="3273552"/>
+          <p:cNvPr id="32" name="Shape 30"/>
+          <p:cNvSpPr/>
+          <p:nvPr/>
+        </p:nvSpPr>
+        <p:spPr>
+          <a:xfrm>
+            <a:off x="1874520" y="4096512"/>
             <a:ext cx="6903720" cy="658368"/>
           </a:xfrm>
           <a:prstGeom prst="rect">
@@ -15272,30 +15095,30 @@
             </a:avLst>
           </a:prstGeom>
           <a:solidFill>
-            <a:srgbClr val="CCFBF1"/>
-          </a:solidFill>
-          <a:ln w="12700">
-            <a:solidFill>
-              <a:srgbClr val="0D9488"/>
-            </a:solidFill>
-            <a:prstDash val="solid"/>
-          </a:ln>
-        </p:spPr>
-      </p:sp>
-      <p:sp>
-        <p:nvSpPr>
-          <p:cNvPr id="28" name="Shape 26"/>
-          <p:cNvSpPr/>
-          <p:nvPr/>
-        </p:nvSpPr>
-        <p:spPr>
-          <a:xfrm>
-            <a:off x="2313432" y="3364992"/>
-            <a:ext cx="1645920" cy="475488"/>
+            <a:srgbClr val="FCE7F3"/>
+          </a:solidFill>
+          <a:ln w="12700">
+            <a:solidFill>
+              <a:srgbClr val="DB2777"/>
+            </a:solidFill>
+            <a:prstDash val="solid"/>
+          </a:ln>
+        </p:spPr>
+      </p:sp>
+      <p:sp>
+        <p:nvSpPr>
+          <p:cNvPr id="33" name="Shape 31"/>
+          <p:cNvSpPr/>
+          <p:nvPr/>
+        </p:nvSpPr>
+        <p:spPr>
+          <a:xfrm>
+            <a:off x="2427732" y="4169664"/>
+            <a:ext cx="685800" cy="475488"/>
           </a:xfrm>
           <a:prstGeom prst="rect">
             <a:avLst>
-              <a:gd name="adj" fmla="val 9615"/>
+              <a:gd name="adj" fmla="val 7692"/>
             </a:avLst>
           </a:prstGeom>
           <a:solidFill>
@@ -15303,22 +15126,22 @@
           </a:solidFill>
           <a:ln w="12700">
             <a:solidFill>
-              <a:srgbClr val="0D9488"/>
-            </a:solidFill>
-            <a:prstDash val="solid"/>
-          </a:ln>
-        </p:spPr>
-      </p:sp>
-      <p:sp>
-        <p:nvSpPr>
-          <p:cNvPr id="29" name="Text 27"/>
-          <p:cNvSpPr/>
-          <p:nvPr/>
-        </p:nvSpPr>
-        <p:spPr>
-          <a:xfrm>
-            <a:off x="2313432" y="3364992"/>
-            <a:ext cx="1645920" cy="475488"/>
+              <a:srgbClr val="DB2777"/>
+            </a:solidFill>
+            <a:prstDash val="solid"/>
+          </a:ln>
+        </p:spPr>
+      </p:sp>
+      <p:sp>
+        <p:nvSpPr>
+          <p:cNvPr id="34" name="Text 32"/>
+          <p:cNvSpPr/>
+          <p:nvPr/>
+        </p:nvSpPr>
+        <p:spPr>
+          <a:xfrm>
+            <a:off x="2427732" y="4169664"/>
+            <a:ext cx="685800" cy="475488"/>
           </a:xfrm>
           <a:prstGeom prst="rect">
             <a:avLst/>
@@ -15334,30 +15157,57 @@
               <a:buNone/>
             </a:pPr>
             <a:r>
-              <a:rPr lang="en-US" sz="1400" b="1" dirty="0">
-                <a:solidFill>
-                  <a:srgbClr val="0D9488"/>
+              <a:rPr lang="en-US" sz="900" b="1" dirty="0">
+                <a:solidFill>
+                  <a:srgbClr val="9D174D"/>
                 </a:solidFill>
                 <a:latin typeface="Trebuchet MS" pitchFamily="34" charset="0"/>
                 <a:ea typeface="Trebuchet MS" pitchFamily="34" charset="-122"/>
                 <a:cs typeface="Trebuchet MS" pitchFamily="34" charset="-120"/>
               </a:rPr>
-              <a:t>live</a:t>
-            </a:r>
-            <a:endParaRPr lang="en-US" sz="1400" dirty="0"/>
-          </a:p>
-        </p:txBody>
-      </p:sp>
-      <p:sp>
-        <p:nvSpPr>
-          <p:cNvPr id="30" name="Text 28"/>
-          <p:cNvSpPr/>
-          <p:nvPr/>
-        </p:nvSpPr>
-        <p:spPr>
-          <a:xfrm>
-            <a:off x="3959352" y="3364992"/>
-            <a:ext cx="411480" cy="475488"/>
+              <a:t>a</a:t>
+            </a:r>
+            <a:endParaRPr lang="en-US" sz="900" dirty="0"/>
+          </a:p>
+        </p:txBody>
+      </p:sp>
+      <p:sp>
+        <p:nvSpPr>
+          <p:cNvPr id="35" name="Shape 33"/>
+          <p:cNvSpPr/>
+          <p:nvPr/>
+        </p:nvSpPr>
+        <p:spPr>
+          <a:xfrm>
+            <a:off x="3639312" y="4169664"/>
+            <a:ext cx="685800" cy="475488"/>
+          </a:xfrm>
+          <a:prstGeom prst="rect">
+            <a:avLst>
+              <a:gd name="adj" fmla="val 7692"/>
+            </a:avLst>
+          </a:prstGeom>
+          <a:solidFill>
+            <a:srgbClr val="FFFFFF"/>
+          </a:solidFill>
+          <a:ln w="12700">
+            <a:solidFill>
+              <a:srgbClr val="DB2777"/>
+            </a:solidFill>
+            <a:prstDash val="solid"/>
+          </a:ln>
+        </p:spPr>
+      </p:sp>
+      <p:sp>
+        <p:nvSpPr>
+          <p:cNvPr id="36" name="Text 34"/>
+          <p:cNvSpPr/>
+          <p:nvPr/>
+        </p:nvSpPr>
+        <p:spPr>
+          <a:xfrm>
+            <a:off x="3639312" y="4169664"/>
+            <a:ext cx="685800" cy="475488"/>
           </a:xfrm>
           <a:prstGeom prst="rect">
             <a:avLst/>
@@ -15373,34 +15223,34 @@
               <a:buNone/>
             </a:pPr>
             <a:r>
-              <a:rPr lang="en-US" sz="1600" b="1" dirty="0">
-                <a:solidFill>
-                  <a:srgbClr val="0D9488"/>
+              <a:rPr lang="en-US" sz="900" b="1" dirty="0">
+                <a:solidFill>
+                  <a:srgbClr val="9D174D"/>
                 </a:solidFill>
                 <a:latin typeface="Trebuchet MS" pitchFamily="34" charset="0"/>
                 <a:ea typeface="Trebuchet MS" pitchFamily="34" charset="-122"/>
                 <a:cs typeface="Trebuchet MS" pitchFamily="34" charset="-120"/>
               </a:rPr>
-              <a:t>·</a:t>
-            </a:r>
-            <a:endParaRPr lang="en-US" sz="1600" dirty="0"/>
-          </a:p>
-        </p:txBody>
-      </p:sp>
-      <p:sp>
-        <p:nvSpPr>
-          <p:cNvPr id="31" name="Shape 29"/>
-          <p:cNvSpPr/>
-          <p:nvPr/>
-        </p:nvSpPr>
-        <p:spPr>
-          <a:xfrm>
-            <a:off x="4370832" y="3364992"/>
-            <a:ext cx="1645920" cy="475488"/>
+              <a:t>l</a:t>
+            </a:r>
+            <a:endParaRPr lang="en-US" sz="900" dirty="0"/>
+          </a:p>
+        </p:txBody>
+      </p:sp>
+      <p:sp>
+        <p:nvSpPr>
+          <p:cNvPr id="37" name="Shape 35"/>
+          <p:cNvSpPr/>
+          <p:nvPr/>
+        </p:nvSpPr>
+        <p:spPr>
+          <a:xfrm>
+            <a:off x="4850892" y="4169664"/>
+            <a:ext cx="685800" cy="475488"/>
           </a:xfrm>
           <a:prstGeom prst="rect">
             <a:avLst>
-              <a:gd name="adj" fmla="val 9615"/>
+              <a:gd name="adj" fmla="val 7692"/>
             </a:avLst>
           </a:prstGeom>
           <a:solidFill>
@@ -15408,22 +15258,22 @@
           </a:solidFill>
           <a:ln w="12700">
             <a:solidFill>
-              <a:srgbClr val="0D9488"/>
-            </a:solidFill>
-            <a:prstDash val="solid"/>
-          </a:ln>
-        </p:spPr>
-      </p:sp>
-      <p:sp>
-        <p:nvSpPr>
-          <p:cNvPr id="32" name="Text 30"/>
-          <p:cNvSpPr/>
-          <p:nvPr/>
-        </p:nvSpPr>
-        <p:spPr>
-          <a:xfrm>
-            <a:off x="4370832" y="3364992"/>
-            <a:ext cx="1645920" cy="475488"/>
+              <a:srgbClr val="DB2777"/>
+            </a:solidFill>
+            <a:prstDash val="solid"/>
+          </a:ln>
+        </p:spPr>
+      </p:sp>
+      <p:sp>
+        <p:nvSpPr>
+          <p:cNvPr id="38" name="Text 36"/>
+          <p:cNvSpPr/>
+          <p:nvPr/>
+        </p:nvSpPr>
+        <p:spPr>
+          <a:xfrm>
+            <a:off x="4850892" y="4169664"/>
+            <a:ext cx="685800" cy="475488"/>
           </a:xfrm>
           <a:prstGeom prst="rect">
             <a:avLst/>
@@ -15439,30 +15289,57 @@
               <a:buNone/>
             </a:pPr>
             <a:r>
-              <a:rPr lang="en-US" sz="1400" b="1" dirty="0">
-                <a:solidFill>
-                  <a:srgbClr val="0D9488"/>
+              <a:rPr lang="en-US" sz="900" b="1" dirty="0">
+                <a:solidFill>
+                  <a:srgbClr val="9D174D"/>
                 </a:solidFill>
                 <a:latin typeface="Trebuchet MS" pitchFamily="34" charset="0"/>
                 <a:ea typeface="Trebuchet MS" pitchFamily="34" charset="-122"/>
                 <a:cs typeface="Trebuchet MS" pitchFamily="34" charset="-120"/>
               </a:rPr>
-              <a:t>li</a:t>
-            </a:r>
-            <a:endParaRPr lang="en-US" sz="1400" dirty="0"/>
-          </a:p>
-        </p:txBody>
-      </p:sp>
-      <p:sp>
-        <p:nvSpPr>
-          <p:cNvPr id="33" name="Text 31"/>
-          <p:cNvSpPr/>
-          <p:nvPr/>
-        </p:nvSpPr>
-        <p:spPr>
-          <a:xfrm>
-            <a:off x="6016752" y="3364992"/>
-            <a:ext cx="411480" cy="475488"/>
+              <a:t>i</a:t>
+            </a:r>
+            <a:endParaRPr lang="en-US" sz="900" dirty="0"/>
+          </a:p>
+        </p:txBody>
+      </p:sp>
+      <p:sp>
+        <p:nvSpPr>
+          <p:cNvPr id="39" name="Shape 37"/>
+          <p:cNvSpPr/>
+          <p:nvPr/>
+        </p:nvSpPr>
+        <p:spPr>
+          <a:xfrm>
+            <a:off x="6062472" y="4169664"/>
+            <a:ext cx="685800" cy="475488"/>
+          </a:xfrm>
+          <a:prstGeom prst="rect">
+            <a:avLst>
+              <a:gd name="adj" fmla="val 7692"/>
+            </a:avLst>
+          </a:prstGeom>
+          <a:solidFill>
+            <a:srgbClr val="FFFFFF"/>
+          </a:solidFill>
+          <a:ln w="12700">
+            <a:solidFill>
+              <a:srgbClr val="DB2777"/>
+            </a:solidFill>
+            <a:prstDash val="solid"/>
+          </a:ln>
+        </p:spPr>
+      </p:sp>
+      <p:sp>
+        <p:nvSpPr>
+          <p:cNvPr id="40" name="Text 38"/>
+          <p:cNvSpPr/>
+          <p:nvPr/>
+        </p:nvSpPr>
+        <p:spPr>
+          <a:xfrm>
+            <a:off x="6062472" y="4169664"/>
+            <a:ext cx="685800" cy="475488"/>
           </a:xfrm>
           <a:prstGeom prst="rect">
             <a:avLst/>
@@ -15478,34 +15355,34 @@
               <a:buNone/>
             </a:pPr>
             <a:r>
-              <a:rPr lang="en-US" sz="1600" b="1" dirty="0">
-                <a:solidFill>
-                  <a:srgbClr val="0D9488"/>
+              <a:rPr lang="en-US" sz="900" b="1" dirty="0">
+                <a:solidFill>
+                  <a:srgbClr val="9D174D"/>
                 </a:solidFill>
                 <a:latin typeface="Trebuchet MS" pitchFamily="34" charset="0"/>
                 <a:ea typeface="Trebuchet MS" pitchFamily="34" charset="-122"/>
                 <a:cs typeface="Trebuchet MS" pitchFamily="34" charset="-120"/>
               </a:rPr>
-              <a:t>·</a:t>
-            </a:r>
-            <a:endParaRPr lang="en-US" sz="1600" dirty="0"/>
-          </a:p>
-        </p:txBody>
-      </p:sp>
-      <p:sp>
-        <p:nvSpPr>
-          <p:cNvPr id="34" name="Shape 32"/>
-          <p:cNvSpPr/>
-          <p:nvPr/>
-        </p:nvSpPr>
-        <p:spPr>
-          <a:xfrm>
-            <a:off x="6428232" y="3364992"/>
-            <a:ext cx="1645920" cy="475488"/>
+              <a:t>v</a:t>
+            </a:r>
+            <a:endParaRPr lang="en-US" sz="900" dirty="0"/>
+          </a:p>
+        </p:txBody>
+      </p:sp>
+      <p:sp>
+        <p:nvSpPr>
+          <p:cNvPr id="41" name="Shape 39"/>
+          <p:cNvSpPr/>
+          <p:nvPr/>
+        </p:nvSpPr>
+        <p:spPr>
+          <a:xfrm>
+            <a:off x="7274052" y="4169664"/>
+            <a:ext cx="685800" cy="475488"/>
           </a:xfrm>
           <a:prstGeom prst="rect">
             <a:avLst>
-              <a:gd name="adj" fmla="val 9615"/>
+              <a:gd name="adj" fmla="val 7692"/>
             </a:avLst>
           </a:prstGeom>
           <a:solidFill>
@@ -15513,22 +15390,22 @@
           </a:solidFill>
           <a:ln w="12700">
             <a:solidFill>
-              <a:srgbClr val="0D9488"/>
-            </a:solidFill>
-            <a:prstDash val="solid"/>
-          </a:ln>
-        </p:spPr>
-      </p:sp>
-      <p:sp>
-        <p:nvSpPr>
-          <p:cNvPr id="35" name="Text 33"/>
-          <p:cNvSpPr/>
-          <p:nvPr/>
-        </p:nvSpPr>
-        <p:spPr>
-          <a:xfrm>
-            <a:off x="6428232" y="3364992"/>
-            <a:ext cx="1645920" cy="475488"/>
+              <a:srgbClr val="DB2777"/>
+            </a:solidFill>
+            <a:prstDash val="solid"/>
+          </a:ln>
+        </p:spPr>
+      </p:sp>
+      <p:sp>
+        <p:nvSpPr>
+          <p:cNvPr id="42" name="Text 40"/>
+          <p:cNvSpPr/>
+          <p:nvPr/>
+        </p:nvSpPr>
+        <p:spPr>
+          <a:xfrm>
+            <a:off x="7274052" y="4169664"/>
+            <a:ext cx="685800" cy="475488"/>
           </a:xfrm>
           <a:prstGeom prst="rect">
             <a:avLst/>
@@ -15544,702 +15421,15 @@
               <a:buNone/>
             </a:pPr>
             <a:r>
-              <a:rPr lang="en-US" sz="1400" b="1" dirty="0">
-                <a:solidFill>
-                  <a:srgbClr val="0D9488"/>
+              <a:rPr lang="en-US" sz="900" b="1" dirty="0">
+                <a:solidFill>
+                  <a:srgbClr val="9D174D"/>
                 </a:solidFill>
                 <a:latin typeface="Trebuchet MS" pitchFamily="34" charset="0"/>
                 <a:ea typeface="Trebuchet MS" pitchFamily="34" charset="-122"/>
                 <a:cs typeface="Trebuchet MS" pitchFamily="34" charset="-120"/>
               </a:rPr>
-              <a:t>hood</a:t>
-            </a:r>
-            <a:endParaRPr lang="en-US" sz="1400" dirty="0"/>
-          </a:p>
-        </p:txBody>
-      </p:sp>
-      <p:sp>
-        <p:nvSpPr>
-          <p:cNvPr id="36" name="Shape 34"/>
-          <p:cNvSpPr/>
-          <p:nvPr/>
-        </p:nvSpPr>
-        <p:spPr>
-          <a:xfrm>
-            <a:off x="365760" y="4096512"/>
-            <a:ext cx="1371600" cy="804672"/>
-          </a:xfrm>
-          <a:prstGeom prst="rect">
-            <a:avLst>
-              <a:gd name="adj" fmla="val 6818"/>
-            </a:avLst>
-          </a:prstGeom>
-          <a:solidFill>
-            <a:srgbClr val="E2E8F0"/>
-          </a:solidFill>
-          <a:ln w="12700">
-            <a:solidFill>
-              <a:srgbClr val="E2E8F0"/>
-            </a:solidFill>
-            <a:prstDash val="solid"/>
-          </a:ln>
-        </p:spPr>
-      </p:sp>
-      <p:sp>
-        <p:nvSpPr>
-          <p:cNvPr id="37" name="Text 35"/>
-          <p:cNvSpPr/>
-          <p:nvPr/>
-        </p:nvSpPr>
-        <p:spPr>
-          <a:xfrm>
-            <a:off x="365760" y="4096512"/>
-            <a:ext cx="1371600" cy="804672"/>
-          </a:xfrm>
-          <a:prstGeom prst="rect">
-            <a:avLst/>
-          </a:prstGeom>
-          <a:noFill/>
-          <a:ln/>
-        </p:spPr>
-        <p:txBody>
-          <a:bodyPr wrap="square" lIns="0" tIns="0" rIns="0" bIns="0" rtlCol="0" anchor="ctr"/>
-          <a:lstStyle/>
-          <a:p>
-            <a:pPr algn="ctr" indent="0" marL="0">
-              <a:buNone/>
-            </a:pPr>
-            <a:r>
-              <a:rPr lang="en-US" sz="1100" b="1" dirty="0">
-                <a:solidFill>
-                  <a:srgbClr val="475569"/>
-                </a:solidFill>
-                <a:latin typeface="Trebuchet MS" pitchFamily="34" charset="0"/>
-                <a:ea typeface="Trebuchet MS" pitchFamily="34" charset="-122"/>
-                <a:cs typeface="Trebuchet MS" pitchFamily="34" charset="-120"/>
-              </a:rPr>
-              <a:t>Phonemes</a:t>
-            </a:r>
-            <a:endParaRPr lang="en-US" sz="1100" dirty="0"/>
-          </a:p>
-        </p:txBody>
-      </p:sp>
-      <p:sp>
-        <p:nvSpPr>
-          <p:cNvPr id="38" name="Shape 36"/>
-          <p:cNvSpPr/>
-          <p:nvPr/>
-        </p:nvSpPr>
-        <p:spPr>
-          <a:xfrm>
-            <a:off x="1874520" y="4096512"/>
-            <a:ext cx="6903720" cy="658368"/>
-          </a:xfrm>
-          <a:prstGeom prst="rect">
-            <a:avLst>
-              <a:gd name="adj" fmla="val 8333"/>
-            </a:avLst>
-          </a:prstGeom>
-          <a:solidFill>
-            <a:srgbClr val="FCE7F3"/>
-          </a:solidFill>
-          <a:ln w="12700">
-            <a:solidFill>
-              <a:srgbClr val="DB2777"/>
-            </a:solidFill>
-            <a:prstDash val="solid"/>
-          </a:ln>
-        </p:spPr>
-      </p:sp>
-      <p:sp>
-        <p:nvSpPr>
-          <p:cNvPr id="39" name="Shape 37"/>
-          <p:cNvSpPr/>
-          <p:nvPr/>
-        </p:nvSpPr>
-        <p:spPr>
-          <a:xfrm>
-            <a:off x="1951330" y="4169664"/>
-            <a:ext cx="676656" cy="475488"/>
-          </a:xfrm>
-          <a:prstGeom prst="rect">
-            <a:avLst>
-              <a:gd name="adj" fmla="val 7692"/>
-            </a:avLst>
-          </a:prstGeom>
-          <a:solidFill>
-            <a:srgbClr val="FFFFFF"/>
-          </a:solidFill>
-          <a:ln w="12700">
-            <a:solidFill>
-              <a:srgbClr val="DB2777"/>
-            </a:solidFill>
-            <a:prstDash val="solid"/>
-          </a:ln>
-        </p:spPr>
-      </p:sp>
-      <p:sp>
-        <p:nvSpPr>
-          <p:cNvPr id="40" name="Text 38"/>
-          <p:cNvSpPr/>
-          <p:nvPr/>
-        </p:nvSpPr>
-        <p:spPr>
-          <a:xfrm>
-            <a:off x="1951330" y="4169664"/>
-            <a:ext cx="676656" cy="475488"/>
-          </a:xfrm>
-          <a:prstGeom prst="rect">
-            <a:avLst/>
-          </a:prstGeom>
-          <a:noFill/>
-          <a:ln/>
-        </p:spPr>
-        <p:txBody>
-          <a:bodyPr wrap="square" lIns="0" tIns="0" rIns="0" bIns="0" rtlCol="0" anchor="ctr"/>
-          <a:lstStyle/>
-          <a:p>
-            <a:pPr algn="ctr" indent="0" marL="0">
-              <a:buNone/>
-            </a:pPr>
-            <a:r>
-              <a:rPr lang="en-US" sz="900" b="1" dirty="0">
-                <a:solidFill>
-                  <a:srgbClr val="9D174D"/>
-                </a:solidFill>
-                <a:latin typeface="Trebuchet MS" pitchFamily="34" charset="0"/>
-                <a:ea typeface="Trebuchet MS" pitchFamily="34" charset="-122"/>
-                <a:cs typeface="Trebuchet MS" pitchFamily="34" charset="-120"/>
-              </a:rPr>
-              <a:t>l</a:t>
-            </a:r>
-            <a:endParaRPr lang="en-US" sz="900" dirty="0"/>
-          </a:p>
-        </p:txBody>
-      </p:sp>
-      <p:sp>
-        <p:nvSpPr>
-          <p:cNvPr id="41" name="Shape 39"/>
-          <p:cNvSpPr/>
-          <p:nvPr/>
-        </p:nvSpPr>
-        <p:spPr>
-          <a:xfrm>
-            <a:off x="2677363" y="4169664"/>
-            <a:ext cx="676656" cy="475488"/>
-          </a:xfrm>
-          <a:prstGeom prst="rect">
-            <a:avLst>
-              <a:gd name="adj" fmla="val 7692"/>
-            </a:avLst>
-          </a:prstGeom>
-          <a:solidFill>
-            <a:srgbClr val="FFFFFF"/>
-          </a:solidFill>
-          <a:ln w="12700">
-            <a:solidFill>
-              <a:srgbClr val="DB2777"/>
-            </a:solidFill>
-            <a:prstDash val="solid"/>
-          </a:ln>
-        </p:spPr>
-      </p:sp>
-      <p:sp>
-        <p:nvSpPr>
-          <p:cNvPr id="42" name="Text 40"/>
-          <p:cNvSpPr/>
-          <p:nvPr/>
-        </p:nvSpPr>
-        <p:spPr>
-          <a:xfrm>
-            <a:off x="2677363" y="4169664"/>
-            <a:ext cx="676656" cy="475488"/>
-          </a:xfrm>
-          <a:prstGeom prst="rect">
-            <a:avLst/>
-          </a:prstGeom>
-          <a:noFill/>
-          <a:ln/>
-        </p:spPr>
-        <p:txBody>
-          <a:bodyPr wrap="square" lIns="0" tIns="0" rIns="0" bIns="0" rtlCol="0" anchor="ctr"/>
-          <a:lstStyle/>
-          <a:p>
-            <a:pPr algn="ctr" indent="0" marL="0">
-              <a:buNone/>
-            </a:pPr>
-            <a:r>
-              <a:rPr lang="en-US" sz="900" b="1" dirty="0">
-                <a:solidFill>
-                  <a:srgbClr val="9D174D"/>
-                </a:solidFill>
-                <a:latin typeface="Trebuchet MS" pitchFamily="34" charset="0"/>
-                <a:ea typeface="Trebuchet MS" pitchFamily="34" charset="-122"/>
-                <a:cs typeface="Trebuchet MS" pitchFamily="34" charset="-120"/>
-              </a:rPr>
-              <a:t>i</a:t>
-            </a:r>
-            <a:endParaRPr lang="en-US" sz="900" dirty="0"/>
-          </a:p>
-        </p:txBody>
-      </p:sp>
-      <p:sp>
-        <p:nvSpPr>
-          <p:cNvPr id="43" name="Shape 41"/>
-          <p:cNvSpPr/>
-          <p:nvPr/>
-        </p:nvSpPr>
-        <p:spPr>
-          <a:xfrm>
-            <a:off x="3403397" y="4169664"/>
-            <a:ext cx="676656" cy="475488"/>
-          </a:xfrm>
-          <a:prstGeom prst="rect">
-            <a:avLst>
-              <a:gd name="adj" fmla="val 7692"/>
-            </a:avLst>
-          </a:prstGeom>
-          <a:solidFill>
-            <a:srgbClr val="FFFFFF"/>
-          </a:solidFill>
-          <a:ln w="12700">
-            <a:solidFill>
-              <a:srgbClr val="DB2777"/>
-            </a:solidFill>
-            <a:prstDash val="solid"/>
-          </a:ln>
-        </p:spPr>
-      </p:sp>
-      <p:sp>
-        <p:nvSpPr>
-          <p:cNvPr id="44" name="Text 42"/>
-          <p:cNvSpPr/>
-          <p:nvPr/>
-        </p:nvSpPr>
-        <p:spPr>
-          <a:xfrm>
-            <a:off x="3403397" y="4169664"/>
-            <a:ext cx="676656" cy="475488"/>
-          </a:xfrm>
-          <a:prstGeom prst="rect">
-            <a:avLst/>
-          </a:prstGeom>
-          <a:noFill/>
-          <a:ln/>
-        </p:spPr>
-        <p:txBody>
-          <a:bodyPr wrap="square" lIns="0" tIns="0" rIns="0" bIns="0" rtlCol="0" anchor="ctr"/>
-          <a:lstStyle/>
-          <a:p>
-            <a:pPr algn="ctr" indent="0" marL="0">
-              <a:buNone/>
-            </a:pPr>
-            <a:r>
-              <a:rPr lang="en-US" sz="900" b="1" dirty="0">
-                <a:solidFill>
-                  <a:srgbClr val="9D174D"/>
-                </a:solidFill>
-                <a:latin typeface="Trebuchet MS" pitchFamily="34" charset="0"/>
-                <a:ea typeface="Trebuchet MS" pitchFamily="34" charset="-122"/>
-                <a:cs typeface="Trebuchet MS" pitchFamily="34" charset="-120"/>
-              </a:rPr>
-              <a:t>v</a:t>
-            </a:r>
-            <a:endParaRPr lang="en-US" sz="900" dirty="0"/>
-          </a:p>
-        </p:txBody>
-      </p:sp>
-      <p:sp>
-        <p:nvSpPr>
-          <p:cNvPr id="45" name="Shape 43"/>
-          <p:cNvSpPr/>
-          <p:nvPr/>
-        </p:nvSpPr>
-        <p:spPr>
-          <a:xfrm>
-            <a:off x="4129430" y="4169664"/>
-            <a:ext cx="676656" cy="475488"/>
-          </a:xfrm>
-          <a:prstGeom prst="rect">
-            <a:avLst>
-              <a:gd name="adj" fmla="val 7692"/>
-            </a:avLst>
-          </a:prstGeom>
-          <a:solidFill>
-            <a:srgbClr val="FFFFFF"/>
-          </a:solidFill>
-          <a:ln w="12700">
-            <a:solidFill>
-              <a:srgbClr val="DB2777"/>
-            </a:solidFill>
-            <a:prstDash val="solid"/>
-          </a:ln>
-        </p:spPr>
-      </p:sp>
-      <p:sp>
-        <p:nvSpPr>
-          <p:cNvPr id="46" name="Text 44"/>
-          <p:cNvSpPr/>
-          <p:nvPr/>
-        </p:nvSpPr>
-        <p:spPr>
-          <a:xfrm>
-            <a:off x="4129430" y="4169664"/>
-            <a:ext cx="676656" cy="475488"/>
-          </a:xfrm>
-          <a:prstGeom prst="rect">
-            <a:avLst/>
-          </a:prstGeom>
-          <a:noFill/>
-          <a:ln/>
-        </p:spPr>
-        <p:txBody>
-          <a:bodyPr wrap="square" lIns="0" tIns="0" rIns="0" bIns="0" rtlCol="0" anchor="ctr"/>
-          <a:lstStyle/>
-          <a:p>
-            <a:pPr algn="ctr" indent="0" marL="0">
-              <a:buNone/>
-            </a:pPr>
-            <a:r>
-              <a:rPr lang="en-US" sz="900" b="1" dirty="0">
-                <a:solidFill>
-                  <a:srgbClr val="9D174D"/>
-                </a:solidFill>
-                <a:latin typeface="Trebuchet MS" pitchFamily="34" charset="0"/>
-                <a:ea typeface="Trebuchet MS" pitchFamily="34" charset="-122"/>
-                <a:cs typeface="Trebuchet MS" pitchFamily="34" charset="-120"/>
-              </a:rPr>
               <a:t>e</a:t>
-            </a:r>
-            <a:endParaRPr lang="en-US" sz="900" dirty="0"/>
-          </a:p>
-        </p:txBody>
-      </p:sp>
-      <p:sp>
-        <p:nvSpPr>
-          <p:cNvPr id="47" name="Shape 45"/>
-          <p:cNvSpPr/>
-          <p:nvPr/>
-        </p:nvSpPr>
-        <p:spPr>
-          <a:xfrm>
-            <a:off x="4855464" y="4169664"/>
-            <a:ext cx="676656" cy="475488"/>
-          </a:xfrm>
-          <a:prstGeom prst="rect">
-            <a:avLst>
-              <a:gd name="adj" fmla="val 7692"/>
-            </a:avLst>
-          </a:prstGeom>
-          <a:solidFill>
-            <a:srgbClr val="FFFFFF"/>
-          </a:solidFill>
-          <a:ln w="12700">
-            <a:solidFill>
-              <a:srgbClr val="DB2777"/>
-            </a:solidFill>
-            <a:prstDash val="solid"/>
-          </a:ln>
-        </p:spPr>
-      </p:sp>
-      <p:sp>
-        <p:nvSpPr>
-          <p:cNvPr id="48" name="Text 46"/>
-          <p:cNvSpPr/>
-          <p:nvPr/>
-        </p:nvSpPr>
-        <p:spPr>
-          <a:xfrm>
-            <a:off x="4855464" y="4169664"/>
-            <a:ext cx="676656" cy="475488"/>
-          </a:xfrm>
-          <a:prstGeom prst="rect">
-            <a:avLst/>
-          </a:prstGeom>
-          <a:noFill/>
-          <a:ln/>
-        </p:spPr>
-        <p:txBody>
-          <a:bodyPr wrap="square" lIns="0" tIns="0" rIns="0" bIns="0" rtlCol="0" anchor="ctr"/>
-          <a:lstStyle/>
-          <a:p>
-            <a:pPr algn="ctr" indent="0" marL="0">
-              <a:buNone/>
-            </a:pPr>
-            <a:r>
-              <a:rPr lang="en-US" sz="900" b="1" dirty="0">
-                <a:solidFill>
-                  <a:srgbClr val="9D174D"/>
-                </a:solidFill>
-                <a:latin typeface="Trebuchet MS" pitchFamily="34" charset="0"/>
-                <a:ea typeface="Trebuchet MS" pitchFamily="34" charset="-122"/>
-                <a:cs typeface="Trebuchet MS" pitchFamily="34" charset="-120"/>
-              </a:rPr>
-              <a:t>l</a:t>
-            </a:r>
-            <a:endParaRPr lang="en-US" sz="900" dirty="0"/>
-          </a:p>
-        </p:txBody>
-      </p:sp>
-      <p:sp>
-        <p:nvSpPr>
-          <p:cNvPr id="49" name="Shape 47"/>
-          <p:cNvSpPr/>
-          <p:nvPr/>
-        </p:nvSpPr>
-        <p:spPr>
-          <a:xfrm>
-            <a:off x="5581498" y="4169664"/>
-            <a:ext cx="676656" cy="475488"/>
-          </a:xfrm>
-          <a:prstGeom prst="rect">
-            <a:avLst>
-              <a:gd name="adj" fmla="val 7692"/>
-            </a:avLst>
-          </a:prstGeom>
-          <a:solidFill>
-            <a:srgbClr val="FFFFFF"/>
-          </a:solidFill>
-          <a:ln w="12700">
-            <a:solidFill>
-              <a:srgbClr val="DB2777"/>
-            </a:solidFill>
-            <a:prstDash val="solid"/>
-          </a:ln>
-        </p:spPr>
-      </p:sp>
-      <p:sp>
-        <p:nvSpPr>
-          <p:cNvPr id="50" name="Text 48"/>
-          <p:cNvSpPr/>
-          <p:nvPr/>
-        </p:nvSpPr>
-        <p:spPr>
-          <a:xfrm>
-            <a:off x="5581498" y="4169664"/>
-            <a:ext cx="676656" cy="475488"/>
-          </a:xfrm>
-          <a:prstGeom prst="rect">
-            <a:avLst/>
-          </a:prstGeom>
-          <a:noFill/>
-          <a:ln/>
-        </p:spPr>
-        <p:txBody>
-          <a:bodyPr wrap="square" lIns="0" tIns="0" rIns="0" bIns="0" rtlCol="0" anchor="ctr"/>
-          <a:lstStyle/>
-          <a:p>
-            <a:pPr algn="ctr" indent="0" marL="0">
-              <a:buNone/>
-            </a:pPr>
-            <a:r>
-              <a:rPr lang="en-US" sz="900" b="1" dirty="0">
-                <a:solidFill>
-                  <a:srgbClr val="9D174D"/>
-                </a:solidFill>
-                <a:latin typeface="Trebuchet MS" pitchFamily="34" charset="0"/>
-                <a:ea typeface="Trebuchet MS" pitchFamily="34" charset="-122"/>
-                <a:cs typeface="Trebuchet MS" pitchFamily="34" charset="-120"/>
-              </a:rPr>
-              <a:t>i</a:t>
-            </a:r>
-            <a:endParaRPr lang="en-US" sz="900" dirty="0"/>
-          </a:p>
-        </p:txBody>
-      </p:sp>
-      <p:sp>
-        <p:nvSpPr>
-          <p:cNvPr id="51" name="Shape 49"/>
-          <p:cNvSpPr/>
-          <p:nvPr/>
-        </p:nvSpPr>
-        <p:spPr>
-          <a:xfrm>
-            <a:off x="6307531" y="4169664"/>
-            <a:ext cx="676656" cy="475488"/>
-          </a:xfrm>
-          <a:prstGeom prst="rect">
-            <a:avLst>
-              <a:gd name="adj" fmla="val 7692"/>
-            </a:avLst>
-          </a:prstGeom>
-          <a:solidFill>
-            <a:srgbClr val="FFFFFF"/>
-          </a:solidFill>
-          <a:ln w="12700">
-            <a:solidFill>
-              <a:srgbClr val="DB2777"/>
-            </a:solidFill>
-            <a:prstDash val="solid"/>
-          </a:ln>
-        </p:spPr>
-      </p:sp>
-      <p:sp>
-        <p:nvSpPr>
-          <p:cNvPr id="52" name="Text 50"/>
-          <p:cNvSpPr/>
-          <p:nvPr/>
-        </p:nvSpPr>
-        <p:spPr>
-          <a:xfrm>
-            <a:off x="6307531" y="4169664"/>
-            <a:ext cx="676656" cy="475488"/>
-          </a:xfrm>
-          <a:prstGeom prst="rect">
-            <a:avLst/>
-          </a:prstGeom>
-          <a:noFill/>
-          <a:ln/>
-        </p:spPr>
-        <p:txBody>
-          <a:bodyPr wrap="square" lIns="0" tIns="0" rIns="0" bIns="0" rtlCol="0" anchor="ctr"/>
-          <a:lstStyle/>
-          <a:p>
-            <a:pPr algn="ctr" indent="0" marL="0">
-              <a:buNone/>
-            </a:pPr>
-            <a:r>
-              <a:rPr lang="en-US" sz="900" b="1" dirty="0">
-                <a:solidFill>
-                  <a:srgbClr val="9D174D"/>
-                </a:solidFill>
-                <a:latin typeface="Trebuchet MS" pitchFamily="34" charset="0"/>
-                <a:ea typeface="Trebuchet MS" pitchFamily="34" charset="-122"/>
-                <a:cs typeface="Trebuchet MS" pitchFamily="34" charset="-120"/>
-              </a:rPr>
-              <a:t>h</a:t>
-            </a:r>
-            <a:endParaRPr lang="en-US" sz="900" dirty="0"/>
-          </a:p>
-        </p:txBody>
-      </p:sp>
-      <p:sp>
-        <p:nvSpPr>
-          <p:cNvPr id="53" name="Shape 51"/>
-          <p:cNvSpPr/>
-          <p:nvPr/>
-        </p:nvSpPr>
-        <p:spPr>
-          <a:xfrm>
-            <a:off x="7033565" y="4169664"/>
-            <a:ext cx="676656" cy="475488"/>
-          </a:xfrm>
-          <a:prstGeom prst="rect">
-            <a:avLst>
-              <a:gd name="adj" fmla="val 7692"/>
-            </a:avLst>
-          </a:prstGeom>
-          <a:solidFill>
-            <a:srgbClr val="FFFFFF"/>
-          </a:solidFill>
-          <a:ln w="12700">
-            <a:solidFill>
-              <a:srgbClr val="DB2777"/>
-            </a:solidFill>
-            <a:prstDash val="solid"/>
-          </a:ln>
-        </p:spPr>
-      </p:sp>
-      <p:sp>
-        <p:nvSpPr>
-          <p:cNvPr id="54" name="Text 52"/>
-          <p:cNvSpPr/>
-          <p:nvPr/>
-        </p:nvSpPr>
-        <p:spPr>
-          <a:xfrm>
-            <a:off x="7033565" y="4169664"/>
-            <a:ext cx="676656" cy="475488"/>
-          </a:xfrm>
-          <a:prstGeom prst="rect">
-            <a:avLst/>
-          </a:prstGeom>
-          <a:noFill/>
-          <a:ln/>
-        </p:spPr>
-        <p:txBody>
-          <a:bodyPr wrap="square" lIns="0" tIns="0" rIns="0" bIns="0" rtlCol="0" anchor="ctr"/>
-          <a:lstStyle/>
-          <a:p>
-            <a:pPr algn="ctr" indent="0" marL="0">
-              <a:buNone/>
-            </a:pPr>
-            <a:r>
-              <a:rPr lang="en-US" sz="900" b="1" dirty="0">
-                <a:solidFill>
-                  <a:srgbClr val="9D174D"/>
-                </a:solidFill>
-                <a:latin typeface="Trebuchet MS" pitchFamily="34" charset="0"/>
-                <a:ea typeface="Trebuchet MS" pitchFamily="34" charset="-122"/>
-                <a:cs typeface="Trebuchet MS" pitchFamily="34" charset="-120"/>
-              </a:rPr>
-              <a:t>oo</a:t>
-            </a:r>
-            <a:endParaRPr lang="en-US" sz="900" dirty="0"/>
-          </a:p>
-        </p:txBody>
-      </p:sp>
-      <p:sp>
-        <p:nvSpPr>
-          <p:cNvPr id="55" name="Shape 53"/>
-          <p:cNvSpPr/>
-          <p:nvPr/>
-        </p:nvSpPr>
-        <p:spPr>
-          <a:xfrm>
-            <a:off x="7759598" y="4169664"/>
-            <a:ext cx="676656" cy="475488"/>
-          </a:xfrm>
-          <a:prstGeom prst="rect">
-            <a:avLst>
-              <a:gd name="adj" fmla="val 7692"/>
-            </a:avLst>
-          </a:prstGeom>
-          <a:solidFill>
-            <a:srgbClr val="FFFFFF"/>
-          </a:solidFill>
-          <a:ln w="12700">
-            <a:solidFill>
-              <a:srgbClr val="DB2777"/>
-            </a:solidFill>
-            <a:prstDash val="solid"/>
-          </a:ln>
-        </p:spPr>
-      </p:sp>
-      <p:sp>
-        <p:nvSpPr>
-          <p:cNvPr id="56" name="Text 54"/>
-          <p:cNvSpPr/>
-          <p:nvPr/>
-        </p:nvSpPr>
-        <p:spPr>
-          <a:xfrm>
-            <a:off x="7759598" y="4169664"/>
-            <a:ext cx="676656" cy="475488"/>
-          </a:xfrm>
-          <a:prstGeom prst="rect">
-            <a:avLst/>
-          </a:prstGeom>
-          <a:noFill/>
-          <a:ln/>
-        </p:spPr>
-        <p:txBody>
-          <a:bodyPr wrap="square" lIns="0" tIns="0" rIns="0" bIns="0" rtlCol="0" anchor="ctr"/>
-          <a:lstStyle/>
-          <a:p>
-            <a:pPr algn="ctr" indent="0" marL="0">
-              <a:buNone/>
-            </a:pPr>
-            <a:r>
-              <a:rPr lang="en-US" sz="900" b="1" dirty="0">
-                <a:solidFill>
-                  <a:srgbClr val="9D174D"/>
-                </a:solidFill>
-                <a:latin typeface="Trebuchet MS" pitchFamily="34" charset="0"/>
-                <a:ea typeface="Trebuchet MS" pitchFamily="34" charset="-122"/>
-                <a:cs typeface="Trebuchet MS" pitchFamily="34" charset="-120"/>
-              </a:rPr>
-              <a:t>d</a:t>
             </a:r>
             <a:endParaRPr lang="en-US" sz="900" dirty="0"/>
           </a:p>
@@ -17565,7 +16755,7 @@
                 <a:ea typeface="Calibri" pitchFamily="34" charset="-122"/>
                 <a:cs typeface="Calibri" pitchFamily="34" charset="-120"/>
               </a:rPr>
-              <a:t>Although she </a:t>
+              <a:t>We will </a:t>
             </a:r>
             <a:pPr algn="l" indent="0" marL="0">
               <a:buNone/>
@@ -17582,7 +16772,7 @@
                 <a:ea typeface="Calibri" pitchFamily="34" charset="-122"/>
                 <a:cs typeface="Calibri" pitchFamily="34" charset="-120"/>
               </a:rPr>
-              <a:t>outlived</a:t>
+              <a:t>relive</a:t>
             </a:r>
             <a:pPr algn="l" indent="0" marL="0">
               <a:buNone/>
@@ -17596,7 +16786,7 @@
                 <a:ea typeface="Calibri" pitchFamily="34" charset="-122"/>
                 <a:cs typeface="Calibri" pitchFamily="34" charset="-120"/>
               </a:rPr>
-              <a:t> her rivals, her </a:t>
+              <a:t> the moment when our grandfather, who managed to </a:t>
             </a:r>
             <a:pPr algn="l" indent="0" marL="0">
               <a:buNone/>
@@ -17613,7 +16803,7 @@
                 <a:ea typeface="Calibri" pitchFamily="34" charset="-122"/>
                 <a:cs typeface="Calibri" pitchFamily="34" charset="-120"/>
               </a:rPr>
-              <a:t>lively</a:t>
+              <a:t>outlive</a:t>
             </a:r>
             <a:pPr algn="l" indent="0" marL="0">
               <a:buNone/>
@@ -17627,7 +16817,7 @@
                 <a:ea typeface="Calibri" pitchFamily="34" charset="-122"/>
                 <a:cs typeface="Calibri" pitchFamily="34" charset="-120"/>
               </a:rPr>
-              <a:t> spirit and </a:t>
+              <a:t> all his brothers, shared his </a:t>
             </a:r>
             <a:pPr algn="l" indent="0" marL="0">
               <a:buNone/>
@@ -17658,7 +16848,7 @@
                 <a:ea typeface="Calibri" pitchFamily="34" charset="-122"/>
                 <a:cs typeface="Calibri" pitchFamily="34" charset="-120"/>
               </a:rPr>
-              <a:t> depended on the land.</a:t>
+              <a:t> with us.</a:t>
             </a:r>
             <a:endParaRPr lang="en-US" sz="1800" dirty="0"/>
           </a:p>
@@ -17813,7 +17003,7 @@
                 <a:ea typeface="Trebuchet MS" pitchFamily="34" charset="-122"/>
                 <a:cs typeface="Trebuchet MS" pitchFamily="34" charset="-120"/>
               </a:rPr>
-              <a:t>outlived</a:t>
+              <a:t>relive</a:t>
             </a:r>
             <a:endParaRPr lang="en-US" sz="1400" dirty="0"/>
           </a:p>
@@ -17941,7 +17131,7 @@
                 <a:ea typeface="Trebuchet MS" pitchFamily="34" charset="-122"/>
                 <a:cs typeface="Trebuchet MS" pitchFamily="34" charset="-120"/>
               </a:rPr>
-              <a:t>lively</a:t>
+              <a:t>outlive</a:t>
             </a:r>
             <a:endParaRPr lang="en-US" sz="1400" dirty="0"/>
           </a:p>
@@ -18539,7 +17729,7 @@
                 <a:ea typeface="Trebuchet MS" pitchFamily="34" charset="-122"/>
                 <a:cs typeface="Trebuchet MS" pitchFamily="34" charset="-120"/>
               </a:rPr>
-              <a:t>outlived</a:t>
+              <a:t>relive</a:t>
             </a:r>
             <a:endParaRPr lang="en-US" sz="2800" dirty="0"/>
           </a:p>
@@ -19366,7 +18556,7 @@
                 <a:ea typeface="Trebuchet MS" pitchFamily="34" charset="-122"/>
                 <a:cs typeface="Trebuchet MS" pitchFamily="34" charset="-120"/>
               </a:rPr>
-              <a:t>outlived</a:t>
+              <a:t>relive</a:t>
             </a:r>
             <a:endParaRPr lang="en-US" sz="2800" dirty="0"/>
           </a:p>
@@ -19446,7 +18636,7 @@
         </p:nvSpPr>
         <p:spPr>
           <a:xfrm>
-            <a:off x="2221992" y="2258568"/>
+            <a:off x="2938272" y="2258568"/>
             <a:ext cx="1828800" cy="292608"/>
           </a:xfrm>
           <a:prstGeom prst="rect">
@@ -19480,7 +18670,7 @@
         </p:nvSpPr>
         <p:spPr>
           <a:xfrm>
-            <a:off x="2221992" y="2258568"/>
+            <a:off x="2938272" y="2258568"/>
             <a:ext cx="1828800" cy="292608"/>
           </a:xfrm>
           <a:prstGeom prst="rect">
@@ -19505,7 +18695,7 @@
                 <a:ea typeface="Trebuchet MS" pitchFamily="34" charset="-122"/>
                 <a:cs typeface="Trebuchet MS" pitchFamily="34" charset="-120"/>
               </a:rPr>
-              <a:t>out</a:t>
+              <a:t>re</a:t>
             </a:r>
             <a:endParaRPr lang="en-US" sz="1300" dirty="0"/>
           </a:p>
@@ -19519,7 +18709,7 @@
         </p:nvSpPr>
         <p:spPr>
           <a:xfrm>
-            <a:off x="2221992" y="2569464"/>
+            <a:off x="2938272" y="2569464"/>
             <a:ext cx="1828800" cy="201168"/>
           </a:xfrm>
           <a:prstGeom prst="rect">
@@ -19544,7 +18734,7 @@
                 <a:ea typeface="Calibri" pitchFamily="34" charset="-122"/>
                 <a:cs typeface="Calibri" pitchFamily="34" charset="-120"/>
               </a:rPr>
-              <a:t>beyond or more than</a:t>
+              <a:t>again</a:t>
             </a:r>
             <a:endParaRPr lang="en-US" sz="850" dirty="0"/>
           </a:p>
@@ -19558,7 +18748,7 @@
         </p:nvSpPr>
         <p:spPr>
           <a:xfrm>
-            <a:off x="4370832" y="2258568"/>
+            <a:off x="5803392" y="2258568"/>
             <a:ext cx="1828800" cy="292608"/>
           </a:xfrm>
           <a:prstGeom prst="rect">
@@ -19592,7 +18782,7 @@
         </p:nvSpPr>
         <p:spPr>
           <a:xfrm>
-            <a:off x="4370832" y="2258568"/>
+            <a:off x="5803392" y="2258568"/>
             <a:ext cx="1828800" cy="292608"/>
           </a:xfrm>
           <a:prstGeom prst="rect">
@@ -19631,7 +18821,7 @@
         </p:nvSpPr>
         <p:spPr>
           <a:xfrm>
-            <a:off x="4370832" y="2569464"/>
+            <a:off x="5803392" y="2569464"/>
             <a:ext cx="1828800" cy="201168"/>
           </a:xfrm>
           <a:prstGeom prst="rect">
@@ -19670,30 +18860,23 @@
         </p:nvSpPr>
         <p:spPr>
           <a:xfrm>
-            <a:off x="6519672" y="2258568"/>
-            <a:ext cx="1828800" cy="292608"/>
+            <a:off x="365760" y="3273552"/>
+            <a:ext cx="1371600" cy="658368"/>
           </a:xfrm>
           <a:prstGeom prst="rect">
             <a:avLst>
-              <a:gd name="adj" fmla="val 25000"/>
+              <a:gd name="adj" fmla="val 8333"/>
             </a:avLst>
           </a:prstGeom>
           <a:solidFill>
-            <a:srgbClr val="FCE7F3"/>
-          </a:solidFill>
-          <a:ln w="19050">
-            <a:solidFill>
-              <a:srgbClr val="DB2777"/>
-            </a:solidFill>
-            <a:prstDash val="solid"/>
-          </a:ln>
-          <a:effectLst>
-            <a:outerShdw sx="100000" sy="100000" kx="0" ky="0" algn="bl" rotWithShape="0" blurRad="101600" dist="38100" dir="8100000">
-              <a:srgbClr val="000000">
-                <a:alpha val="12000"/>
-              </a:srgbClr>
-            </a:outerShdw>
-          </a:effectLst>
+            <a:srgbClr val="E2E8F0"/>
+          </a:solidFill>
+          <a:ln w="12700">
+            <a:solidFill>
+              <a:srgbClr val="E2E8F0"/>
+            </a:solidFill>
+            <a:prstDash val="solid"/>
+          </a:ln>
         </p:spPr>
       </p:sp>
       <p:sp>
@@ -19704,8 +18887,8 @@
         </p:nvSpPr>
         <p:spPr>
           <a:xfrm>
-            <a:off x="6519672" y="2258568"/>
-            <a:ext cx="1828800" cy="292608"/>
+            <a:off x="365760" y="3273552"/>
+            <a:ext cx="1371600" cy="658368"/>
           </a:xfrm>
           <a:prstGeom prst="rect">
             <a:avLst/>
@@ -19721,95 +18904,83 @@
               <a:buNone/>
             </a:pPr>
             <a:r>
-              <a:rPr lang="en-US" sz="1300" b="1" dirty="0">
-                <a:solidFill>
-                  <a:srgbClr val="9D174D"/>
+              <a:rPr lang="en-US" sz="1100" b="1" dirty="0">
+                <a:solidFill>
+                  <a:srgbClr val="475569"/>
                 </a:solidFill>
                 <a:latin typeface="Trebuchet MS" pitchFamily="34" charset="0"/>
                 <a:ea typeface="Trebuchet MS" pitchFamily="34" charset="-122"/>
                 <a:cs typeface="Trebuchet MS" pitchFamily="34" charset="-120"/>
               </a:rPr>
-              <a:t>d</a:t>
-            </a:r>
-            <a:endParaRPr lang="en-US" sz="1300" dirty="0"/>
-          </a:p>
-        </p:txBody>
-      </p:sp>
-      <p:sp>
-        <p:nvSpPr>
-          <p:cNvPr id="24" name="Text 22"/>
-          <p:cNvSpPr/>
-          <p:nvPr/>
-        </p:nvSpPr>
-        <p:spPr>
-          <a:xfrm>
-            <a:off x="6519672" y="2569464"/>
-            <a:ext cx="1828800" cy="201168"/>
-          </a:xfrm>
-          <a:prstGeom prst="rect">
-            <a:avLst/>
-          </a:prstGeom>
-          <a:noFill/>
-          <a:ln/>
-        </p:spPr>
-        <p:txBody>
-          <a:bodyPr wrap="square" lIns="0" tIns="0" rIns="0" bIns="0" rtlCol="0" anchor="t"/>
-          <a:lstStyle/>
-          <a:p>
-            <a:pPr algn="ctr" indent="0" marL="0">
-              <a:buNone/>
-            </a:pPr>
-            <a:r>
-              <a:rPr lang="en-US" sz="850" dirty="0">
-                <a:solidFill>
-                  <a:srgbClr val="475569"/>
+              <a:t>Syllables</a:t>
+            </a:r>
+            <a:endParaRPr lang="en-US" sz="1100" dirty="0"/>
+          </a:p>
+        </p:txBody>
+      </p:sp>
+      <p:sp>
+        <p:nvSpPr>
+          <p:cNvPr id="24" name="Shape 22"/>
+          <p:cNvSpPr/>
+          <p:nvPr/>
+        </p:nvSpPr>
+        <p:spPr>
+          <a:xfrm>
+            <a:off x="1874520" y="3273552"/>
+            <a:ext cx="6903720" cy="658368"/>
+          </a:xfrm>
+          <a:prstGeom prst="rect">
+            <a:avLst>
+              <a:gd name="adj" fmla="val 8333"/>
+            </a:avLst>
+          </a:prstGeom>
+          <a:solidFill>
+            <a:srgbClr val="F8FAFC"/>
+          </a:solidFill>
+          <a:ln w="12700">
+            <a:solidFill>
+              <a:srgbClr val="E2E8F0"/>
+            </a:solidFill>
+            <a:prstDash val="dash"/>
+          </a:ln>
+        </p:spPr>
+      </p:sp>
+      <p:sp>
+        <p:nvSpPr>
+          <p:cNvPr id="25" name="Text 23"/>
+          <p:cNvSpPr/>
+          <p:nvPr/>
+        </p:nvSpPr>
+        <p:spPr>
+          <a:xfrm>
+            <a:off x="1874520" y="3273552"/>
+            <a:ext cx="6903720" cy="658368"/>
+          </a:xfrm>
+          <a:prstGeom prst="rect">
+            <a:avLst/>
+          </a:prstGeom>
+          <a:noFill/>
+          <a:ln/>
+        </p:spPr>
+        <p:txBody>
+          <a:bodyPr wrap="square" rtlCol="0" anchor="ctr"/>
+          <a:lstStyle/>
+          <a:p>
+            <a:pPr algn="ctr" indent="0" marL="0">
+              <a:buNone/>
+            </a:pPr>
+            <a:r>
+              <a:rPr lang="en-US" sz="1100" i="1" dirty="0">
+                <a:solidFill>
+                  <a:srgbClr val="CBD5E1"/>
                 </a:solidFill>
                 <a:latin typeface="Calibri" pitchFamily="34" charset="0"/>
                 <a:ea typeface="Calibri" pitchFamily="34" charset="-122"/>
                 <a:cs typeface="Calibri" pitchFamily="34" charset="-120"/>
               </a:rPr>
-              <a:t>past tense</a:t>
-            </a:r>
-            <a:endParaRPr lang="en-US" sz="850" dirty="0"/>
-          </a:p>
-        </p:txBody>
-      </p:sp>
-      <p:sp>
-        <p:nvSpPr>
-          <p:cNvPr id="25" name="Text 23"/>
-          <p:cNvSpPr/>
-          <p:nvPr/>
-        </p:nvSpPr>
-        <p:spPr>
-          <a:xfrm>
-            <a:off x="6519672" y="2752344"/>
-            <a:ext cx="1828800" cy="182880"/>
-          </a:xfrm>
-          <a:prstGeom prst="rect">
-            <a:avLst/>
-          </a:prstGeom>
-          <a:noFill/>
-          <a:ln/>
-        </p:spPr>
-        <p:txBody>
-          <a:bodyPr wrap="square" lIns="0" tIns="0" rIns="0" bIns="0" rtlCol="0" anchor="t"/>
-          <a:lstStyle/>
-          <a:p>
-            <a:pPr algn="ctr" indent="0" marL="0">
-              <a:buNone/>
-            </a:pPr>
-            <a:r>
-              <a:rPr lang="en-US" sz="700" i="1" dirty="0">
-                <a:solidFill>
-                  <a:srgbClr val="94A3B8"/>
-                </a:solidFill>
-                <a:latin typeface="Calibri" pitchFamily="34" charset="0"/>
-                <a:ea typeface="Calibri" pitchFamily="34" charset="-122"/>
-                <a:cs typeface="Calibri" pitchFamily="34" charset="-120"/>
-              </a:rPr>
-              <a:t>'e' kept before 'd' suffix</a:t>
-            </a:r>
-            <a:endParaRPr lang="en-US" sz="700" dirty="0"/>
+              <a:t>Write here...</a:t>
+            </a:r>
+            <a:endParaRPr lang="en-US" sz="1100" dirty="0"/>
           </a:p>
         </p:txBody>
       </p:sp>
@@ -19821,12 +18992,12 @@
         </p:nvSpPr>
         <p:spPr>
           <a:xfrm>
-            <a:off x="365760" y="3273552"/>
-            <a:ext cx="1371600" cy="658368"/>
+            <a:off x="365760" y="4096512"/>
+            <a:ext cx="1371600" cy="804672"/>
           </a:xfrm>
           <a:prstGeom prst="rect">
             <a:avLst>
-              <a:gd name="adj" fmla="val 8333"/>
+              <a:gd name="adj" fmla="val 6818"/>
             </a:avLst>
           </a:prstGeom>
           <a:solidFill>
@@ -19848,8 +19019,8 @@
         </p:nvSpPr>
         <p:spPr>
           <a:xfrm>
-            <a:off x="365760" y="3273552"/>
-            <a:ext cx="1371600" cy="658368"/>
+            <a:off x="365760" y="4096512"/>
+            <a:ext cx="1371600" cy="804672"/>
           </a:xfrm>
           <a:prstGeom prst="rect">
             <a:avLst/>
@@ -19873,7 +19044,7 @@
                 <a:ea typeface="Trebuchet MS" pitchFamily="34" charset="-122"/>
                 <a:cs typeface="Trebuchet MS" pitchFamily="34" charset="-120"/>
               </a:rPr>
-              <a:t>Syllables</a:t>
+              <a:t>Phonemes</a:t>
             </a:r>
             <a:endParaRPr lang="en-US" sz="1100" dirty="0"/>
           </a:p>
@@ -19887,74 +19058,8 @@
         </p:nvSpPr>
         <p:spPr>
           <a:xfrm>
-            <a:off x="1874520" y="3273552"/>
-            <a:ext cx="6903720" cy="658368"/>
-          </a:xfrm>
-          <a:prstGeom prst="rect">
-            <a:avLst>
-              <a:gd name="adj" fmla="val 8333"/>
-            </a:avLst>
-          </a:prstGeom>
-          <a:solidFill>
-            <a:srgbClr val="F8FAFC"/>
-          </a:solidFill>
-          <a:ln w="12700">
-            <a:solidFill>
-              <a:srgbClr val="E2E8F0"/>
-            </a:solidFill>
-            <a:prstDash val="dash"/>
-          </a:ln>
-        </p:spPr>
-      </p:sp>
-      <p:sp>
-        <p:nvSpPr>
-          <p:cNvPr id="29" name="Text 27"/>
-          <p:cNvSpPr/>
-          <p:nvPr/>
-        </p:nvSpPr>
-        <p:spPr>
-          <a:xfrm>
-            <a:off x="1874520" y="3273552"/>
-            <a:ext cx="6903720" cy="658368"/>
-          </a:xfrm>
-          <a:prstGeom prst="rect">
-            <a:avLst/>
-          </a:prstGeom>
-          <a:noFill/>
-          <a:ln/>
-        </p:spPr>
-        <p:txBody>
-          <a:bodyPr wrap="square" rtlCol="0" anchor="ctr"/>
-          <a:lstStyle/>
-          <a:p>
-            <a:pPr algn="ctr" indent="0" marL="0">
-              <a:buNone/>
-            </a:pPr>
-            <a:r>
-              <a:rPr lang="en-US" sz="1100" i="1" dirty="0">
-                <a:solidFill>
-                  <a:srgbClr val="CBD5E1"/>
-                </a:solidFill>
-                <a:latin typeface="Calibri" pitchFamily="34" charset="0"/>
-                <a:ea typeface="Calibri" pitchFamily="34" charset="-122"/>
-                <a:cs typeface="Calibri" pitchFamily="34" charset="-120"/>
-              </a:rPr>
-              <a:t>Write here...</a:t>
-            </a:r>
-            <a:endParaRPr lang="en-US" sz="1100" dirty="0"/>
-          </a:p>
-        </p:txBody>
-      </p:sp>
-      <p:sp>
-        <p:nvSpPr>
-          <p:cNvPr id="30" name="Shape 28"/>
-          <p:cNvSpPr/>
-          <p:nvPr/>
-        </p:nvSpPr>
-        <p:spPr>
-          <a:xfrm>
-            <a:off x="365760" y="4096512"/>
-            <a:ext cx="1371600" cy="804672"/>
+            <a:off x="1874520" y="4096512"/>
+            <a:ext cx="6903720" cy="804672"/>
           </a:xfrm>
           <a:prstGeom prst="rect">
             <a:avLst>
@@ -19962,85 +19067,19 @@
             </a:avLst>
           </a:prstGeom>
           <a:solidFill>
-            <a:srgbClr val="E2E8F0"/>
+            <a:srgbClr val="F8FAFC"/>
           </a:solidFill>
           <a:ln w="12700">
             <a:solidFill>
               <a:srgbClr val="E2E8F0"/>
             </a:solidFill>
-            <a:prstDash val="solid"/>
-          </a:ln>
-        </p:spPr>
-      </p:sp>
-      <p:sp>
-        <p:nvSpPr>
-          <p:cNvPr id="31" name="Text 29"/>
-          <p:cNvSpPr/>
-          <p:nvPr/>
-        </p:nvSpPr>
-        <p:spPr>
-          <a:xfrm>
-            <a:off x="365760" y="4096512"/>
-            <a:ext cx="1371600" cy="804672"/>
-          </a:xfrm>
-          <a:prstGeom prst="rect">
-            <a:avLst/>
-          </a:prstGeom>
-          <a:noFill/>
-          <a:ln/>
-        </p:spPr>
-        <p:txBody>
-          <a:bodyPr wrap="square" lIns="0" tIns="0" rIns="0" bIns="0" rtlCol="0" anchor="ctr"/>
-          <a:lstStyle/>
-          <a:p>
-            <a:pPr algn="ctr" indent="0" marL="0">
-              <a:buNone/>
-            </a:pPr>
-            <a:r>
-              <a:rPr lang="en-US" sz="1100" b="1" dirty="0">
-                <a:solidFill>
-                  <a:srgbClr val="475569"/>
-                </a:solidFill>
-                <a:latin typeface="Trebuchet MS" pitchFamily="34" charset="0"/>
-                <a:ea typeface="Trebuchet MS" pitchFamily="34" charset="-122"/>
-                <a:cs typeface="Trebuchet MS" pitchFamily="34" charset="-120"/>
-              </a:rPr>
-              <a:t>Phonemes</a:t>
-            </a:r>
-            <a:endParaRPr lang="en-US" sz="1100" dirty="0"/>
-          </a:p>
-        </p:txBody>
-      </p:sp>
-      <p:sp>
-        <p:nvSpPr>
-          <p:cNvPr id="32" name="Shape 30"/>
-          <p:cNvSpPr/>
-          <p:nvPr/>
-        </p:nvSpPr>
-        <p:spPr>
-          <a:xfrm>
-            <a:off x="1874520" y="4096512"/>
-            <a:ext cx="6903720" cy="804672"/>
-          </a:xfrm>
-          <a:prstGeom prst="rect">
-            <a:avLst>
-              <a:gd name="adj" fmla="val 6818"/>
-            </a:avLst>
-          </a:prstGeom>
-          <a:solidFill>
-            <a:srgbClr val="F8FAFC"/>
-          </a:solidFill>
-          <a:ln w="12700">
-            <a:solidFill>
-              <a:srgbClr val="E2E8F0"/>
-            </a:solidFill>
             <a:prstDash val="dash"/>
           </a:ln>
         </p:spPr>
       </p:sp>
       <p:sp>
         <p:nvSpPr>
-          <p:cNvPr id="33" name="Text 31"/>
+          <p:cNvPr id="29" name="Text 27"/>
           <p:cNvSpPr/>
           <p:nvPr/>
         </p:nvSpPr>
@@ -20502,7 +19541,7 @@
                 <a:ea typeface="Trebuchet MS" pitchFamily="34" charset="-122"/>
                 <a:cs typeface="Trebuchet MS" pitchFamily="34" charset="-120"/>
               </a:rPr>
-              <a:t>outlived</a:t>
+              <a:t>relive</a:t>
             </a:r>
             <a:endParaRPr lang="en-US" sz="2800" dirty="0"/>
           </a:p>
@@ -20582,7 +19621,7 @@
         </p:nvSpPr>
         <p:spPr>
           <a:xfrm>
-            <a:off x="2221992" y="2258568"/>
+            <a:off x="2938272" y="2258568"/>
             <a:ext cx="1828800" cy="292608"/>
           </a:xfrm>
           <a:prstGeom prst="rect">
@@ -20616,7 +19655,7 @@
         </p:nvSpPr>
         <p:spPr>
           <a:xfrm>
-            <a:off x="2221992" y="2258568"/>
+            <a:off x="2938272" y="2258568"/>
             <a:ext cx="1828800" cy="292608"/>
           </a:xfrm>
           <a:prstGeom prst="rect">
@@ -20641,7 +19680,7 @@
                 <a:ea typeface="Trebuchet MS" pitchFamily="34" charset="-122"/>
                 <a:cs typeface="Trebuchet MS" pitchFamily="34" charset="-120"/>
               </a:rPr>
-              <a:t>out</a:t>
+              <a:t>re</a:t>
             </a:r>
             <a:endParaRPr lang="en-US" sz="1300" dirty="0"/>
           </a:p>
@@ -20655,7 +19694,7 @@
         </p:nvSpPr>
         <p:spPr>
           <a:xfrm>
-            <a:off x="2221992" y="2569464"/>
+            <a:off x="2938272" y="2569464"/>
             <a:ext cx="1828800" cy="201168"/>
           </a:xfrm>
           <a:prstGeom prst="rect">
@@ -20680,7 +19719,7 @@
                 <a:ea typeface="Calibri" pitchFamily="34" charset="-122"/>
                 <a:cs typeface="Calibri" pitchFamily="34" charset="-120"/>
               </a:rPr>
-              <a:t>beyond or more than</a:t>
+              <a:t>again</a:t>
             </a:r>
             <a:endParaRPr lang="en-US" sz="850" dirty="0"/>
           </a:p>
@@ -20694,7 +19733,7 @@
         </p:nvSpPr>
         <p:spPr>
           <a:xfrm>
-            <a:off x="4370832" y="2258568"/>
+            <a:off x="5803392" y="2258568"/>
             <a:ext cx="1828800" cy="292608"/>
           </a:xfrm>
           <a:prstGeom prst="rect">
@@ -20728,7 +19767,7 @@
         </p:nvSpPr>
         <p:spPr>
           <a:xfrm>
-            <a:off x="4370832" y="2258568"/>
+            <a:off x="5803392" y="2258568"/>
             <a:ext cx="1828800" cy="292608"/>
           </a:xfrm>
           <a:prstGeom prst="rect">
@@ -20767,7 +19806,7 @@
         </p:nvSpPr>
         <p:spPr>
           <a:xfrm>
-            <a:off x="4370832" y="2569464"/>
+            <a:off x="5803392" y="2569464"/>
             <a:ext cx="1828800" cy="201168"/>
           </a:xfrm>
           <a:prstGeom prst="rect">
@@ -20806,30 +19845,23 @@
         </p:nvSpPr>
         <p:spPr>
           <a:xfrm>
-            <a:off x="6519672" y="2258568"/>
-            <a:ext cx="1828800" cy="292608"/>
+            <a:off x="365760" y="3273552"/>
+            <a:ext cx="1371600" cy="658368"/>
           </a:xfrm>
           <a:prstGeom prst="rect">
             <a:avLst>
-              <a:gd name="adj" fmla="val 25000"/>
+              <a:gd name="adj" fmla="val 8333"/>
             </a:avLst>
           </a:prstGeom>
           <a:solidFill>
-            <a:srgbClr val="FCE7F3"/>
-          </a:solidFill>
-          <a:ln w="19050">
-            <a:solidFill>
-              <a:srgbClr val="DB2777"/>
-            </a:solidFill>
-            <a:prstDash val="solid"/>
-          </a:ln>
-          <a:effectLst>
-            <a:outerShdw sx="100000" sy="100000" kx="0" ky="0" algn="bl" rotWithShape="0" blurRad="101600" dist="38100" dir="8100000">
-              <a:srgbClr val="000000">
-                <a:alpha val="12000"/>
-              </a:srgbClr>
-            </a:outerShdw>
-          </a:effectLst>
+            <a:srgbClr val="E2E8F0"/>
+          </a:solidFill>
+          <a:ln w="12700">
+            <a:solidFill>
+              <a:srgbClr val="E2E8F0"/>
+            </a:solidFill>
+            <a:prstDash val="solid"/>
+          </a:ln>
         </p:spPr>
       </p:sp>
       <p:sp>
@@ -20840,8 +19872,8 @@
         </p:nvSpPr>
         <p:spPr>
           <a:xfrm>
-            <a:off x="6519672" y="2258568"/>
-            <a:ext cx="1828800" cy="292608"/>
+            <a:off x="365760" y="3273552"/>
+            <a:ext cx="1371600" cy="658368"/>
           </a:xfrm>
           <a:prstGeom prst="rect">
             <a:avLst/>
@@ -20857,108 +19889,30 @@
               <a:buNone/>
             </a:pPr>
             <a:r>
-              <a:rPr lang="en-US" sz="1300" b="1" dirty="0">
-                <a:solidFill>
-                  <a:srgbClr val="9D174D"/>
+              <a:rPr lang="en-US" sz="1100" b="1" dirty="0">
+                <a:solidFill>
+                  <a:srgbClr val="475569"/>
                 </a:solidFill>
                 <a:latin typeface="Trebuchet MS" pitchFamily="34" charset="0"/>
                 <a:ea typeface="Trebuchet MS" pitchFamily="34" charset="-122"/>
                 <a:cs typeface="Trebuchet MS" pitchFamily="34" charset="-120"/>
               </a:rPr>
-              <a:t>d</a:t>
-            </a:r>
-            <a:endParaRPr lang="en-US" sz="1300" dirty="0"/>
-          </a:p>
-        </p:txBody>
-      </p:sp>
-      <p:sp>
-        <p:nvSpPr>
-          <p:cNvPr id="24" name="Text 22"/>
-          <p:cNvSpPr/>
-          <p:nvPr/>
-        </p:nvSpPr>
-        <p:spPr>
-          <a:xfrm>
-            <a:off x="6519672" y="2569464"/>
-            <a:ext cx="1828800" cy="201168"/>
-          </a:xfrm>
-          <a:prstGeom prst="rect">
-            <a:avLst/>
-          </a:prstGeom>
-          <a:noFill/>
-          <a:ln/>
-        </p:spPr>
-        <p:txBody>
-          <a:bodyPr wrap="square" lIns="0" tIns="0" rIns="0" bIns="0" rtlCol="0" anchor="t"/>
-          <a:lstStyle/>
-          <a:p>
-            <a:pPr algn="ctr" indent="0" marL="0">
-              <a:buNone/>
-            </a:pPr>
-            <a:r>
-              <a:rPr lang="en-US" sz="850" dirty="0">
-                <a:solidFill>
-                  <a:srgbClr val="475569"/>
-                </a:solidFill>
-                <a:latin typeface="Calibri" pitchFamily="34" charset="0"/>
-                <a:ea typeface="Calibri" pitchFamily="34" charset="-122"/>
-                <a:cs typeface="Calibri" pitchFamily="34" charset="-120"/>
-              </a:rPr>
-              <a:t>past tense</a:t>
-            </a:r>
-            <a:endParaRPr lang="en-US" sz="850" dirty="0"/>
-          </a:p>
-        </p:txBody>
-      </p:sp>
-      <p:sp>
-        <p:nvSpPr>
-          <p:cNvPr id="25" name="Text 23"/>
-          <p:cNvSpPr/>
-          <p:nvPr/>
-        </p:nvSpPr>
-        <p:spPr>
-          <a:xfrm>
-            <a:off x="6519672" y="2752344"/>
-            <a:ext cx="1828800" cy="182880"/>
-          </a:xfrm>
-          <a:prstGeom prst="rect">
-            <a:avLst/>
-          </a:prstGeom>
-          <a:noFill/>
-          <a:ln/>
-        </p:spPr>
-        <p:txBody>
-          <a:bodyPr wrap="square" lIns="0" tIns="0" rIns="0" bIns="0" rtlCol="0" anchor="t"/>
-          <a:lstStyle/>
-          <a:p>
-            <a:pPr algn="ctr" indent="0" marL="0">
-              <a:buNone/>
-            </a:pPr>
-            <a:r>
-              <a:rPr lang="en-US" sz="700" i="1" dirty="0">
-                <a:solidFill>
-                  <a:srgbClr val="94A3B8"/>
-                </a:solidFill>
-                <a:latin typeface="Calibri" pitchFamily="34" charset="0"/>
-                <a:ea typeface="Calibri" pitchFamily="34" charset="-122"/>
-                <a:cs typeface="Calibri" pitchFamily="34" charset="-120"/>
-              </a:rPr>
-              <a:t>'e' kept before 'd' suffix</a:t>
-            </a:r>
-            <a:endParaRPr lang="en-US" sz="700" dirty="0"/>
-          </a:p>
-        </p:txBody>
-      </p:sp>
-      <p:sp>
-        <p:nvSpPr>
-          <p:cNvPr id="26" name="Shape 24"/>
-          <p:cNvSpPr/>
-          <p:nvPr/>
-        </p:nvSpPr>
-        <p:spPr>
-          <a:xfrm>
-            <a:off x="365760" y="3273552"/>
-            <a:ext cx="1371600" cy="658368"/>
+              <a:t>Syllables</a:t>
+            </a:r>
+            <a:endParaRPr lang="en-US" sz="1100" dirty="0"/>
+          </a:p>
+        </p:txBody>
+      </p:sp>
+      <p:sp>
+        <p:nvSpPr>
+          <p:cNvPr id="24" name="Shape 22"/>
+          <p:cNvSpPr/>
+          <p:nvPr/>
+        </p:nvSpPr>
+        <p:spPr>
+          <a:xfrm>
+            <a:off x="1874520" y="3273552"/>
+            <a:ext cx="6903720" cy="658368"/>
           </a:xfrm>
           <a:prstGeom prst="rect">
             <a:avLst>
@@ -20966,26 +19920,53 @@
             </a:avLst>
           </a:prstGeom>
           <a:solidFill>
-            <a:srgbClr val="E2E8F0"/>
-          </a:solidFill>
-          <a:ln w="12700">
-            <a:solidFill>
-              <a:srgbClr val="E2E8F0"/>
-            </a:solidFill>
-            <a:prstDash val="solid"/>
-          </a:ln>
-        </p:spPr>
-      </p:sp>
-      <p:sp>
-        <p:nvSpPr>
-          <p:cNvPr id="27" name="Text 25"/>
-          <p:cNvSpPr/>
-          <p:nvPr/>
-        </p:nvSpPr>
-        <p:spPr>
-          <a:xfrm>
-            <a:off x="365760" y="3273552"/>
-            <a:ext cx="1371600" cy="658368"/>
+            <a:srgbClr val="CCFBF1"/>
+          </a:solidFill>
+          <a:ln w="12700">
+            <a:solidFill>
+              <a:srgbClr val="0D9488"/>
+            </a:solidFill>
+            <a:prstDash val="solid"/>
+          </a:ln>
+        </p:spPr>
+      </p:sp>
+      <p:sp>
+        <p:nvSpPr>
+          <p:cNvPr id="25" name="Shape 23"/>
+          <p:cNvSpPr/>
+          <p:nvPr/>
+        </p:nvSpPr>
+        <p:spPr>
+          <a:xfrm>
+            <a:off x="2999232" y="3364992"/>
+            <a:ext cx="1645920" cy="475488"/>
+          </a:xfrm>
+          <a:prstGeom prst="rect">
+            <a:avLst>
+              <a:gd name="adj" fmla="val 9615"/>
+            </a:avLst>
+          </a:prstGeom>
+          <a:solidFill>
+            <a:srgbClr val="FFFFFF"/>
+          </a:solidFill>
+          <a:ln w="12700">
+            <a:solidFill>
+              <a:srgbClr val="0D9488"/>
+            </a:solidFill>
+            <a:prstDash val="solid"/>
+          </a:ln>
+        </p:spPr>
+      </p:sp>
+      <p:sp>
+        <p:nvSpPr>
+          <p:cNvPr id="26" name="Text 24"/>
+          <p:cNvSpPr/>
+          <p:nvPr/>
+        </p:nvSpPr>
+        <p:spPr>
+          <a:xfrm>
+            <a:off x="2999232" y="3364992"/>
+            <a:ext cx="1645920" cy="475488"/>
           </a:xfrm>
           <a:prstGeom prst="rect">
             <a:avLst/>
@@ -21001,17 +19982,56 @@
               <a:buNone/>
             </a:pPr>
             <a:r>
-              <a:rPr lang="en-US" sz="1100" b="1" dirty="0">
-                <a:solidFill>
-                  <a:srgbClr val="475569"/>
+              <a:rPr lang="en-US" sz="1400" b="1" dirty="0">
+                <a:solidFill>
+                  <a:srgbClr val="0D9488"/>
                 </a:solidFill>
                 <a:latin typeface="Trebuchet MS" pitchFamily="34" charset="0"/>
                 <a:ea typeface="Trebuchet MS" pitchFamily="34" charset="-122"/>
                 <a:cs typeface="Trebuchet MS" pitchFamily="34" charset="-120"/>
               </a:rPr>
-              <a:t>Syllables</a:t>
-            </a:r>
-            <a:endParaRPr lang="en-US" sz="1100" dirty="0"/>
+              <a:t>re</a:t>
+            </a:r>
+            <a:endParaRPr lang="en-US" sz="1400" dirty="0"/>
+          </a:p>
+        </p:txBody>
+      </p:sp>
+      <p:sp>
+        <p:nvSpPr>
+          <p:cNvPr id="27" name="Text 25"/>
+          <p:cNvSpPr/>
+          <p:nvPr/>
+        </p:nvSpPr>
+        <p:spPr>
+          <a:xfrm>
+            <a:off x="4645152" y="3364992"/>
+            <a:ext cx="1097280" cy="475488"/>
+          </a:xfrm>
+          <a:prstGeom prst="rect">
+            <a:avLst/>
+          </a:prstGeom>
+          <a:noFill/>
+          <a:ln/>
+        </p:spPr>
+        <p:txBody>
+          <a:bodyPr wrap="square" lIns="0" tIns="0" rIns="0" bIns="0" rtlCol="0" anchor="ctr"/>
+          <a:lstStyle/>
+          <a:p>
+            <a:pPr algn="ctr" indent="0" marL="0">
+              <a:buNone/>
+            </a:pPr>
+            <a:r>
+              <a:rPr lang="en-US" sz="1600" b="1" dirty="0">
+                <a:solidFill>
+                  <a:srgbClr val="0D9488"/>
+                </a:solidFill>
+                <a:latin typeface="Trebuchet MS" pitchFamily="34" charset="0"/>
+                <a:ea typeface="Trebuchet MS" pitchFamily="34" charset="-122"/>
+                <a:cs typeface="Trebuchet MS" pitchFamily="34" charset="-120"/>
+              </a:rPr>
+              <a:t>·</a:t>
+            </a:r>
+            <a:endParaRPr lang="en-US" sz="1600" dirty="0"/>
           </a:p>
         </p:txBody>
       </p:sp>
@@ -21023,34 +20043,7 @@
         </p:nvSpPr>
         <p:spPr>
           <a:xfrm>
-            <a:off x="1874520" y="3273552"/>
-            <a:ext cx="6903720" cy="658368"/>
-          </a:xfrm>
-          <a:prstGeom prst="rect">
-            <a:avLst>
-              <a:gd name="adj" fmla="val 8333"/>
-            </a:avLst>
-          </a:prstGeom>
-          <a:solidFill>
-            <a:srgbClr val="CCFBF1"/>
-          </a:solidFill>
-          <a:ln w="12700">
-            <a:solidFill>
-              <a:srgbClr val="0D9488"/>
-            </a:solidFill>
-            <a:prstDash val="solid"/>
-          </a:ln>
-        </p:spPr>
-      </p:sp>
-      <p:sp>
-        <p:nvSpPr>
-          <p:cNvPr id="29" name="Shape 27"/>
-          <p:cNvSpPr/>
-          <p:nvPr/>
-        </p:nvSpPr>
-        <p:spPr>
-          <a:xfrm>
-            <a:off x="2999232" y="3364992"/>
+            <a:off x="5742432" y="3364992"/>
             <a:ext cx="1645920" cy="475488"/>
           </a:xfrm>
           <a:prstGeom prst="rect">
@@ -21071,13 +20064,13 @@
       </p:sp>
       <p:sp>
         <p:nvSpPr>
-          <p:cNvPr id="30" name="Text 28"/>
-          <p:cNvSpPr/>
-          <p:nvPr/>
-        </p:nvSpPr>
-        <p:spPr>
-          <a:xfrm>
-            <a:off x="2999232" y="3364992"/>
+          <p:cNvPr id="29" name="Text 27"/>
+          <p:cNvSpPr/>
+          <p:nvPr/>
+        </p:nvSpPr>
+        <p:spPr>
+          <a:xfrm>
+            <a:off x="5742432" y="3364992"/>
             <a:ext cx="1645920" cy="475488"/>
           </a:xfrm>
           <a:prstGeom prst="rect">
@@ -21102,7 +20095,7 @@
                 <a:ea typeface="Trebuchet MS" pitchFamily="34" charset="-122"/>
                 <a:cs typeface="Trebuchet MS" pitchFamily="34" charset="-120"/>
               </a:rPr>
-              <a:t>out</a:t>
+              <a:t>live</a:t>
             </a:r>
             <a:endParaRPr lang="en-US" sz="1400" dirty="0"/>
           </a:p>
@@ -21110,14 +20103,41 @@
       </p:sp>
       <p:sp>
         <p:nvSpPr>
+          <p:cNvPr id="30" name="Shape 28"/>
+          <p:cNvSpPr/>
+          <p:nvPr/>
+        </p:nvSpPr>
+        <p:spPr>
+          <a:xfrm>
+            <a:off x="365760" y="4096512"/>
+            <a:ext cx="1371600" cy="804672"/>
+          </a:xfrm>
+          <a:prstGeom prst="rect">
+            <a:avLst>
+              <a:gd name="adj" fmla="val 6818"/>
+            </a:avLst>
+          </a:prstGeom>
+          <a:solidFill>
+            <a:srgbClr val="E2E8F0"/>
+          </a:solidFill>
+          <a:ln w="12700">
+            <a:solidFill>
+              <a:srgbClr val="E2E8F0"/>
+            </a:solidFill>
+            <a:prstDash val="solid"/>
+          </a:ln>
+        </p:spPr>
+      </p:sp>
+      <p:sp>
+        <p:nvSpPr>
           <p:cNvPr id="31" name="Text 29"/>
           <p:cNvSpPr/>
           <p:nvPr/>
         </p:nvSpPr>
         <p:spPr>
           <a:xfrm>
-            <a:off x="4645152" y="3364992"/>
-            <a:ext cx="1097280" cy="475488"/>
+            <a:off x="365760" y="4096512"/>
+            <a:ext cx="1371600" cy="804672"/>
           </a:xfrm>
           <a:prstGeom prst="rect">
             <a:avLst/>
@@ -21133,17 +20153,17 @@
               <a:buNone/>
             </a:pPr>
             <a:r>
-              <a:rPr lang="en-US" sz="1600" b="1" dirty="0">
-                <a:solidFill>
-                  <a:srgbClr val="0D9488"/>
+              <a:rPr lang="en-US" sz="1100" b="1" dirty="0">
+                <a:solidFill>
+                  <a:srgbClr val="475569"/>
                 </a:solidFill>
                 <a:latin typeface="Trebuchet MS" pitchFamily="34" charset="0"/>
                 <a:ea typeface="Trebuchet MS" pitchFamily="34" charset="-122"/>
                 <a:cs typeface="Trebuchet MS" pitchFamily="34" charset="-120"/>
               </a:rPr>
-              <a:t>·</a:t>
-            </a:r>
-            <a:endParaRPr lang="en-US" sz="1600" dirty="0"/>
+              <a:t>Phonemes</a:t>
+            </a:r>
+            <a:endParaRPr lang="en-US" sz="1100" dirty="0"/>
           </a:p>
         </p:txBody>
       </p:sp>
@@ -21155,74 +20175,8 @@
         </p:nvSpPr>
         <p:spPr>
           <a:xfrm>
-            <a:off x="5742432" y="3364992"/>
-            <a:ext cx="1645920" cy="475488"/>
-          </a:xfrm>
-          <a:prstGeom prst="rect">
-            <a:avLst>
-              <a:gd name="adj" fmla="val 9615"/>
-            </a:avLst>
-          </a:prstGeom>
-          <a:solidFill>
-            <a:srgbClr val="FFFFFF"/>
-          </a:solidFill>
-          <a:ln w="12700">
-            <a:solidFill>
-              <a:srgbClr val="0D9488"/>
-            </a:solidFill>
-            <a:prstDash val="solid"/>
-          </a:ln>
-        </p:spPr>
-      </p:sp>
-      <p:sp>
-        <p:nvSpPr>
-          <p:cNvPr id="33" name="Text 31"/>
-          <p:cNvSpPr/>
-          <p:nvPr/>
-        </p:nvSpPr>
-        <p:spPr>
-          <a:xfrm>
-            <a:off x="5742432" y="3364992"/>
-            <a:ext cx="1645920" cy="475488"/>
-          </a:xfrm>
-          <a:prstGeom prst="rect">
-            <a:avLst/>
-          </a:prstGeom>
-          <a:noFill/>
-          <a:ln/>
-        </p:spPr>
-        <p:txBody>
-          <a:bodyPr wrap="square" lIns="0" tIns="0" rIns="0" bIns="0" rtlCol="0" anchor="ctr"/>
-          <a:lstStyle/>
-          <a:p>
-            <a:pPr algn="ctr" indent="0" marL="0">
-              <a:buNone/>
-            </a:pPr>
-            <a:r>
-              <a:rPr lang="en-US" sz="1400" b="1" dirty="0">
-                <a:solidFill>
-                  <a:srgbClr val="0D9488"/>
-                </a:solidFill>
-                <a:latin typeface="Trebuchet MS" pitchFamily="34" charset="0"/>
-                <a:ea typeface="Trebuchet MS" pitchFamily="34" charset="-122"/>
-                <a:cs typeface="Trebuchet MS" pitchFamily="34" charset="-120"/>
-              </a:rPr>
-              <a:t>lived</a:t>
-            </a:r>
-            <a:endParaRPr lang="en-US" sz="1400" dirty="0"/>
-          </a:p>
-        </p:txBody>
-      </p:sp>
-      <p:sp>
-        <p:nvSpPr>
-          <p:cNvPr id="34" name="Shape 32"/>
-          <p:cNvSpPr/>
-          <p:nvPr/>
-        </p:nvSpPr>
-        <p:spPr>
-          <a:xfrm>
-            <a:off x="365760" y="4096512"/>
-            <a:ext cx="1371600" cy="804672"/>
+            <a:off x="1874520" y="4096512"/>
+            <a:ext cx="6903720" cy="804672"/>
           </a:xfrm>
           <a:prstGeom prst="rect">
             <a:avLst>
@@ -21230,85 +20184,19 @@
             </a:avLst>
           </a:prstGeom>
           <a:solidFill>
-            <a:srgbClr val="E2E8F0"/>
+            <a:srgbClr val="F8FAFC"/>
           </a:solidFill>
           <a:ln w="12700">
             <a:solidFill>
               <a:srgbClr val="E2E8F0"/>
             </a:solidFill>
-            <a:prstDash val="solid"/>
-          </a:ln>
-        </p:spPr>
-      </p:sp>
-      <p:sp>
-        <p:nvSpPr>
-          <p:cNvPr id="35" name="Text 33"/>
-          <p:cNvSpPr/>
-          <p:nvPr/>
-        </p:nvSpPr>
-        <p:spPr>
-          <a:xfrm>
-            <a:off x="365760" y="4096512"/>
-            <a:ext cx="1371600" cy="804672"/>
-          </a:xfrm>
-          <a:prstGeom prst="rect">
-            <a:avLst/>
-          </a:prstGeom>
-          <a:noFill/>
-          <a:ln/>
-        </p:spPr>
-        <p:txBody>
-          <a:bodyPr wrap="square" lIns="0" tIns="0" rIns="0" bIns="0" rtlCol="0" anchor="ctr"/>
-          <a:lstStyle/>
-          <a:p>
-            <a:pPr algn="ctr" indent="0" marL="0">
-              <a:buNone/>
-            </a:pPr>
-            <a:r>
-              <a:rPr lang="en-US" sz="1100" b="1" dirty="0">
-                <a:solidFill>
-                  <a:srgbClr val="475569"/>
-                </a:solidFill>
-                <a:latin typeface="Trebuchet MS" pitchFamily="34" charset="0"/>
-                <a:ea typeface="Trebuchet MS" pitchFamily="34" charset="-122"/>
-                <a:cs typeface="Trebuchet MS" pitchFamily="34" charset="-120"/>
-              </a:rPr>
-              <a:t>Phonemes</a:t>
-            </a:r>
-            <a:endParaRPr lang="en-US" sz="1100" dirty="0"/>
-          </a:p>
-        </p:txBody>
-      </p:sp>
-      <p:sp>
-        <p:nvSpPr>
-          <p:cNvPr id="36" name="Shape 34"/>
-          <p:cNvSpPr/>
-          <p:nvPr/>
-        </p:nvSpPr>
-        <p:spPr>
-          <a:xfrm>
-            <a:off x="1874520" y="4096512"/>
-            <a:ext cx="6903720" cy="804672"/>
-          </a:xfrm>
-          <a:prstGeom prst="rect">
-            <a:avLst>
-              <a:gd name="adj" fmla="val 6818"/>
-            </a:avLst>
-          </a:prstGeom>
-          <a:solidFill>
-            <a:srgbClr val="F8FAFC"/>
-          </a:solidFill>
-          <a:ln w="12700">
-            <a:solidFill>
-              <a:srgbClr val="E2E8F0"/>
-            </a:solidFill>
             <a:prstDash val="dash"/>
           </a:ln>
         </p:spPr>
       </p:sp>
       <p:sp>
         <p:nvSpPr>
-          <p:cNvPr id="37" name="Text 35"/>
+          <p:cNvPr id="33" name="Text 31"/>
           <p:cNvSpPr/>
           <p:nvPr/>
         </p:nvSpPr>
@@ -21770,7 +20658,7 @@
                 <a:ea typeface="Trebuchet MS" pitchFamily="34" charset="-122"/>
                 <a:cs typeface="Trebuchet MS" pitchFamily="34" charset="-120"/>
               </a:rPr>
-              <a:t>outlived</a:t>
+              <a:t>relive</a:t>
             </a:r>
             <a:endParaRPr lang="en-US" sz="2800" dirty="0"/>
           </a:p>
@@ -21850,7 +20738,7 @@
         </p:nvSpPr>
         <p:spPr>
           <a:xfrm>
-            <a:off x="2221992" y="2258568"/>
+            <a:off x="2938272" y="2258568"/>
             <a:ext cx="1828800" cy="292608"/>
           </a:xfrm>
           <a:prstGeom prst="rect">
@@ -21884,7 +20772,7 @@
         </p:nvSpPr>
         <p:spPr>
           <a:xfrm>
-            <a:off x="2221992" y="2258568"/>
+            <a:off x="2938272" y="2258568"/>
             <a:ext cx="1828800" cy="292608"/>
           </a:xfrm>
           <a:prstGeom prst="rect">
@@ -21909,7 +20797,7 @@
                 <a:ea typeface="Trebuchet MS" pitchFamily="34" charset="-122"/>
                 <a:cs typeface="Trebuchet MS" pitchFamily="34" charset="-120"/>
               </a:rPr>
-              <a:t>out</a:t>
+              <a:t>re</a:t>
             </a:r>
             <a:endParaRPr lang="en-US" sz="1300" dirty="0"/>
           </a:p>
@@ -21923,7 +20811,7 @@
         </p:nvSpPr>
         <p:spPr>
           <a:xfrm>
-            <a:off x="2221992" y="2569464"/>
+            <a:off x="2938272" y="2569464"/>
             <a:ext cx="1828800" cy="201168"/>
           </a:xfrm>
           <a:prstGeom prst="rect">
@@ -21948,7 +20836,7 @@
                 <a:ea typeface="Calibri" pitchFamily="34" charset="-122"/>
                 <a:cs typeface="Calibri" pitchFamily="34" charset="-120"/>
               </a:rPr>
-              <a:t>beyond or more than</a:t>
+              <a:t>again</a:t>
             </a:r>
             <a:endParaRPr lang="en-US" sz="850" dirty="0"/>
           </a:p>
@@ -21962,7 +20850,7 @@
         </p:nvSpPr>
         <p:spPr>
           <a:xfrm>
-            <a:off x="4370832" y="2258568"/>
+            <a:off x="5803392" y="2258568"/>
             <a:ext cx="1828800" cy="292608"/>
           </a:xfrm>
           <a:prstGeom prst="rect">
@@ -21996,7 +20884,7 @@
         </p:nvSpPr>
         <p:spPr>
           <a:xfrm>
-            <a:off x="4370832" y="2258568"/>
+            <a:off x="5803392" y="2258568"/>
             <a:ext cx="1828800" cy="292608"/>
           </a:xfrm>
           <a:prstGeom prst="rect">
@@ -22035,7 +20923,7 @@
         </p:nvSpPr>
         <p:spPr>
           <a:xfrm>
-            <a:off x="4370832" y="2569464"/>
+            <a:off x="5803392" y="2569464"/>
             <a:ext cx="1828800" cy="201168"/>
           </a:xfrm>
           <a:prstGeom prst="rect">
@@ -22074,30 +20962,23 @@
         </p:nvSpPr>
         <p:spPr>
           <a:xfrm>
-            <a:off x="6519672" y="2258568"/>
-            <a:ext cx="1828800" cy="292608"/>
+            <a:off x="365760" y="3273552"/>
+            <a:ext cx="1371600" cy="658368"/>
           </a:xfrm>
           <a:prstGeom prst="rect">
             <a:avLst>
-              <a:gd name="adj" fmla="val 25000"/>
+              <a:gd name="adj" fmla="val 8333"/>
             </a:avLst>
           </a:prstGeom>
           <a:solidFill>
-            <a:srgbClr val="FCE7F3"/>
-          </a:solidFill>
-          <a:ln w="19050">
-            <a:solidFill>
-              <a:srgbClr val="DB2777"/>
-            </a:solidFill>
-            <a:prstDash val="solid"/>
-          </a:ln>
-          <a:effectLst>
-            <a:outerShdw sx="100000" sy="100000" kx="0" ky="0" algn="bl" rotWithShape="0" blurRad="101600" dist="38100" dir="8100000">
-              <a:srgbClr val="000000">
-                <a:alpha val="12000"/>
-              </a:srgbClr>
-            </a:outerShdw>
-          </a:effectLst>
+            <a:srgbClr val="E2E8F0"/>
+          </a:solidFill>
+          <a:ln w="12700">
+            <a:solidFill>
+              <a:srgbClr val="E2E8F0"/>
+            </a:solidFill>
+            <a:prstDash val="solid"/>
+          </a:ln>
         </p:spPr>
       </p:sp>
       <p:sp>
@@ -22108,8 +20989,8 @@
         </p:nvSpPr>
         <p:spPr>
           <a:xfrm>
-            <a:off x="6519672" y="2258568"/>
-            <a:ext cx="1828800" cy="292608"/>
+            <a:off x="365760" y="3273552"/>
+            <a:ext cx="1371600" cy="658368"/>
           </a:xfrm>
           <a:prstGeom prst="rect">
             <a:avLst/>
@@ -22125,108 +21006,30 @@
               <a:buNone/>
             </a:pPr>
             <a:r>
-              <a:rPr lang="en-US" sz="1300" b="1" dirty="0">
-                <a:solidFill>
-                  <a:srgbClr val="9D174D"/>
+              <a:rPr lang="en-US" sz="1100" b="1" dirty="0">
+                <a:solidFill>
+                  <a:srgbClr val="475569"/>
                 </a:solidFill>
                 <a:latin typeface="Trebuchet MS" pitchFamily="34" charset="0"/>
                 <a:ea typeface="Trebuchet MS" pitchFamily="34" charset="-122"/>
                 <a:cs typeface="Trebuchet MS" pitchFamily="34" charset="-120"/>
               </a:rPr>
-              <a:t>d</a:t>
-            </a:r>
-            <a:endParaRPr lang="en-US" sz="1300" dirty="0"/>
-          </a:p>
-        </p:txBody>
-      </p:sp>
-      <p:sp>
-        <p:nvSpPr>
-          <p:cNvPr id="24" name="Text 22"/>
-          <p:cNvSpPr/>
-          <p:nvPr/>
-        </p:nvSpPr>
-        <p:spPr>
-          <a:xfrm>
-            <a:off x="6519672" y="2569464"/>
-            <a:ext cx="1828800" cy="201168"/>
-          </a:xfrm>
-          <a:prstGeom prst="rect">
-            <a:avLst/>
-          </a:prstGeom>
-          <a:noFill/>
-          <a:ln/>
-        </p:spPr>
-        <p:txBody>
-          <a:bodyPr wrap="square" lIns="0" tIns="0" rIns="0" bIns="0" rtlCol="0" anchor="t"/>
-          <a:lstStyle/>
-          <a:p>
-            <a:pPr algn="ctr" indent="0" marL="0">
-              <a:buNone/>
-            </a:pPr>
-            <a:r>
-              <a:rPr lang="en-US" sz="850" dirty="0">
-                <a:solidFill>
-                  <a:srgbClr val="475569"/>
-                </a:solidFill>
-                <a:latin typeface="Calibri" pitchFamily="34" charset="0"/>
-                <a:ea typeface="Calibri" pitchFamily="34" charset="-122"/>
-                <a:cs typeface="Calibri" pitchFamily="34" charset="-120"/>
-              </a:rPr>
-              <a:t>past tense</a:t>
-            </a:r>
-            <a:endParaRPr lang="en-US" sz="850" dirty="0"/>
-          </a:p>
-        </p:txBody>
-      </p:sp>
-      <p:sp>
-        <p:nvSpPr>
-          <p:cNvPr id="25" name="Text 23"/>
-          <p:cNvSpPr/>
-          <p:nvPr/>
-        </p:nvSpPr>
-        <p:spPr>
-          <a:xfrm>
-            <a:off x="6519672" y="2752344"/>
-            <a:ext cx="1828800" cy="182880"/>
-          </a:xfrm>
-          <a:prstGeom prst="rect">
-            <a:avLst/>
-          </a:prstGeom>
-          <a:noFill/>
-          <a:ln/>
-        </p:spPr>
-        <p:txBody>
-          <a:bodyPr wrap="square" lIns="0" tIns="0" rIns="0" bIns="0" rtlCol="0" anchor="t"/>
-          <a:lstStyle/>
-          <a:p>
-            <a:pPr algn="ctr" indent="0" marL="0">
-              <a:buNone/>
-            </a:pPr>
-            <a:r>
-              <a:rPr lang="en-US" sz="700" i="1" dirty="0">
-                <a:solidFill>
-                  <a:srgbClr val="94A3B8"/>
-                </a:solidFill>
-                <a:latin typeface="Calibri" pitchFamily="34" charset="0"/>
-                <a:ea typeface="Calibri" pitchFamily="34" charset="-122"/>
-                <a:cs typeface="Calibri" pitchFamily="34" charset="-120"/>
-              </a:rPr>
-              <a:t>'e' kept before 'd' suffix</a:t>
-            </a:r>
-            <a:endParaRPr lang="en-US" sz="700" dirty="0"/>
-          </a:p>
-        </p:txBody>
-      </p:sp>
-      <p:sp>
-        <p:nvSpPr>
-          <p:cNvPr id="26" name="Shape 24"/>
-          <p:cNvSpPr/>
-          <p:nvPr/>
-        </p:nvSpPr>
-        <p:spPr>
-          <a:xfrm>
-            <a:off x="365760" y="3273552"/>
-            <a:ext cx="1371600" cy="658368"/>
+              <a:t>Syllables</a:t>
+            </a:r>
+            <a:endParaRPr lang="en-US" sz="1100" dirty="0"/>
+          </a:p>
+        </p:txBody>
+      </p:sp>
+      <p:sp>
+        <p:nvSpPr>
+          <p:cNvPr id="24" name="Shape 22"/>
+          <p:cNvSpPr/>
+          <p:nvPr/>
+        </p:nvSpPr>
+        <p:spPr>
+          <a:xfrm>
+            <a:off x="1874520" y="3273552"/>
+            <a:ext cx="6903720" cy="658368"/>
           </a:xfrm>
           <a:prstGeom prst="rect">
             <a:avLst>
@@ -22234,26 +21037,53 @@
             </a:avLst>
           </a:prstGeom>
           <a:solidFill>
-            <a:srgbClr val="E2E8F0"/>
-          </a:solidFill>
-          <a:ln w="12700">
-            <a:solidFill>
-              <a:srgbClr val="E2E8F0"/>
-            </a:solidFill>
-            <a:prstDash val="solid"/>
-          </a:ln>
-        </p:spPr>
-      </p:sp>
-      <p:sp>
-        <p:nvSpPr>
-          <p:cNvPr id="27" name="Text 25"/>
-          <p:cNvSpPr/>
-          <p:nvPr/>
-        </p:nvSpPr>
-        <p:spPr>
-          <a:xfrm>
-            <a:off x="365760" y="3273552"/>
-            <a:ext cx="1371600" cy="658368"/>
+            <a:srgbClr val="CCFBF1"/>
+          </a:solidFill>
+          <a:ln w="12700">
+            <a:solidFill>
+              <a:srgbClr val="0D9488"/>
+            </a:solidFill>
+            <a:prstDash val="solid"/>
+          </a:ln>
+        </p:spPr>
+      </p:sp>
+      <p:sp>
+        <p:nvSpPr>
+          <p:cNvPr id="25" name="Shape 23"/>
+          <p:cNvSpPr/>
+          <p:nvPr/>
+        </p:nvSpPr>
+        <p:spPr>
+          <a:xfrm>
+            <a:off x="2999232" y="3364992"/>
+            <a:ext cx="1645920" cy="475488"/>
+          </a:xfrm>
+          <a:prstGeom prst="rect">
+            <a:avLst>
+              <a:gd name="adj" fmla="val 9615"/>
+            </a:avLst>
+          </a:prstGeom>
+          <a:solidFill>
+            <a:srgbClr val="FFFFFF"/>
+          </a:solidFill>
+          <a:ln w="12700">
+            <a:solidFill>
+              <a:srgbClr val="0D9488"/>
+            </a:solidFill>
+            <a:prstDash val="solid"/>
+          </a:ln>
+        </p:spPr>
+      </p:sp>
+      <p:sp>
+        <p:nvSpPr>
+          <p:cNvPr id="26" name="Text 24"/>
+          <p:cNvSpPr/>
+          <p:nvPr/>
+        </p:nvSpPr>
+        <p:spPr>
+          <a:xfrm>
+            <a:off x="2999232" y="3364992"/>
+            <a:ext cx="1645920" cy="475488"/>
           </a:xfrm>
           <a:prstGeom prst="rect">
             <a:avLst/>
@@ -22269,15 +21099,186 @@
               <a:buNone/>
             </a:pPr>
             <a:r>
-              <a:rPr lang="en-US" sz="1100" b="1" dirty="0">
-                <a:solidFill>
-                  <a:srgbClr val="475569"/>
+              <a:rPr lang="en-US" sz="1400" b="1" dirty="0">
+                <a:solidFill>
+                  <a:srgbClr val="0D9488"/>
                 </a:solidFill>
                 <a:latin typeface="Trebuchet MS" pitchFamily="34" charset="0"/>
                 <a:ea typeface="Trebuchet MS" pitchFamily="34" charset="-122"/>
                 <a:cs typeface="Trebuchet MS" pitchFamily="34" charset="-120"/>
               </a:rPr>
-              <a:t>Syllables</a:t>
+              <a:t>re</a:t>
+            </a:r>
+            <a:endParaRPr lang="en-US" sz="1400" dirty="0"/>
+          </a:p>
+        </p:txBody>
+      </p:sp>
+      <p:sp>
+        <p:nvSpPr>
+          <p:cNvPr id="27" name="Text 25"/>
+          <p:cNvSpPr/>
+          <p:nvPr/>
+        </p:nvSpPr>
+        <p:spPr>
+          <a:xfrm>
+            <a:off x="4645152" y="3364992"/>
+            <a:ext cx="1097280" cy="475488"/>
+          </a:xfrm>
+          <a:prstGeom prst="rect">
+            <a:avLst/>
+          </a:prstGeom>
+          <a:noFill/>
+          <a:ln/>
+        </p:spPr>
+        <p:txBody>
+          <a:bodyPr wrap="square" lIns="0" tIns="0" rIns="0" bIns="0" rtlCol="0" anchor="ctr"/>
+          <a:lstStyle/>
+          <a:p>
+            <a:pPr algn="ctr" indent="0" marL="0">
+              <a:buNone/>
+            </a:pPr>
+            <a:r>
+              <a:rPr lang="en-US" sz="1600" b="1" dirty="0">
+                <a:solidFill>
+                  <a:srgbClr val="0D9488"/>
+                </a:solidFill>
+                <a:latin typeface="Trebuchet MS" pitchFamily="34" charset="0"/>
+                <a:ea typeface="Trebuchet MS" pitchFamily="34" charset="-122"/>
+                <a:cs typeface="Trebuchet MS" pitchFamily="34" charset="-120"/>
+              </a:rPr>
+              <a:t>·</a:t>
+            </a:r>
+            <a:endParaRPr lang="en-US" sz="1600" dirty="0"/>
+          </a:p>
+        </p:txBody>
+      </p:sp>
+      <p:sp>
+        <p:nvSpPr>
+          <p:cNvPr id="28" name="Shape 26"/>
+          <p:cNvSpPr/>
+          <p:nvPr/>
+        </p:nvSpPr>
+        <p:spPr>
+          <a:xfrm>
+            <a:off x="5742432" y="3364992"/>
+            <a:ext cx="1645920" cy="475488"/>
+          </a:xfrm>
+          <a:prstGeom prst="rect">
+            <a:avLst>
+              <a:gd name="adj" fmla="val 9615"/>
+            </a:avLst>
+          </a:prstGeom>
+          <a:solidFill>
+            <a:srgbClr val="FFFFFF"/>
+          </a:solidFill>
+          <a:ln w="12700">
+            <a:solidFill>
+              <a:srgbClr val="0D9488"/>
+            </a:solidFill>
+            <a:prstDash val="solid"/>
+          </a:ln>
+        </p:spPr>
+      </p:sp>
+      <p:sp>
+        <p:nvSpPr>
+          <p:cNvPr id="29" name="Text 27"/>
+          <p:cNvSpPr/>
+          <p:nvPr/>
+        </p:nvSpPr>
+        <p:spPr>
+          <a:xfrm>
+            <a:off x="5742432" y="3364992"/>
+            <a:ext cx="1645920" cy="475488"/>
+          </a:xfrm>
+          <a:prstGeom prst="rect">
+            <a:avLst/>
+          </a:prstGeom>
+          <a:noFill/>
+          <a:ln/>
+        </p:spPr>
+        <p:txBody>
+          <a:bodyPr wrap="square" lIns="0" tIns="0" rIns="0" bIns="0" rtlCol="0" anchor="ctr"/>
+          <a:lstStyle/>
+          <a:p>
+            <a:pPr algn="ctr" indent="0" marL="0">
+              <a:buNone/>
+            </a:pPr>
+            <a:r>
+              <a:rPr lang="en-US" sz="1400" b="1" dirty="0">
+                <a:solidFill>
+                  <a:srgbClr val="0D9488"/>
+                </a:solidFill>
+                <a:latin typeface="Trebuchet MS" pitchFamily="34" charset="0"/>
+                <a:ea typeface="Trebuchet MS" pitchFamily="34" charset="-122"/>
+                <a:cs typeface="Trebuchet MS" pitchFamily="34" charset="-120"/>
+              </a:rPr>
+              <a:t>live</a:t>
+            </a:r>
+            <a:endParaRPr lang="en-US" sz="1400" dirty="0"/>
+          </a:p>
+        </p:txBody>
+      </p:sp>
+      <p:sp>
+        <p:nvSpPr>
+          <p:cNvPr id="30" name="Shape 28"/>
+          <p:cNvSpPr/>
+          <p:nvPr/>
+        </p:nvSpPr>
+        <p:spPr>
+          <a:xfrm>
+            <a:off x="365760" y="4096512"/>
+            <a:ext cx="1371600" cy="804672"/>
+          </a:xfrm>
+          <a:prstGeom prst="rect">
+            <a:avLst>
+              <a:gd name="adj" fmla="val 6818"/>
+            </a:avLst>
+          </a:prstGeom>
+          <a:solidFill>
+            <a:srgbClr val="E2E8F0"/>
+          </a:solidFill>
+          <a:ln w="12700">
+            <a:solidFill>
+              <a:srgbClr val="E2E8F0"/>
+            </a:solidFill>
+            <a:prstDash val="solid"/>
+          </a:ln>
+        </p:spPr>
+      </p:sp>
+      <p:sp>
+        <p:nvSpPr>
+          <p:cNvPr id="31" name="Text 29"/>
+          <p:cNvSpPr/>
+          <p:nvPr/>
+        </p:nvSpPr>
+        <p:spPr>
+          <a:xfrm>
+            <a:off x="365760" y="4096512"/>
+            <a:ext cx="1371600" cy="804672"/>
+          </a:xfrm>
+          <a:prstGeom prst="rect">
+            <a:avLst/>
+          </a:prstGeom>
+          <a:noFill/>
+          <a:ln/>
+        </p:spPr>
+        <p:txBody>
+          <a:bodyPr wrap="square" lIns="0" tIns="0" rIns="0" bIns="0" rtlCol="0" anchor="ctr"/>
+          <a:lstStyle/>
+          <a:p>
+            <a:pPr algn="ctr" indent="0" marL="0">
+              <a:buNone/>
+            </a:pPr>
+            <a:r>
+              <a:rPr lang="en-US" sz="1100" b="1" dirty="0">
+                <a:solidFill>
+                  <a:srgbClr val="475569"/>
+                </a:solidFill>
+                <a:latin typeface="Trebuchet MS" pitchFamily="34" charset="0"/>
+                <a:ea typeface="Trebuchet MS" pitchFamily="34" charset="-122"/>
+                <a:cs typeface="Trebuchet MS" pitchFamily="34" charset="-120"/>
+              </a:rPr>
+              <a:t>Phonemes</a:t>
             </a:r>
             <a:endParaRPr lang="en-US" sz="1100" dirty="0"/>
           </a:p>
@@ -22285,13 +21286,13 @@
       </p:sp>
       <p:sp>
         <p:nvSpPr>
-          <p:cNvPr id="28" name="Shape 26"/>
-          <p:cNvSpPr/>
-          <p:nvPr/>
-        </p:nvSpPr>
-        <p:spPr>
-          <a:xfrm>
-            <a:off x="1874520" y="3273552"/>
+          <p:cNvPr id="32" name="Shape 30"/>
+          <p:cNvSpPr/>
+          <p:nvPr/>
+        </p:nvSpPr>
+        <p:spPr>
+          <a:xfrm>
+            <a:off x="1874520" y="4096512"/>
             <a:ext cx="6903720" cy="658368"/>
           </a:xfrm>
           <a:prstGeom prst="rect">
@@ -22300,30 +21301,30 @@
             </a:avLst>
           </a:prstGeom>
           <a:solidFill>
-            <a:srgbClr val="CCFBF1"/>
-          </a:solidFill>
-          <a:ln w="12700">
-            <a:solidFill>
-              <a:srgbClr val="0D9488"/>
-            </a:solidFill>
-            <a:prstDash val="solid"/>
-          </a:ln>
-        </p:spPr>
-      </p:sp>
-      <p:sp>
-        <p:nvSpPr>
-          <p:cNvPr id="29" name="Shape 27"/>
-          <p:cNvSpPr/>
-          <p:nvPr/>
-        </p:nvSpPr>
-        <p:spPr>
-          <a:xfrm>
-            <a:off x="2999232" y="3364992"/>
-            <a:ext cx="1645920" cy="475488"/>
+            <a:srgbClr val="FCE7F3"/>
+          </a:solidFill>
+          <a:ln w="12700">
+            <a:solidFill>
+              <a:srgbClr val="DB2777"/>
+            </a:solidFill>
+            <a:prstDash val="solid"/>
+          </a:ln>
+        </p:spPr>
+      </p:sp>
+      <p:sp>
+        <p:nvSpPr>
+          <p:cNvPr id="33" name="Shape 31"/>
+          <p:cNvSpPr/>
+          <p:nvPr/>
+        </p:nvSpPr>
+        <p:spPr>
+          <a:xfrm>
+            <a:off x="2254649" y="4169664"/>
+            <a:ext cx="685800" cy="475488"/>
           </a:xfrm>
           <a:prstGeom prst="rect">
             <a:avLst>
-              <a:gd name="adj" fmla="val 9615"/>
+              <a:gd name="adj" fmla="val 7692"/>
             </a:avLst>
           </a:prstGeom>
           <a:solidFill>
@@ -22331,22 +21332,22 @@
           </a:solidFill>
           <a:ln w="12700">
             <a:solidFill>
-              <a:srgbClr val="0D9488"/>
-            </a:solidFill>
-            <a:prstDash val="solid"/>
-          </a:ln>
-        </p:spPr>
-      </p:sp>
-      <p:sp>
-        <p:nvSpPr>
-          <p:cNvPr id="30" name="Text 28"/>
-          <p:cNvSpPr/>
-          <p:nvPr/>
-        </p:nvSpPr>
-        <p:spPr>
-          <a:xfrm>
-            <a:off x="2999232" y="3364992"/>
-            <a:ext cx="1645920" cy="475488"/>
+              <a:srgbClr val="DB2777"/>
+            </a:solidFill>
+            <a:prstDash val="solid"/>
+          </a:ln>
+        </p:spPr>
+      </p:sp>
+      <p:sp>
+        <p:nvSpPr>
+          <p:cNvPr id="34" name="Text 32"/>
+          <p:cNvSpPr/>
+          <p:nvPr/>
+        </p:nvSpPr>
+        <p:spPr>
+          <a:xfrm>
+            <a:off x="2254649" y="4169664"/>
+            <a:ext cx="685800" cy="475488"/>
           </a:xfrm>
           <a:prstGeom prst="rect">
             <a:avLst/>
@@ -22362,30 +21363,57 @@
               <a:buNone/>
             </a:pPr>
             <a:r>
-              <a:rPr lang="en-US" sz="1400" b="1" dirty="0">
-                <a:solidFill>
-                  <a:srgbClr val="0D9488"/>
+              <a:rPr lang="en-US" sz="900" b="1" dirty="0">
+                <a:solidFill>
+                  <a:srgbClr val="9D174D"/>
                 </a:solidFill>
                 <a:latin typeface="Trebuchet MS" pitchFamily="34" charset="0"/>
                 <a:ea typeface="Trebuchet MS" pitchFamily="34" charset="-122"/>
                 <a:cs typeface="Trebuchet MS" pitchFamily="34" charset="-120"/>
               </a:rPr>
-              <a:t>out</a:t>
-            </a:r>
-            <a:endParaRPr lang="en-US" sz="1400" dirty="0"/>
-          </a:p>
-        </p:txBody>
-      </p:sp>
-      <p:sp>
-        <p:nvSpPr>
-          <p:cNvPr id="31" name="Text 29"/>
-          <p:cNvSpPr/>
-          <p:nvPr/>
-        </p:nvSpPr>
-        <p:spPr>
-          <a:xfrm>
-            <a:off x="4645152" y="3364992"/>
-            <a:ext cx="1097280" cy="475488"/>
+              <a:t>r</a:t>
+            </a:r>
+            <a:endParaRPr lang="en-US" sz="900" dirty="0"/>
+          </a:p>
+        </p:txBody>
+      </p:sp>
+      <p:sp>
+        <p:nvSpPr>
+          <p:cNvPr id="35" name="Shape 33"/>
+          <p:cNvSpPr/>
+          <p:nvPr/>
+        </p:nvSpPr>
+        <p:spPr>
+          <a:xfrm>
+            <a:off x="3293146" y="4169664"/>
+            <a:ext cx="685800" cy="475488"/>
+          </a:xfrm>
+          <a:prstGeom prst="rect">
+            <a:avLst>
+              <a:gd name="adj" fmla="val 7692"/>
+            </a:avLst>
+          </a:prstGeom>
+          <a:solidFill>
+            <a:srgbClr val="FFFFFF"/>
+          </a:solidFill>
+          <a:ln w="12700">
+            <a:solidFill>
+              <a:srgbClr val="DB2777"/>
+            </a:solidFill>
+            <a:prstDash val="solid"/>
+          </a:ln>
+        </p:spPr>
+      </p:sp>
+      <p:sp>
+        <p:nvSpPr>
+          <p:cNvPr id="36" name="Text 34"/>
+          <p:cNvSpPr/>
+          <p:nvPr/>
+        </p:nvSpPr>
+        <p:spPr>
+          <a:xfrm>
+            <a:off x="3293146" y="4169664"/>
+            <a:ext cx="685800" cy="475488"/>
           </a:xfrm>
           <a:prstGeom prst="rect">
             <a:avLst/>
@@ -22401,34 +21429,34 @@
               <a:buNone/>
             </a:pPr>
             <a:r>
-              <a:rPr lang="en-US" sz="1600" b="1" dirty="0">
-                <a:solidFill>
-                  <a:srgbClr val="0D9488"/>
+              <a:rPr lang="en-US" sz="900" b="1" dirty="0">
+                <a:solidFill>
+                  <a:srgbClr val="9D174D"/>
                 </a:solidFill>
                 <a:latin typeface="Trebuchet MS" pitchFamily="34" charset="0"/>
                 <a:ea typeface="Trebuchet MS" pitchFamily="34" charset="-122"/>
                 <a:cs typeface="Trebuchet MS" pitchFamily="34" charset="-120"/>
               </a:rPr>
-              <a:t>·</a:t>
-            </a:r>
-            <a:endParaRPr lang="en-US" sz="1600" dirty="0"/>
-          </a:p>
-        </p:txBody>
-      </p:sp>
-      <p:sp>
-        <p:nvSpPr>
-          <p:cNvPr id="32" name="Shape 30"/>
-          <p:cNvSpPr/>
-          <p:nvPr/>
-        </p:nvSpPr>
-        <p:spPr>
-          <a:xfrm>
-            <a:off x="5742432" y="3364992"/>
-            <a:ext cx="1645920" cy="475488"/>
+              <a:t>e</a:t>
+            </a:r>
+            <a:endParaRPr lang="en-US" sz="900" dirty="0"/>
+          </a:p>
+        </p:txBody>
+      </p:sp>
+      <p:sp>
+        <p:nvSpPr>
+          <p:cNvPr id="37" name="Shape 35"/>
+          <p:cNvSpPr/>
+          <p:nvPr/>
+        </p:nvSpPr>
+        <p:spPr>
+          <a:xfrm>
+            <a:off x="4331643" y="4169664"/>
+            <a:ext cx="685800" cy="475488"/>
           </a:xfrm>
           <a:prstGeom prst="rect">
             <a:avLst>
-              <a:gd name="adj" fmla="val 9615"/>
+              <a:gd name="adj" fmla="val 7692"/>
             </a:avLst>
           </a:prstGeom>
           <a:solidFill>
@@ -22436,22 +21464,22 @@
           </a:solidFill>
           <a:ln w="12700">
             <a:solidFill>
-              <a:srgbClr val="0D9488"/>
-            </a:solidFill>
-            <a:prstDash val="solid"/>
-          </a:ln>
-        </p:spPr>
-      </p:sp>
-      <p:sp>
-        <p:nvSpPr>
-          <p:cNvPr id="33" name="Text 31"/>
-          <p:cNvSpPr/>
-          <p:nvPr/>
-        </p:nvSpPr>
-        <p:spPr>
-          <a:xfrm>
-            <a:off x="5742432" y="3364992"/>
-            <a:ext cx="1645920" cy="475488"/>
+              <a:srgbClr val="DB2777"/>
+            </a:solidFill>
+            <a:prstDash val="solid"/>
+          </a:ln>
+        </p:spPr>
+      </p:sp>
+      <p:sp>
+        <p:nvSpPr>
+          <p:cNvPr id="38" name="Text 36"/>
+          <p:cNvSpPr/>
+          <p:nvPr/>
+        </p:nvSpPr>
+        <p:spPr>
+          <a:xfrm>
+            <a:off x="4331643" y="4169664"/>
+            <a:ext cx="685800" cy="475488"/>
           </a:xfrm>
           <a:prstGeom prst="rect">
             <a:avLst/>
@@ -22467,57 +21495,57 @@
               <a:buNone/>
             </a:pPr>
             <a:r>
-              <a:rPr lang="en-US" sz="1400" b="1" dirty="0">
-                <a:solidFill>
-                  <a:srgbClr val="0D9488"/>
+              <a:rPr lang="en-US" sz="900" b="1" dirty="0">
+                <a:solidFill>
+                  <a:srgbClr val="9D174D"/>
                 </a:solidFill>
                 <a:latin typeface="Trebuchet MS" pitchFamily="34" charset="0"/>
                 <a:ea typeface="Trebuchet MS" pitchFamily="34" charset="-122"/>
                 <a:cs typeface="Trebuchet MS" pitchFamily="34" charset="-120"/>
               </a:rPr>
-              <a:t>lived</a:t>
-            </a:r>
-            <a:endParaRPr lang="en-US" sz="1400" dirty="0"/>
-          </a:p>
-        </p:txBody>
-      </p:sp>
-      <p:sp>
-        <p:nvSpPr>
-          <p:cNvPr id="34" name="Shape 32"/>
-          <p:cNvSpPr/>
-          <p:nvPr/>
-        </p:nvSpPr>
-        <p:spPr>
-          <a:xfrm>
-            <a:off x="365760" y="4096512"/>
-            <a:ext cx="1371600" cy="804672"/>
+              <a:t>l</a:t>
+            </a:r>
+            <a:endParaRPr lang="en-US" sz="900" dirty="0"/>
+          </a:p>
+        </p:txBody>
+      </p:sp>
+      <p:sp>
+        <p:nvSpPr>
+          <p:cNvPr id="39" name="Shape 37"/>
+          <p:cNvSpPr/>
+          <p:nvPr/>
+        </p:nvSpPr>
+        <p:spPr>
+          <a:xfrm>
+            <a:off x="5370141" y="4169664"/>
+            <a:ext cx="685800" cy="475488"/>
           </a:xfrm>
           <a:prstGeom prst="rect">
             <a:avLst>
-              <a:gd name="adj" fmla="val 6818"/>
+              <a:gd name="adj" fmla="val 7692"/>
             </a:avLst>
           </a:prstGeom>
           <a:solidFill>
-            <a:srgbClr val="E2E8F0"/>
-          </a:solidFill>
-          <a:ln w="12700">
-            <a:solidFill>
-              <a:srgbClr val="E2E8F0"/>
-            </a:solidFill>
-            <a:prstDash val="solid"/>
-          </a:ln>
-        </p:spPr>
-      </p:sp>
-      <p:sp>
-        <p:nvSpPr>
-          <p:cNvPr id="35" name="Text 33"/>
-          <p:cNvSpPr/>
-          <p:nvPr/>
-        </p:nvSpPr>
-        <p:spPr>
-          <a:xfrm>
-            <a:off x="365760" y="4096512"/>
-            <a:ext cx="1371600" cy="804672"/>
+            <a:srgbClr val="FFFFFF"/>
+          </a:solidFill>
+          <a:ln w="12700">
+            <a:solidFill>
+              <a:srgbClr val="DB2777"/>
+            </a:solidFill>
+            <a:prstDash val="solid"/>
+          </a:ln>
+        </p:spPr>
+      </p:sp>
+      <p:sp>
+        <p:nvSpPr>
+          <p:cNvPr id="40" name="Text 38"/>
+          <p:cNvSpPr/>
+          <p:nvPr/>
+        </p:nvSpPr>
+        <p:spPr>
+          <a:xfrm>
+            <a:off x="5370141" y="4169664"/>
+            <a:ext cx="685800" cy="475488"/>
           </a:xfrm>
           <a:prstGeom prst="rect">
             <a:avLst/>
@@ -22533,56 +21561,29 @@
               <a:buNone/>
             </a:pPr>
             <a:r>
-              <a:rPr lang="en-US" sz="1100" b="1" dirty="0">
-                <a:solidFill>
-                  <a:srgbClr val="475569"/>
+              <a:rPr lang="en-US" sz="900" b="1" dirty="0">
+                <a:solidFill>
+                  <a:srgbClr val="9D174D"/>
                 </a:solidFill>
                 <a:latin typeface="Trebuchet MS" pitchFamily="34" charset="0"/>
                 <a:ea typeface="Trebuchet MS" pitchFamily="34" charset="-122"/>
                 <a:cs typeface="Trebuchet MS" pitchFamily="34" charset="-120"/>
               </a:rPr>
-              <a:t>Phonemes</a:t>
-            </a:r>
-            <a:endParaRPr lang="en-US" sz="1100" dirty="0"/>
-          </a:p>
-        </p:txBody>
-      </p:sp>
-      <p:sp>
-        <p:nvSpPr>
-          <p:cNvPr id="36" name="Shape 34"/>
-          <p:cNvSpPr/>
-          <p:nvPr/>
-        </p:nvSpPr>
-        <p:spPr>
-          <a:xfrm>
-            <a:off x="1874520" y="4096512"/>
-            <a:ext cx="6903720" cy="658368"/>
-          </a:xfrm>
-          <a:prstGeom prst="rect">
-            <a:avLst>
-              <a:gd name="adj" fmla="val 8333"/>
-            </a:avLst>
-          </a:prstGeom>
-          <a:solidFill>
-            <a:srgbClr val="FCE7F3"/>
-          </a:solidFill>
-          <a:ln w="12700">
-            <a:solidFill>
-              <a:srgbClr val="DB2777"/>
-            </a:solidFill>
-            <a:prstDash val="solid"/>
-          </a:ln>
-        </p:spPr>
-      </p:sp>
-      <p:sp>
-        <p:nvSpPr>
-          <p:cNvPr id="37" name="Shape 35"/>
-          <p:cNvSpPr/>
-          <p:nvPr/>
-        </p:nvSpPr>
-        <p:spPr>
-          <a:xfrm>
-            <a:off x="2254649" y="4169664"/>
+              <a:t>i</a:t>
+            </a:r>
+            <a:endParaRPr lang="en-US" sz="900" dirty="0"/>
+          </a:p>
+        </p:txBody>
+      </p:sp>
+      <p:sp>
+        <p:nvSpPr>
+          <p:cNvPr id="41" name="Shape 39"/>
+          <p:cNvSpPr/>
+          <p:nvPr/>
+        </p:nvSpPr>
+        <p:spPr>
+          <a:xfrm>
+            <a:off x="6408638" y="4169664"/>
             <a:ext cx="685800" cy="475488"/>
           </a:xfrm>
           <a:prstGeom prst="rect">
@@ -22603,13 +21604,13 @@
       </p:sp>
       <p:sp>
         <p:nvSpPr>
-          <p:cNvPr id="38" name="Text 36"/>
-          <p:cNvSpPr/>
-          <p:nvPr/>
-        </p:nvSpPr>
-        <p:spPr>
-          <a:xfrm>
-            <a:off x="2254649" y="4169664"/>
+          <p:cNvPr id="42" name="Text 40"/>
+          <p:cNvSpPr/>
+          <p:nvPr/>
+        </p:nvSpPr>
+        <p:spPr>
+          <a:xfrm>
+            <a:off x="6408638" y="4169664"/>
             <a:ext cx="685800" cy="475488"/>
           </a:xfrm>
           <a:prstGeom prst="rect">
@@ -22634,7 +21635,7 @@
                 <a:ea typeface="Trebuchet MS" pitchFamily="34" charset="-122"/>
                 <a:cs typeface="Trebuchet MS" pitchFamily="34" charset="-120"/>
               </a:rPr>
-              <a:t>ou</a:t>
+              <a:t>v</a:t>
             </a:r>
             <a:endParaRPr lang="en-US" sz="900" dirty="0"/>
           </a:p>
@@ -22642,13 +21643,13 @@
       </p:sp>
       <p:sp>
         <p:nvSpPr>
-          <p:cNvPr id="39" name="Shape 37"/>
-          <p:cNvSpPr/>
-          <p:nvPr/>
-        </p:nvSpPr>
-        <p:spPr>
-          <a:xfrm>
-            <a:off x="3293146" y="4169664"/>
+          <p:cNvPr id="43" name="Shape 41"/>
+          <p:cNvSpPr/>
+          <p:nvPr/>
+        </p:nvSpPr>
+        <p:spPr>
+          <a:xfrm>
+            <a:off x="7447135" y="4169664"/>
             <a:ext cx="685800" cy="475488"/>
           </a:xfrm>
           <a:prstGeom prst="rect">
@@ -22669,13 +21670,13 @@
       </p:sp>
       <p:sp>
         <p:nvSpPr>
-          <p:cNvPr id="40" name="Text 38"/>
-          <p:cNvSpPr/>
-          <p:nvPr/>
-        </p:nvSpPr>
-        <p:spPr>
-          <a:xfrm>
-            <a:off x="3293146" y="4169664"/>
+          <p:cNvPr id="44" name="Text 42"/>
+          <p:cNvSpPr/>
+          <p:nvPr/>
+        </p:nvSpPr>
+        <p:spPr>
+          <a:xfrm>
+            <a:off x="7447135" y="4169664"/>
             <a:ext cx="685800" cy="475488"/>
           </a:xfrm>
           <a:prstGeom prst="rect">
@@ -22700,271 +21701,7 @@
                 <a:ea typeface="Trebuchet MS" pitchFamily="34" charset="-122"/>
                 <a:cs typeface="Trebuchet MS" pitchFamily="34" charset="-120"/>
               </a:rPr>
-              <a:t>t</a:t>
-            </a:r>
-            <a:endParaRPr lang="en-US" sz="900" dirty="0"/>
-          </a:p>
-        </p:txBody>
-      </p:sp>
-      <p:sp>
-        <p:nvSpPr>
-          <p:cNvPr id="41" name="Shape 39"/>
-          <p:cNvSpPr/>
-          <p:nvPr/>
-        </p:nvSpPr>
-        <p:spPr>
-          <a:xfrm>
-            <a:off x="4331643" y="4169664"/>
-            <a:ext cx="685800" cy="475488"/>
-          </a:xfrm>
-          <a:prstGeom prst="rect">
-            <a:avLst>
-              <a:gd name="adj" fmla="val 7692"/>
-            </a:avLst>
-          </a:prstGeom>
-          <a:solidFill>
-            <a:srgbClr val="FFFFFF"/>
-          </a:solidFill>
-          <a:ln w="12700">
-            <a:solidFill>
-              <a:srgbClr val="DB2777"/>
-            </a:solidFill>
-            <a:prstDash val="solid"/>
-          </a:ln>
-        </p:spPr>
-      </p:sp>
-      <p:sp>
-        <p:nvSpPr>
-          <p:cNvPr id="42" name="Text 40"/>
-          <p:cNvSpPr/>
-          <p:nvPr/>
-        </p:nvSpPr>
-        <p:spPr>
-          <a:xfrm>
-            <a:off x="4331643" y="4169664"/>
-            <a:ext cx="685800" cy="475488"/>
-          </a:xfrm>
-          <a:prstGeom prst="rect">
-            <a:avLst/>
-          </a:prstGeom>
-          <a:noFill/>
-          <a:ln/>
-        </p:spPr>
-        <p:txBody>
-          <a:bodyPr wrap="square" lIns="0" tIns="0" rIns="0" bIns="0" rtlCol="0" anchor="ctr"/>
-          <a:lstStyle/>
-          <a:p>
-            <a:pPr algn="ctr" indent="0" marL="0">
-              <a:buNone/>
-            </a:pPr>
-            <a:r>
-              <a:rPr lang="en-US" sz="900" b="1" dirty="0">
-                <a:solidFill>
-                  <a:srgbClr val="9D174D"/>
-                </a:solidFill>
-                <a:latin typeface="Trebuchet MS" pitchFamily="34" charset="0"/>
-                <a:ea typeface="Trebuchet MS" pitchFamily="34" charset="-122"/>
-                <a:cs typeface="Trebuchet MS" pitchFamily="34" charset="-120"/>
-              </a:rPr>
-              <a:t>l</a:t>
-            </a:r>
-            <a:endParaRPr lang="en-US" sz="900" dirty="0"/>
-          </a:p>
-        </p:txBody>
-      </p:sp>
-      <p:sp>
-        <p:nvSpPr>
-          <p:cNvPr id="43" name="Shape 41"/>
-          <p:cNvSpPr/>
-          <p:nvPr/>
-        </p:nvSpPr>
-        <p:spPr>
-          <a:xfrm>
-            <a:off x="5370141" y="4169664"/>
-            <a:ext cx="685800" cy="475488"/>
-          </a:xfrm>
-          <a:prstGeom prst="rect">
-            <a:avLst>
-              <a:gd name="adj" fmla="val 7692"/>
-            </a:avLst>
-          </a:prstGeom>
-          <a:solidFill>
-            <a:srgbClr val="FFFFFF"/>
-          </a:solidFill>
-          <a:ln w="12700">
-            <a:solidFill>
-              <a:srgbClr val="DB2777"/>
-            </a:solidFill>
-            <a:prstDash val="solid"/>
-          </a:ln>
-        </p:spPr>
-      </p:sp>
-      <p:sp>
-        <p:nvSpPr>
-          <p:cNvPr id="44" name="Text 42"/>
-          <p:cNvSpPr/>
-          <p:nvPr/>
-        </p:nvSpPr>
-        <p:spPr>
-          <a:xfrm>
-            <a:off x="5370141" y="4169664"/>
-            <a:ext cx="685800" cy="475488"/>
-          </a:xfrm>
-          <a:prstGeom prst="rect">
-            <a:avLst/>
-          </a:prstGeom>
-          <a:noFill/>
-          <a:ln/>
-        </p:spPr>
-        <p:txBody>
-          <a:bodyPr wrap="square" lIns="0" tIns="0" rIns="0" bIns="0" rtlCol="0" anchor="ctr"/>
-          <a:lstStyle/>
-          <a:p>
-            <a:pPr algn="ctr" indent="0" marL="0">
-              <a:buNone/>
-            </a:pPr>
-            <a:r>
-              <a:rPr lang="en-US" sz="900" b="1" dirty="0">
-                <a:solidFill>
-                  <a:srgbClr val="9D174D"/>
-                </a:solidFill>
-                <a:latin typeface="Trebuchet MS" pitchFamily="34" charset="0"/>
-                <a:ea typeface="Trebuchet MS" pitchFamily="34" charset="-122"/>
-                <a:cs typeface="Trebuchet MS" pitchFamily="34" charset="-120"/>
-              </a:rPr>
-              <a:t>i</a:t>
-            </a:r>
-            <a:endParaRPr lang="en-US" sz="900" dirty="0"/>
-          </a:p>
-        </p:txBody>
-      </p:sp>
-      <p:sp>
-        <p:nvSpPr>
-          <p:cNvPr id="45" name="Shape 43"/>
-          <p:cNvSpPr/>
-          <p:nvPr/>
-        </p:nvSpPr>
-        <p:spPr>
-          <a:xfrm>
-            <a:off x="6408638" y="4169664"/>
-            <a:ext cx="685800" cy="475488"/>
-          </a:xfrm>
-          <a:prstGeom prst="rect">
-            <a:avLst>
-              <a:gd name="adj" fmla="val 7692"/>
-            </a:avLst>
-          </a:prstGeom>
-          <a:solidFill>
-            <a:srgbClr val="FFFFFF"/>
-          </a:solidFill>
-          <a:ln w="12700">
-            <a:solidFill>
-              <a:srgbClr val="DB2777"/>
-            </a:solidFill>
-            <a:prstDash val="solid"/>
-          </a:ln>
-        </p:spPr>
-      </p:sp>
-      <p:sp>
-        <p:nvSpPr>
-          <p:cNvPr id="46" name="Text 44"/>
-          <p:cNvSpPr/>
-          <p:nvPr/>
-        </p:nvSpPr>
-        <p:spPr>
-          <a:xfrm>
-            <a:off x="6408638" y="4169664"/>
-            <a:ext cx="685800" cy="475488"/>
-          </a:xfrm>
-          <a:prstGeom prst="rect">
-            <a:avLst/>
-          </a:prstGeom>
-          <a:noFill/>
-          <a:ln/>
-        </p:spPr>
-        <p:txBody>
-          <a:bodyPr wrap="square" lIns="0" tIns="0" rIns="0" bIns="0" rtlCol="0" anchor="ctr"/>
-          <a:lstStyle/>
-          <a:p>
-            <a:pPr algn="ctr" indent="0" marL="0">
-              <a:buNone/>
-            </a:pPr>
-            <a:r>
-              <a:rPr lang="en-US" sz="900" b="1" dirty="0">
-                <a:solidFill>
-                  <a:srgbClr val="9D174D"/>
-                </a:solidFill>
-                <a:latin typeface="Trebuchet MS" pitchFamily="34" charset="0"/>
-                <a:ea typeface="Trebuchet MS" pitchFamily="34" charset="-122"/>
-                <a:cs typeface="Trebuchet MS" pitchFamily="34" charset="-120"/>
-              </a:rPr>
-              <a:t>v</a:t>
-            </a:r>
-            <a:endParaRPr lang="en-US" sz="900" dirty="0"/>
-          </a:p>
-        </p:txBody>
-      </p:sp>
-      <p:sp>
-        <p:nvSpPr>
-          <p:cNvPr id="47" name="Shape 45"/>
-          <p:cNvSpPr/>
-          <p:nvPr/>
-        </p:nvSpPr>
-        <p:spPr>
-          <a:xfrm>
-            <a:off x="7447135" y="4169664"/>
-            <a:ext cx="685800" cy="475488"/>
-          </a:xfrm>
-          <a:prstGeom prst="rect">
-            <a:avLst>
-              <a:gd name="adj" fmla="val 7692"/>
-            </a:avLst>
-          </a:prstGeom>
-          <a:solidFill>
-            <a:srgbClr val="FFFFFF"/>
-          </a:solidFill>
-          <a:ln w="12700">
-            <a:solidFill>
-              <a:srgbClr val="DB2777"/>
-            </a:solidFill>
-            <a:prstDash val="solid"/>
-          </a:ln>
-        </p:spPr>
-      </p:sp>
-      <p:sp>
-        <p:nvSpPr>
-          <p:cNvPr id="48" name="Text 46"/>
-          <p:cNvSpPr/>
-          <p:nvPr/>
-        </p:nvSpPr>
-        <p:spPr>
-          <a:xfrm>
-            <a:off x="7447135" y="4169664"/>
-            <a:ext cx="685800" cy="475488"/>
-          </a:xfrm>
-          <a:prstGeom prst="rect">
-            <a:avLst/>
-          </a:prstGeom>
-          <a:noFill/>
-          <a:ln/>
-        </p:spPr>
-        <p:txBody>
-          <a:bodyPr wrap="square" lIns="0" tIns="0" rIns="0" bIns="0" rtlCol="0" anchor="ctr"/>
-          <a:lstStyle/>
-          <a:p>
-            <a:pPr algn="ctr" indent="0" marL="0">
-              <a:buNone/>
-            </a:pPr>
-            <a:r>
-              <a:rPr lang="en-US" sz="900" b="1" dirty="0">
-                <a:solidFill>
-                  <a:srgbClr val="9D174D"/>
-                </a:solidFill>
-                <a:latin typeface="Trebuchet MS" pitchFamily="34" charset="0"/>
-                <a:ea typeface="Trebuchet MS" pitchFamily="34" charset="-122"/>
-                <a:cs typeface="Trebuchet MS" pitchFamily="34" charset="-120"/>
-              </a:rPr>
-              <a:t>d</a:t>
+              <a:t>e</a:t>
             </a:r>
             <a:endParaRPr lang="en-US" sz="900" dirty="0"/>
           </a:p>
@@ -23395,7 +22132,7 @@
                 <a:ea typeface="Trebuchet MS" pitchFamily="34" charset="-122"/>
                 <a:cs typeface="Trebuchet MS" pitchFamily="34" charset="-120"/>
               </a:rPr>
-              <a:t>lively</a:t>
+              <a:t>outlive</a:t>
             </a:r>
             <a:endParaRPr lang="en-US" sz="2800" dirty="0"/>
           </a:p>
@@ -24222,7 +22959,7 @@
                 <a:ea typeface="Trebuchet MS" pitchFamily="34" charset="-122"/>
                 <a:cs typeface="Trebuchet MS" pitchFamily="34" charset="-120"/>
               </a:rPr>
-              <a:t>lively</a:t>
+              <a:t>outlive</a:t>
             </a:r>
             <a:endParaRPr lang="en-US" sz="2800" dirty="0"/>
           </a:p>
@@ -24311,11 +23048,11 @@
             </a:avLst>
           </a:prstGeom>
           <a:solidFill>
-            <a:srgbClr val="CCFBF1"/>
+            <a:srgbClr val="DDD6FE"/>
           </a:solidFill>
           <a:ln w="19050">
             <a:solidFill>
-              <a:srgbClr val="0D9488"/>
+              <a:srgbClr val="7C3AED"/>
             </a:solidFill>
             <a:prstDash val="solid"/>
           </a:ln>
@@ -24355,13 +23092,13 @@
             <a:r>
               <a:rPr lang="en-US" sz="1300" b="1" dirty="0">
                 <a:solidFill>
-                  <a:srgbClr val="0F766E"/>
+                  <a:srgbClr val="4C1D95"/>
                 </a:solidFill>
                 <a:latin typeface="Trebuchet MS" pitchFamily="34" charset="0"/>
                 <a:ea typeface="Trebuchet MS" pitchFamily="34" charset="-122"/>
                 <a:cs typeface="Trebuchet MS" pitchFamily="34" charset="-120"/>
               </a:rPr>
-              <a:t>live</a:t>
+              <a:t>out</a:t>
             </a:r>
             <a:endParaRPr lang="en-US" sz="1300" dirty="0"/>
           </a:p>
@@ -24400,7 +23137,7 @@
                 <a:ea typeface="Calibri" pitchFamily="34" charset="-122"/>
                 <a:cs typeface="Calibri" pitchFamily="34" charset="-120"/>
               </a:rPr>
-              <a:t>to be alive, exist</a:t>
+              <a:t>beyond, surpassing</a:t>
             </a:r>
             <a:endParaRPr lang="en-US" sz="850" dirty="0"/>
           </a:p>
@@ -24423,11 +23160,11 @@
             </a:avLst>
           </a:prstGeom>
           <a:solidFill>
-            <a:srgbClr val="FCE7F3"/>
+            <a:srgbClr val="CCFBF1"/>
           </a:solidFill>
           <a:ln w="19050">
             <a:solidFill>
-              <a:srgbClr val="DB2777"/>
+              <a:srgbClr val="0D9488"/>
             </a:solidFill>
             <a:prstDash val="solid"/>
           </a:ln>
@@ -24467,13 +23204,13 @@
             <a:r>
               <a:rPr lang="en-US" sz="1300" b="1" dirty="0">
                 <a:solidFill>
-                  <a:srgbClr val="9D174D"/>
+                  <a:srgbClr val="0F766E"/>
                 </a:solidFill>
                 <a:latin typeface="Trebuchet MS" pitchFamily="34" charset="0"/>
                 <a:ea typeface="Trebuchet MS" pitchFamily="34" charset="-122"/>
                 <a:cs typeface="Trebuchet MS" pitchFamily="34" charset="-120"/>
               </a:rPr>
-              <a:t>ly</a:t>
+              <a:t>live</a:t>
             </a:r>
             <a:endParaRPr lang="en-US" sz="1300" dirty="0"/>
           </a:p>
@@ -24512,7 +23249,7 @@
                 <a:ea typeface="Calibri" pitchFamily="34" charset="-122"/>
                 <a:cs typeface="Calibri" pitchFamily="34" charset="-120"/>
               </a:rPr>
-              <a:t>in a way that is</a:t>
+              <a:t>to be alive, exist</a:t>
             </a:r>
             <a:endParaRPr lang="en-US" sz="850" dirty="0"/>
           </a:p>
@@ -25926,7 +24663,7 @@
                 <a:ea typeface="Trebuchet MS" pitchFamily="34" charset="-122"/>
                 <a:cs typeface="Trebuchet MS" pitchFamily="34" charset="-120"/>
               </a:rPr>
-              <a:t>lively</a:t>
+              <a:t>outlive</a:t>
             </a:r>
             <a:endParaRPr lang="en-US" sz="2800" dirty="0"/>
           </a:p>
@@ -26015,11 +24752,11 @@
             </a:avLst>
           </a:prstGeom>
           <a:solidFill>
-            <a:srgbClr val="CCFBF1"/>
+            <a:srgbClr val="DDD6FE"/>
           </a:solidFill>
           <a:ln w="19050">
             <a:solidFill>
-              <a:srgbClr val="0D9488"/>
+              <a:srgbClr val="7C3AED"/>
             </a:solidFill>
             <a:prstDash val="solid"/>
           </a:ln>
@@ -26059,13 +24796,13 @@
             <a:r>
               <a:rPr lang="en-US" sz="1300" b="1" dirty="0">
                 <a:solidFill>
-                  <a:srgbClr val="0F766E"/>
+                  <a:srgbClr val="4C1D95"/>
                 </a:solidFill>
                 <a:latin typeface="Trebuchet MS" pitchFamily="34" charset="0"/>
                 <a:ea typeface="Trebuchet MS" pitchFamily="34" charset="-122"/>
                 <a:cs typeface="Trebuchet MS" pitchFamily="34" charset="-120"/>
               </a:rPr>
-              <a:t>live</a:t>
+              <a:t>out</a:t>
             </a:r>
             <a:endParaRPr lang="en-US" sz="1300" dirty="0"/>
           </a:p>
@@ -26104,7 +24841,7 @@
                 <a:ea typeface="Calibri" pitchFamily="34" charset="-122"/>
                 <a:cs typeface="Calibri" pitchFamily="34" charset="-120"/>
               </a:rPr>
-              <a:t>to be alive, exist</a:t>
+              <a:t>beyond, surpassing</a:t>
             </a:r>
             <a:endParaRPr lang="en-US" sz="850" dirty="0"/>
           </a:p>
@@ -26127,11 +24864,11 @@
             </a:avLst>
           </a:prstGeom>
           <a:solidFill>
-            <a:srgbClr val="FCE7F3"/>
+            <a:srgbClr val="CCFBF1"/>
           </a:solidFill>
           <a:ln w="19050">
             <a:solidFill>
-              <a:srgbClr val="DB2777"/>
+              <a:srgbClr val="0D9488"/>
             </a:solidFill>
             <a:prstDash val="solid"/>
           </a:ln>
@@ -26171,13 +24908,13 @@
             <a:r>
               <a:rPr lang="en-US" sz="1300" b="1" dirty="0">
                 <a:solidFill>
-                  <a:srgbClr val="9D174D"/>
+                  <a:srgbClr val="0F766E"/>
                 </a:solidFill>
                 <a:latin typeface="Trebuchet MS" pitchFamily="34" charset="0"/>
                 <a:ea typeface="Trebuchet MS" pitchFamily="34" charset="-122"/>
                 <a:cs typeface="Trebuchet MS" pitchFamily="34" charset="-120"/>
               </a:rPr>
-              <a:t>ly</a:t>
+              <a:t>live</a:t>
             </a:r>
             <a:endParaRPr lang="en-US" sz="1300" dirty="0"/>
           </a:p>
@@ -26216,7 +24953,7 @@
                 <a:ea typeface="Calibri" pitchFamily="34" charset="-122"/>
                 <a:cs typeface="Calibri" pitchFamily="34" charset="-120"/>
               </a:rPr>
-              <a:t>in a way that is</a:t>
+              <a:t>to be alive, exist</a:t>
             </a:r>
             <a:endParaRPr lang="en-US" sz="850" dirty="0"/>
           </a:p>
@@ -26375,7 +25112,7 @@
                 <a:ea typeface="Trebuchet MS" pitchFamily="34" charset="-122"/>
                 <a:cs typeface="Trebuchet MS" pitchFamily="34" charset="-120"/>
               </a:rPr>
-              <a:t>live</a:t>
+              <a:t>out</a:t>
             </a:r>
             <a:endParaRPr lang="en-US" sz="1400" dirty="0"/>
           </a:p>
@@ -26480,7 +25217,7 @@
                 <a:ea typeface="Trebuchet MS" pitchFamily="34" charset="-122"/>
                 <a:cs typeface="Trebuchet MS" pitchFamily="34" charset="-120"/>
               </a:rPr>
-              <a:t>ly</a:t>
+              <a:t>live</a:t>
             </a:r>
             <a:endParaRPr lang="en-US" sz="1400" dirty="0"/>
           </a:p>
@@ -27043,7 +25780,7 @@
                 <a:ea typeface="Trebuchet MS" pitchFamily="34" charset="-122"/>
                 <a:cs typeface="Trebuchet MS" pitchFamily="34" charset="-120"/>
               </a:rPr>
-              <a:t>lively</a:t>
+              <a:t>outlive</a:t>
             </a:r>
             <a:endParaRPr lang="en-US" sz="2800" dirty="0"/>
           </a:p>
@@ -27132,11 +25869,11 @@
             </a:avLst>
           </a:prstGeom>
           <a:solidFill>
-            <a:srgbClr val="CCFBF1"/>
+            <a:srgbClr val="DDD6FE"/>
           </a:solidFill>
           <a:ln w="19050">
             <a:solidFill>
-              <a:srgbClr val="0D9488"/>
+              <a:srgbClr val="7C3AED"/>
             </a:solidFill>
             <a:prstDash val="solid"/>
           </a:ln>
@@ -27176,13 +25913,13 @@
             <a:r>
               <a:rPr lang="en-US" sz="1300" b="1" dirty="0">
                 <a:solidFill>
-                  <a:srgbClr val="0F766E"/>
+                  <a:srgbClr val="4C1D95"/>
                 </a:solidFill>
                 <a:latin typeface="Trebuchet MS" pitchFamily="34" charset="0"/>
                 <a:ea typeface="Trebuchet MS" pitchFamily="34" charset="-122"/>
                 <a:cs typeface="Trebuchet MS" pitchFamily="34" charset="-120"/>
               </a:rPr>
-              <a:t>live</a:t>
+              <a:t>out</a:t>
             </a:r>
             <a:endParaRPr lang="en-US" sz="1300" dirty="0"/>
           </a:p>
@@ -27221,7 +25958,7 @@
                 <a:ea typeface="Calibri" pitchFamily="34" charset="-122"/>
                 <a:cs typeface="Calibri" pitchFamily="34" charset="-120"/>
               </a:rPr>
-              <a:t>to be alive, exist</a:t>
+              <a:t>beyond, surpassing</a:t>
             </a:r>
             <a:endParaRPr lang="en-US" sz="850" dirty="0"/>
           </a:p>
@@ -27244,11 +25981,11 @@
             </a:avLst>
           </a:prstGeom>
           <a:solidFill>
-            <a:srgbClr val="FCE7F3"/>
+            <a:srgbClr val="CCFBF1"/>
           </a:solidFill>
           <a:ln w="19050">
             <a:solidFill>
-              <a:srgbClr val="DB2777"/>
+              <a:srgbClr val="0D9488"/>
             </a:solidFill>
             <a:prstDash val="solid"/>
           </a:ln>
@@ -27288,13 +26025,13 @@
             <a:r>
               <a:rPr lang="en-US" sz="1300" b="1" dirty="0">
                 <a:solidFill>
-                  <a:srgbClr val="9D174D"/>
+                  <a:srgbClr val="0F766E"/>
                 </a:solidFill>
                 <a:latin typeface="Trebuchet MS" pitchFamily="34" charset="0"/>
                 <a:ea typeface="Trebuchet MS" pitchFamily="34" charset="-122"/>
                 <a:cs typeface="Trebuchet MS" pitchFamily="34" charset="-120"/>
               </a:rPr>
-              <a:t>ly</a:t>
+              <a:t>live</a:t>
             </a:r>
             <a:endParaRPr lang="en-US" sz="1300" dirty="0"/>
           </a:p>
@@ -27333,7 +26070,7 @@
                 <a:ea typeface="Calibri" pitchFamily="34" charset="-122"/>
                 <a:cs typeface="Calibri" pitchFamily="34" charset="-120"/>
               </a:rPr>
-              <a:t>in a way that is</a:t>
+              <a:t>to be alive, exist</a:t>
             </a:r>
             <a:endParaRPr lang="en-US" sz="850" dirty="0"/>
           </a:p>
@@ -27492,7 +26229,7 @@
                 <a:ea typeface="Trebuchet MS" pitchFamily="34" charset="-122"/>
                 <a:cs typeface="Trebuchet MS" pitchFamily="34" charset="-120"/>
               </a:rPr>
-              <a:t>live</a:t>
+              <a:t>out</a:t>
             </a:r>
             <a:endParaRPr lang="en-US" sz="1400" dirty="0"/>
           </a:p>
@@ -27597,7 +26334,7 @@
                 <a:ea typeface="Trebuchet MS" pitchFamily="34" charset="-122"/>
                 <a:cs typeface="Trebuchet MS" pitchFamily="34" charset="-120"/>
               </a:rPr>
-              <a:t>ly</a:t>
+              <a:t>live</a:t>
             </a:r>
             <a:endParaRPr lang="en-US" sz="1400" dirty="0"/>
           </a:p>
@@ -27756,7 +26493,7 @@
                 <a:ea typeface="Trebuchet MS" pitchFamily="34" charset="-122"/>
                 <a:cs typeface="Trebuchet MS" pitchFamily="34" charset="-120"/>
               </a:rPr>
-              <a:t>l</a:t>
+              <a:t>ou</a:t>
             </a:r>
             <a:endParaRPr lang="en-US" sz="900" dirty="0"/>
           </a:p>
@@ -27822,7 +26559,7 @@
                 <a:ea typeface="Trebuchet MS" pitchFamily="34" charset="-122"/>
                 <a:cs typeface="Trebuchet MS" pitchFamily="34" charset="-120"/>
               </a:rPr>
-              <a:t>i</a:t>
+              <a:t>t</a:t>
             </a:r>
             <a:endParaRPr lang="en-US" sz="900" dirty="0"/>
           </a:p>
@@ -27888,7 +26625,7 @@
                 <a:ea typeface="Trebuchet MS" pitchFamily="34" charset="-122"/>
                 <a:cs typeface="Trebuchet MS" pitchFamily="34" charset="-120"/>
               </a:rPr>
-              <a:t>v</a:t>
+              <a:t>l</a:t>
             </a:r>
             <a:endParaRPr lang="en-US" sz="900" dirty="0"/>
           </a:p>
@@ -27954,7 +26691,7 @@
                 <a:ea typeface="Trebuchet MS" pitchFamily="34" charset="-122"/>
                 <a:cs typeface="Trebuchet MS" pitchFamily="34" charset="-120"/>
               </a:rPr>
-              <a:t>e</a:t>
+              <a:t>i</a:t>
             </a:r>
             <a:endParaRPr lang="en-US" sz="900" dirty="0"/>
           </a:p>
@@ -28020,7 +26757,7 @@
                 <a:ea typeface="Trebuchet MS" pitchFamily="34" charset="-122"/>
                 <a:cs typeface="Trebuchet MS" pitchFamily="34" charset="-120"/>
               </a:rPr>
-              <a:t>l</a:t>
+              <a:t>v</a:t>
             </a:r>
             <a:endParaRPr lang="en-US" sz="900" dirty="0"/>
           </a:p>
@@ -28086,7 +26823,7 @@
                 <a:ea typeface="Trebuchet MS" pitchFamily="34" charset="-122"/>
                 <a:cs typeface="Trebuchet MS" pitchFamily="34" charset="-120"/>
               </a:rPr>
-              <a:t>y</a:t>
+              <a:t>e</a:t>
             </a:r>
             <a:endParaRPr lang="en-US" sz="900" dirty="0"/>
           </a:p>
@@ -29634,7 +28371,7 @@
                 <a:ea typeface="Calibri" pitchFamily="34" charset="-122"/>
                 <a:cs typeface="Calibri" pitchFamily="34" charset="-120"/>
               </a:rPr>
-              <a:t>connecting form</a:t>
+              <a:t>connecting vowel</a:t>
             </a:r>
             <a:endParaRPr lang="en-US" sz="850" dirty="0"/>
           </a:p>
@@ -29642,7 +28379,46 @@
       </p:sp>
       <p:sp>
         <p:nvSpPr>
-          <p:cNvPr id="22" name="Shape 20"/>
+          <p:cNvPr id="22" name="Text 20"/>
+          <p:cNvSpPr/>
+          <p:nvPr/>
+        </p:nvSpPr>
+        <p:spPr>
+          <a:xfrm>
+            <a:off x="4370832" y="2752344"/>
+            <a:ext cx="1828800" cy="182880"/>
+          </a:xfrm>
+          <a:prstGeom prst="rect">
+            <a:avLst/>
+          </a:prstGeom>
+          <a:noFill/>
+          <a:ln/>
+        </p:spPr>
+        <p:txBody>
+          <a:bodyPr wrap="square" lIns="0" tIns="0" rIns="0" bIns="0" rtlCol="0" anchor="t"/>
+          <a:lstStyle/>
+          <a:p>
+            <a:pPr algn="ctr" indent="0" marL="0">
+              <a:buNone/>
+            </a:pPr>
+            <a:r>
+              <a:rPr lang="en-US" sz="700" i="1" dirty="0">
+                <a:solidFill>
+                  <a:srgbClr val="94A3B8"/>
+                </a:solidFill>
+                <a:latin typeface="Calibri" pitchFamily="34" charset="0"/>
+                <a:ea typeface="Calibri" pitchFamily="34" charset="-122"/>
+                <a:cs typeface="Calibri" pitchFamily="34" charset="-120"/>
+              </a:rPr>
+              <a:t>links base to suffix</a:t>
+            </a:r>
+            <a:endParaRPr lang="en-US" sz="700" dirty="0"/>
+          </a:p>
+        </p:txBody>
+      </p:sp>
+      <p:sp>
+        <p:nvSpPr>
+          <p:cNvPr id="23" name="Shape 21"/>
           <p:cNvSpPr/>
           <p:nvPr/>
         </p:nvSpPr>
@@ -29676,7 +28452,7 @@
       </p:sp>
       <p:sp>
         <p:nvSpPr>
-          <p:cNvPr id="23" name="Text 21"/>
+          <p:cNvPr id="24" name="Text 22"/>
           <p:cNvSpPr/>
           <p:nvPr/>
         </p:nvSpPr>
@@ -29715,7 +28491,7 @@
       </p:sp>
       <p:sp>
         <p:nvSpPr>
-          <p:cNvPr id="24" name="Text 22"/>
+          <p:cNvPr id="25" name="Text 23"/>
           <p:cNvSpPr/>
           <p:nvPr/>
         </p:nvSpPr>
@@ -29754,7 +28530,7 @@
       </p:sp>
       <p:sp>
         <p:nvSpPr>
-          <p:cNvPr id="25" name="Shape 23"/>
+          <p:cNvPr id="26" name="Shape 24"/>
           <p:cNvSpPr/>
           <p:nvPr/>
         </p:nvSpPr>
@@ -29781,7 +28557,7 @@
       </p:sp>
       <p:sp>
         <p:nvSpPr>
-          <p:cNvPr id="26" name="Text 24"/>
+          <p:cNvPr id="27" name="Text 25"/>
           <p:cNvSpPr/>
           <p:nvPr/>
         </p:nvSpPr>
@@ -29820,7 +28596,7 @@
       </p:sp>
       <p:sp>
         <p:nvSpPr>
-          <p:cNvPr id="27" name="Shape 25"/>
+          <p:cNvPr id="28" name="Shape 26"/>
           <p:cNvSpPr/>
           <p:nvPr/>
         </p:nvSpPr>
@@ -29847,7 +28623,7 @@
       </p:sp>
       <p:sp>
         <p:nvSpPr>
-          <p:cNvPr id="28" name="Text 26"/>
+          <p:cNvPr id="29" name="Text 27"/>
           <p:cNvSpPr/>
           <p:nvPr/>
         </p:nvSpPr>
@@ -29886,7 +28662,7 @@
       </p:sp>
       <p:sp>
         <p:nvSpPr>
-          <p:cNvPr id="29" name="Shape 27"/>
+          <p:cNvPr id="30" name="Shape 28"/>
           <p:cNvSpPr/>
           <p:nvPr/>
         </p:nvSpPr>
@@ -29913,7 +28689,7 @@
       </p:sp>
       <p:sp>
         <p:nvSpPr>
-          <p:cNvPr id="30" name="Text 28"/>
+          <p:cNvPr id="31" name="Text 29"/>
           <p:cNvSpPr/>
           <p:nvPr/>
         </p:nvSpPr>
@@ -29952,7 +28728,7 @@
       </p:sp>
       <p:sp>
         <p:nvSpPr>
-          <p:cNvPr id="31" name="Shape 29"/>
+          <p:cNvPr id="32" name="Shape 30"/>
           <p:cNvSpPr/>
           <p:nvPr/>
         </p:nvSpPr>
@@ -29979,7 +28755,7 @@
       </p:sp>
       <p:sp>
         <p:nvSpPr>
-          <p:cNvPr id="32" name="Text 30"/>
+          <p:cNvPr id="33" name="Text 31"/>
           <p:cNvSpPr/>
           <p:nvPr/>
         </p:nvSpPr>
@@ -30731,7 +29507,7 @@
                 <a:ea typeface="Calibri" pitchFamily="34" charset="-122"/>
                 <a:cs typeface="Calibri" pitchFamily="34" charset="-120"/>
               </a:rPr>
-              <a:t>connecting form</a:t>
+              <a:t>connecting vowel</a:t>
             </a:r>
             <a:endParaRPr lang="en-US" sz="850" dirty="0"/>
           </a:p>
@@ -30739,7 +29515,46 @@
       </p:sp>
       <p:sp>
         <p:nvSpPr>
-          <p:cNvPr id="22" name="Shape 20"/>
+          <p:cNvPr id="22" name="Text 20"/>
+          <p:cNvSpPr/>
+          <p:nvPr/>
+        </p:nvSpPr>
+        <p:spPr>
+          <a:xfrm>
+            <a:off x="4370832" y="2752344"/>
+            <a:ext cx="1828800" cy="182880"/>
+          </a:xfrm>
+          <a:prstGeom prst="rect">
+            <a:avLst/>
+          </a:prstGeom>
+          <a:noFill/>
+          <a:ln/>
+        </p:spPr>
+        <p:txBody>
+          <a:bodyPr wrap="square" lIns="0" tIns="0" rIns="0" bIns="0" rtlCol="0" anchor="t"/>
+          <a:lstStyle/>
+          <a:p>
+            <a:pPr algn="ctr" indent="0" marL="0">
+              <a:buNone/>
+            </a:pPr>
+            <a:r>
+              <a:rPr lang="en-US" sz="700" i="1" dirty="0">
+                <a:solidFill>
+                  <a:srgbClr val="94A3B8"/>
+                </a:solidFill>
+                <a:latin typeface="Calibri" pitchFamily="34" charset="0"/>
+                <a:ea typeface="Calibri" pitchFamily="34" charset="-122"/>
+                <a:cs typeface="Calibri" pitchFamily="34" charset="-120"/>
+              </a:rPr>
+              <a:t>links base to suffix</a:t>
+            </a:r>
+            <a:endParaRPr lang="en-US" sz="700" dirty="0"/>
+          </a:p>
+        </p:txBody>
+      </p:sp>
+      <p:sp>
+        <p:nvSpPr>
+          <p:cNvPr id="23" name="Shape 21"/>
           <p:cNvSpPr/>
           <p:nvPr/>
         </p:nvSpPr>
@@ -30773,7 +29588,7 @@
       </p:sp>
       <p:sp>
         <p:nvSpPr>
-          <p:cNvPr id="23" name="Text 21"/>
+          <p:cNvPr id="24" name="Text 22"/>
           <p:cNvSpPr/>
           <p:nvPr/>
         </p:nvSpPr>
@@ -30812,7 +29627,7 @@
       </p:sp>
       <p:sp>
         <p:nvSpPr>
-          <p:cNvPr id="24" name="Text 22"/>
+          <p:cNvPr id="25" name="Text 23"/>
           <p:cNvSpPr/>
           <p:nvPr/>
         </p:nvSpPr>
@@ -30851,7 +29666,7 @@
       </p:sp>
       <p:sp>
         <p:nvSpPr>
-          <p:cNvPr id="25" name="Shape 23"/>
+          <p:cNvPr id="26" name="Shape 24"/>
           <p:cNvSpPr/>
           <p:nvPr/>
         </p:nvSpPr>
@@ -30878,7 +29693,7 @@
       </p:sp>
       <p:sp>
         <p:nvSpPr>
-          <p:cNvPr id="26" name="Text 24"/>
+          <p:cNvPr id="27" name="Text 25"/>
           <p:cNvSpPr/>
           <p:nvPr/>
         </p:nvSpPr>
@@ -30917,7 +29732,7 @@
       </p:sp>
       <p:sp>
         <p:nvSpPr>
-          <p:cNvPr id="27" name="Shape 25"/>
+          <p:cNvPr id="28" name="Shape 26"/>
           <p:cNvSpPr/>
           <p:nvPr/>
         </p:nvSpPr>
@@ -30944,7 +29759,7 @@
       </p:sp>
       <p:sp>
         <p:nvSpPr>
-          <p:cNvPr id="28" name="Shape 26"/>
+          <p:cNvPr id="29" name="Shape 27"/>
           <p:cNvSpPr/>
           <p:nvPr/>
         </p:nvSpPr>
@@ -30971,7 +29786,7 @@
       </p:sp>
       <p:sp>
         <p:nvSpPr>
-          <p:cNvPr id="29" name="Text 27"/>
+          <p:cNvPr id="30" name="Text 28"/>
           <p:cNvSpPr/>
           <p:nvPr/>
         </p:nvSpPr>
@@ -31010,7 +29825,7 @@
       </p:sp>
       <p:sp>
         <p:nvSpPr>
-          <p:cNvPr id="30" name="Text 28"/>
+          <p:cNvPr id="31" name="Text 29"/>
           <p:cNvSpPr/>
           <p:nvPr/>
         </p:nvSpPr>
@@ -31049,7 +29864,7 @@
       </p:sp>
       <p:sp>
         <p:nvSpPr>
-          <p:cNvPr id="31" name="Shape 29"/>
+          <p:cNvPr id="32" name="Shape 30"/>
           <p:cNvSpPr/>
           <p:nvPr/>
         </p:nvSpPr>
@@ -31076,7 +29891,7 @@
       </p:sp>
       <p:sp>
         <p:nvSpPr>
-          <p:cNvPr id="32" name="Text 30"/>
+          <p:cNvPr id="33" name="Text 31"/>
           <p:cNvSpPr/>
           <p:nvPr/>
         </p:nvSpPr>
@@ -31115,7 +29930,7 @@
       </p:sp>
       <p:sp>
         <p:nvSpPr>
-          <p:cNvPr id="33" name="Text 31"/>
+          <p:cNvPr id="34" name="Text 32"/>
           <p:cNvSpPr/>
           <p:nvPr/>
         </p:nvSpPr>
@@ -31154,7 +29969,7 @@
       </p:sp>
       <p:sp>
         <p:nvSpPr>
-          <p:cNvPr id="34" name="Shape 32"/>
+          <p:cNvPr id="35" name="Shape 33"/>
           <p:cNvSpPr/>
           <p:nvPr/>
         </p:nvSpPr>
@@ -31181,7 +29996,7 @@
       </p:sp>
       <p:sp>
         <p:nvSpPr>
-          <p:cNvPr id="35" name="Text 33"/>
+          <p:cNvPr id="36" name="Text 34"/>
           <p:cNvSpPr/>
           <p:nvPr/>
         </p:nvSpPr>
@@ -31220,7 +30035,7 @@
       </p:sp>
       <p:sp>
         <p:nvSpPr>
-          <p:cNvPr id="36" name="Shape 34"/>
+          <p:cNvPr id="37" name="Shape 35"/>
           <p:cNvSpPr/>
           <p:nvPr/>
         </p:nvSpPr>
@@ -31247,7 +30062,7 @@
       </p:sp>
       <p:sp>
         <p:nvSpPr>
-          <p:cNvPr id="37" name="Text 35"/>
+          <p:cNvPr id="38" name="Text 36"/>
           <p:cNvSpPr/>
           <p:nvPr/>
         </p:nvSpPr>
@@ -31286,7 +30101,7 @@
       </p:sp>
       <p:sp>
         <p:nvSpPr>
-          <p:cNvPr id="38" name="Shape 36"/>
+          <p:cNvPr id="39" name="Shape 37"/>
           <p:cNvSpPr/>
           <p:nvPr/>
         </p:nvSpPr>
@@ -31313,7 +30128,7 @@
       </p:sp>
       <p:sp>
         <p:nvSpPr>
-          <p:cNvPr id="39" name="Text 37"/>
+          <p:cNvPr id="40" name="Text 38"/>
           <p:cNvSpPr/>
           <p:nvPr/>
         </p:nvSpPr>
@@ -32065,7 +30880,7 @@
                 <a:ea typeface="Calibri" pitchFamily="34" charset="-122"/>
                 <a:cs typeface="Calibri" pitchFamily="34" charset="-120"/>
               </a:rPr>
-              <a:t>connecting form</a:t>
+              <a:t>connecting vowel</a:t>
             </a:r>
             <a:endParaRPr lang="en-US" sz="850" dirty="0"/>
           </a:p>
@@ -32073,7 +30888,46 @@
       </p:sp>
       <p:sp>
         <p:nvSpPr>
-          <p:cNvPr id="22" name="Shape 20"/>
+          <p:cNvPr id="22" name="Text 20"/>
+          <p:cNvSpPr/>
+          <p:nvPr/>
+        </p:nvSpPr>
+        <p:spPr>
+          <a:xfrm>
+            <a:off x="4370832" y="2752344"/>
+            <a:ext cx="1828800" cy="182880"/>
+          </a:xfrm>
+          <a:prstGeom prst="rect">
+            <a:avLst/>
+          </a:prstGeom>
+          <a:noFill/>
+          <a:ln/>
+        </p:spPr>
+        <p:txBody>
+          <a:bodyPr wrap="square" lIns="0" tIns="0" rIns="0" bIns="0" rtlCol="0" anchor="t"/>
+          <a:lstStyle/>
+          <a:p>
+            <a:pPr algn="ctr" indent="0" marL="0">
+              <a:buNone/>
+            </a:pPr>
+            <a:r>
+              <a:rPr lang="en-US" sz="700" i="1" dirty="0">
+                <a:solidFill>
+                  <a:srgbClr val="94A3B8"/>
+                </a:solidFill>
+                <a:latin typeface="Calibri" pitchFamily="34" charset="0"/>
+                <a:ea typeface="Calibri" pitchFamily="34" charset="-122"/>
+                <a:cs typeface="Calibri" pitchFamily="34" charset="-120"/>
+              </a:rPr>
+              <a:t>links base to suffix</a:t>
+            </a:r>
+            <a:endParaRPr lang="en-US" sz="700" dirty="0"/>
+          </a:p>
+        </p:txBody>
+      </p:sp>
+      <p:sp>
+        <p:nvSpPr>
+          <p:cNvPr id="23" name="Shape 21"/>
           <p:cNvSpPr/>
           <p:nvPr/>
         </p:nvSpPr>
@@ -32107,7 +30961,7 @@
       </p:sp>
       <p:sp>
         <p:nvSpPr>
-          <p:cNvPr id="23" name="Text 21"/>
+          <p:cNvPr id="24" name="Text 22"/>
           <p:cNvSpPr/>
           <p:nvPr/>
         </p:nvSpPr>
@@ -32146,7 +31000,7 @@
       </p:sp>
       <p:sp>
         <p:nvSpPr>
-          <p:cNvPr id="24" name="Text 22"/>
+          <p:cNvPr id="25" name="Text 23"/>
           <p:cNvSpPr/>
           <p:nvPr/>
         </p:nvSpPr>
@@ -32185,7 +31039,7 @@
       </p:sp>
       <p:sp>
         <p:nvSpPr>
-          <p:cNvPr id="25" name="Shape 23"/>
+          <p:cNvPr id="26" name="Shape 24"/>
           <p:cNvSpPr/>
           <p:nvPr/>
         </p:nvSpPr>
@@ -32212,7 +31066,7 @@
       </p:sp>
       <p:sp>
         <p:nvSpPr>
-          <p:cNvPr id="26" name="Text 24"/>
+          <p:cNvPr id="27" name="Text 25"/>
           <p:cNvSpPr/>
           <p:nvPr/>
         </p:nvSpPr>
@@ -32251,7 +31105,7 @@
       </p:sp>
       <p:sp>
         <p:nvSpPr>
-          <p:cNvPr id="27" name="Shape 25"/>
+          <p:cNvPr id="28" name="Shape 26"/>
           <p:cNvSpPr/>
           <p:nvPr/>
         </p:nvSpPr>
@@ -32278,7 +31132,7 @@
       </p:sp>
       <p:sp>
         <p:nvSpPr>
-          <p:cNvPr id="28" name="Shape 26"/>
+          <p:cNvPr id="29" name="Shape 27"/>
           <p:cNvSpPr/>
           <p:nvPr/>
         </p:nvSpPr>
@@ -32305,7 +31159,7 @@
       </p:sp>
       <p:sp>
         <p:nvSpPr>
-          <p:cNvPr id="29" name="Text 27"/>
+          <p:cNvPr id="30" name="Text 28"/>
           <p:cNvSpPr/>
           <p:nvPr/>
         </p:nvSpPr>
@@ -32344,7 +31198,7 @@
       </p:sp>
       <p:sp>
         <p:nvSpPr>
-          <p:cNvPr id="30" name="Text 28"/>
+          <p:cNvPr id="31" name="Text 29"/>
           <p:cNvSpPr/>
           <p:nvPr/>
         </p:nvSpPr>
@@ -32383,7 +31237,7 @@
       </p:sp>
       <p:sp>
         <p:nvSpPr>
-          <p:cNvPr id="31" name="Shape 29"/>
+          <p:cNvPr id="32" name="Shape 30"/>
           <p:cNvSpPr/>
           <p:nvPr/>
         </p:nvSpPr>
@@ -32410,7 +31264,7 @@
       </p:sp>
       <p:sp>
         <p:nvSpPr>
-          <p:cNvPr id="32" name="Text 30"/>
+          <p:cNvPr id="33" name="Text 31"/>
           <p:cNvSpPr/>
           <p:nvPr/>
         </p:nvSpPr>
@@ -32449,7 +31303,7 @@
       </p:sp>
       <p:sp>
         <p:nvSpPr>
-          <p:cNvPr id="33" name="Text 31"/>
+          <p:cNvPr id="34" name="Text 32"/>
           <p:cNvSpPr/>
           <p:nvPr/>
         </p:nvSpPr>
@@ -32488,7 +31342,7 @@
       </p:sp>
       <p:sp>
         <p:nvSpPr>
-          <p:cNvPr id="34" name="Shape 32"/>
+          <p:cNvPr id="35" name="Shape 33"/>
           <p:cNvSpPr/>
           <p:nvPr/>
         </p:nvSpPr>
@@ -32515,7 +31369,7 @@
       </p:sp>
       <p:sp>
         <p:nvSpPr>
-          <p:cNvPr id="35" name="Text 33"/>
+          <p:cNvPr id="36" name="Text 34"/>
           <p:cNvSpPr/>
           <p:nvPr/>
         </p:nvSpPr>
@@ -32554,7 +31408,7 @@
       </p:sp>
       <p:sp>
         <p:nvSpPr>
-          <p:cNvPr id="36" name="Shape 34"/>
+          <p:cNvPr id="37" name="Shape 35"/>
           <p:cNvSpPr/>
           <p:nvPr/>
         </p:nvSpPr>
@@ -32581,7 +31435,7 @@
       </p:sp>
       <p:sp>
         <p:nvSpPr>
-          <p:cNvPr id="37" name="Text 35"/>
+          <p:cNvPr id="38" name="Text 36"/>
           <p:cNvSpPr/>
           <p:nvPr/>
         </p:nvSpPr>
@@ -32620,7 +31474,7 @@
       </p:sp>
       <p:sp>
         <p:nvSpPr>
-          <p:cNvPr id="38" name="Shape 36"/>
+          <p:cNvPr id="39" name="Shape 37"/>
           <p:cNvSpPr/>
           <p:nvPr/>
         </p:nvSpPr>
@@ -32647,7 +31501,7 @@
       </p:sp>
       <p:sp>
         <p:nvSpPr>
-          <p:cNvPr id="39" name="Shape 37"/>
+          <p:cNvPr id="40" name="Shape 38"/>
           <p:cNvSpPr/>
           <p:nvPr/>
         </p:nvSpPr>
@@ -32674,7 +31528,7 @@
       </p:sp>
       <p:sp>
         <p:nvSpPr>
-          <p:cNvPr id="40" name="Text 38"/>
+          <p:cNvPr id="41" name="Text 39"/>
           <p:cNvSpPr/>
           <p:nvPr/>
         </p:nvSpPr>
@@ -32713,7 +31567,7 @@
       </p:sp>
       <p:sp>
         <p:nvSpPr>
-          <p:cNvPr id="41" name="Shape 39"/>
+          <p:cNvPr id="42" name="Shape 40"/>
           <p:cNvSpPr/>
           <p:nvPr/>
         </p:nvSpPr>
@@ -32740,7 +31594,7 @@
       </p:sp>
       <p:sp>
         <p:nvSpPr>
-          <p:cNvPr id="42" name="Text 40"/>
+          <p:cNvPr id="43" name="Text 41"/>
           <p:cNvSpPr/>
           <p:nvPr/>
         </p:nvSpPr>
@@ -32779,7 +31633,7 @@
       </p:sp>
       <p:sp>
         <p:nvSpPr>
-          <p:cNvPr id="43" name="Shape 41"/>
+          <p:cNvPr id="44" name="Shape 42"/>
           <p:cNvSpPr/>
           <p:nvPr/>
         </p:nvSpPr>
@@ -32806,7 +31660,7 @@
       </p:sp>
       <p:sp>
         <p:nvSpPr>
-          <p:cNvPr id="44" name="Text 42"/>
+          <p:cNvPr id="45" name="Text 43"/>
           <p:cNvSpPr/>
           <p:nvPr/>
         </p:nvSpPr>
@@ -32845,7 +31699,7 @@
       </p:sp>
       <p:sp>
         <p:nvSpPr>
-          <p:cNvPr id="45" name="Shape 43"/>
+          <p:cNvPr id="46" name="Shape 44"/>
           <p:cNvSpPr/>
           <p:nvPr/>
         </p:nvSpPr>
@@ -32872,7 +31726,7 @@
       </p:sp>
       <p:sp>
         <p:nvSpPr>
-          <p:cNvPr id="46" name="Text 44"/>
+          <p:cNvPr id="47" name="Text 45"/>
           <p:cNvSpPr/>
           <p:nvPr/>
         </p:nvSpPr>
@@ -32911,7 +31765,7 @@
       </p:sp>
       <p:sp>
         <p:nvSpPr>
-          <p:cNvPr id="47" name="Shape 45"/>
+          <p:cNvPr id="48" name="Shape 46"/>
           <p:cNvSpPr/>
           <p:nvPr/>
         </p:nvSpPr>
@@ -32938,7 +31792,7 @@
       </p:sp>
       <p:sp>
         <p:nvSpPr>
-          <p:cNvPr id="48" name="Text 46"/>
+          <p:cNvPr id="49" name="Text 47"/>
           <p:cNvSpPr/>
           <p:nvPr/>
         </p:nvSpPr>
@@ -32977,7 +31831,7 @@
       </p:sp>
       <p:sp>
         <p:nvSpPr>
-          <p:cNvPr id="49" name="Shape 47"/>
+          <p:cNvPr id="50" name="Shape 48"/>
           <p:cNvSpPr/>
           <p:nvPr/>
         </p:nvSpPr>
@@ -33004,7 +31858,7 @@
       </p:sp>
       <p:sp>
         <p:nvSpPr>
-          <p:cNvPr id="50" name="Text 48"/>
+          <p:cNvPr id="51" name="Text 49"/>
           <p:cNvSpPr/>
           <p:nvPr/>
         </p:nvSpPr>
@@ -33043,7 +31897,7 @@
       </p:sp>
       <p:sp>
         <p:nvSpPr>
-          <p:cNvPr id="51" name="Shape 49"/>
+          <p:cNvPr id="52" name="Shape 50"/>
           <p:cNvSpPr/>
           <p:nvPr/>
         </p:nvSpPr>
@@ -33070,7 +31924,7 @@
       </p:sp>
       <p:sp>
         <p:nvSpPr>
-          <p:cNvPr id="52" name="Text 50"/>
+          <p:cNvPr id="53" name="Text 51"/>
           <p:cNvSpPr/>
           <p:nvPr/>
         </p:nvSpPr>
@@ -33109,7 +31963,7 @@
       </p:sp>
       <p:sp>
         <p:nvSpPr>
-          <p:cNvPr id="53" name="Shape 51"/>
+          <p:cNvPr id="54" name="Shape 52"/>
           <p:cNvSpPr/>
           <p:nvPr/>
         </p:nvSpPr>
@@ -33136,7 +31990,7 @@
       </p:sp>
       <p:sp>
         <p:nvSpPr>
-          <p:cNvPr id="54" name="Text 52"/>
+          <p:cNvPr id="55" name="Text 53"/>
           <p:cNvSpPr/>
           <p:nvPr/>
         </p:nvSpPr>
@@ -33175,7 +32029,7 @@
       </p:sp>
       <p:sp>
         <p:nvSpPr>
-          <p:cNvPr id="55" name="Shape 53"/>
+          <p:cNvPr id="56" name="Shape 54"/>
           <p:cNvSpPr/>
           <p:nvPr/>
         </p:nvSpPr>
@@ -33202,7 +32056,7 @@
       </p:sp>
       <p:sp>
         <p:nvSpPr>
-          <p:cNvPr id="56" name="Text 54"/>
+          <p:cNvPr id="57" name="Text 55"/>
           <p:cNvSpPr/>
           <p:nvPr/>
         </p:nvSpPr>
@@ -35187,7 +34041,7 @@
                 <a:ea typeface="Trebuchet MS" pitchFamily="34" charset="-122"/>
                 <a:cs typeface="Trebuchet MS" pitchFamily="34" charset="-120"/>
               </a:rPr>
-              <a:t>out-</a:t>
+              <a:t>re-</a:t>
             </a:r>
             <a:endParaRPr lang="en-US" sz="1300" dirty="0"/>
           </a:p>
@@ -35276,7 +34130,7 @@
                 <a:ea typeface="Trebuchet MS" pitchFamily="34" charset="-122"/>
                 <a:cs typeface="Trebuchet MS" pitchFamily="34" charset="-120"/>
               </a:rPr>
-              <a:t>-ed</a:t>
+              <a:t>-d</a:t>
             </a:r>
             <a:endParaRPr lang="en-US" sz="1300" dirty="0"/>
           </a:p>
@@ -35340,7 +34194,7 @@
                 <a:ea typeface="Trebuchet MS" pitchFamily="34" charset="-122"/>
                 <a:cs typeface="Trebuchet MS" pitchFamily="34" charset="-120"/>
               </a:rPr>
-              <a:t>re-</a:t>
+              <a:t>out-</a:t>
             </a:r>
             <a:endParaRPr lang="en-US" sz="1300" dirty="0"/>
           </a:p>
@@ -35493,7 +34347,7 @@
                 <a:ea typeface="Trebuchet MS" pitchFamily="34" charset="-122"/>
                 <a:cs typeface="Trebuchet MS" pitchFamily="34" charset="-120"/>
               </a:rPr>
-              <a:t>up-</a:t>
+              <a:t>for-</a:t>
             </a:r>
             <a:endParaRPr lang="en-US" sz="1300" dirty="0"/>
           </a:p>
@@ -35582,7 +34436,7 @@
                 <a:ea typeface="Trebuchet MS" pitchFamily="34" charset="-122"/>
                 <a:cs typeface="Trebuchet MS" pitchFamily="34" charset="-120"/>
               </a:rPr>
-              <a:t>-lihood</a:t>
+              <a:t>-r</a:t>
             </a:r>
             <a:endParaRPr lang="en-US" sz="1300" dirty="0"/>
           </a:p>
@@ -35646,7 +34500,7 @@
                 <a:ea typeface="Trebuchet MS" pitchFamily="34" charset="-122"/>
                 <a:cs typeface="Trebuchet MS" pitchFamily="34" charset="-120"/>
               </a:rPr>
-              <a:t>long-</a:t>
+              <a:t>be-</a:t>
             </a:r>
             <a:endParaRPr lang="en-US" sz="1300" dirty="0"/>
           </a:p>
@@ -35735,7 +34589,7 @@
                 <a:ea typeface="Trebuchet MS" pitchFamily="34" charset="-122"/>
                 <a:cs typeface="Trebuchet MS" pitchFamily="34" charset="-120"/>
               </a:rPr>
-              <a:t>-stock</a:t>
+              <a:t>-lihood</a:t>
             </a:r>
             <a:endParaRPr lang="en-US" sz="1300" dirty="0"/>
           </a:p>
@@ -35906,7 +34760,7 @@
                 <a:ea typeface="Trebuchet MS" pitchFamily="34" charset="-122"/>
                 <a:cs typeface="Trebuchet MS" pitchFamily="34" charset="-120"/>
               </a:rPr>
-              <a:t>lively</a:t>
+              <a:t>relive</a:t>
             </a:r>
             <a:endParaRPr lang="en-US" sz="1200" dirty="0"/>
           </a:p>
@@ -35972,7 +34826,7 @@
                 <a:ea typeface="Trebuchet MS" pitchFamily="34" charset="-122"/>
                 <a:cs typeface="Trebuchet MS" pitchFamily="34" charset="-120"/>
               </a:rPr>
-              <a:t>outlive</a:t>
+              <a:t>lively</a:t>
             </a:r>
             <a:endParaRPr lang="en-US" sz="1200" dirty="0"/>
           </a:p>
@@ -36038,7 +34892,7 @@
                 <a:ea typeface="Trebuchet MS" pitchFamily="34" charset="-122"/>
                 <a:cs typeface="Trebuchet MS" pitchFamily="34" charset="-120"/>
               </a:rPr>
-              <a:t>relive</a:t>
+              <a:t>outlive</a:t>
             </a:r>
             <a:endParaRPr lang="en-US" sz="1200" dirty="0"/>
           </a:p>
@@ -36170,7 +35024,7 @@
                 <a:ea typeface="Trebuchet MS" pitchFamily="34" charset="-122"/>
                 <a:cs typeface="Trebuchet MS" pitchFamily="34" charset="-120"/>
               </a:rPr>
-              <a:t>livestock</a:t>
+              <a:t>liver</a:t>
             </a:r>
             <a:endParaRPr lang="en-US" sz="1200" dirty="0"/>
           </a:p>
@@ -36236,7 +35090,7 @@
                 <a:ea typeface="Trebuchet MS" pitchFamily="34" charset="-122"/>
                 <a:cs typeface="Trebuchet MS" pitchFamily="34" charset="-120"/>
               </a:rPr>
-              <a:t>uplive</a:t>
+              <a:t>forlive</a:t>
             </a:r>
             <a:endParaRPr lang="en-US" sz="1200" dirty="0"/>
           </a:p>
@@ -37490,7 +36344,7 @@
                 <a:ea typeface="Calibri" pitchFamily="34" charset="-122"/>
                 <a:cs typeface="Calibri" pitchFamily="34" charset="-120"/>
               </a:rPr>
-              <a:t>1.  The root 'live' relates to being alive or existing.</a:t>
+              <a:t>1.  The word 'outlive' means to die before someone else.</a:t>
             </a:r>
             <a:endParaRPr lang="en-US" sz="1300" dirty="0"/>
           </a:p>
@@ -37513,11 +36367,11 @@
             </a:avLst>
           </a:prstGeom>
           <a:solidFill>
-            <a:srgbClr val="DCFCE7"/>
-          </a:solidFill>
-          <a:ln w="12700">
-            <a:solidFill>
-              <a:srgbClr val="16A34A"/>
+            <a:srgbClr val="FEE2E2"/>
+          </a:solidFill>
+          <a:ln w="12700">
+            <a:solidFill>
+              <a:srgbClr val="DC2626"/>
             </a:solidFill>
             <a:prstDash val="solid"/>
           </a:ln>
@@ -37550,13 +36404,13 @@
             <a:r>
               <a:rPr lang="en-US" sz="1100" b="1" dirty="0">
                 <a:solidFill>
-                  <a:srgbClr val="16A34A"/>
+                  <a:srgbClr val="DC2626"/>
                 </a:solidFill>
                 <a:latin typeface="Trebuchet MS" pitchFamily="34" charset="0"/>
                 <a:ea typeface="Trebuchet MS" pitchFamily="34" charset="-122"/>
                 <a:cs typeface="Trebuchet MS" pitchFamily="34" charset="-120"/>
               </a:rPr>
-              <a:t>TRUE</a:t>
+              <a:t>FALSE</a:t>
             </a:r>
             <a:endParaRPr lang="en-US" sz="1100" dirty="0"/>
           </a:p>
@@ -37629,7 +36483,7 @@
                 <a:ea typeface="Calibri" pitchFamily="34" charset="-122"/>
                 <a:cs typeface="Calibri" pitchFamily="34" charset="-120"/>
               </a:rPr>
-              <a:t>2.  The word 'livestock' means animals kept in a zoo.</a:t>
+              <a:t>2.  The word 'relive' means to experience something again.</a:t>
             </a:r>
             <a:endParaRPr lang="en-US" sz="1300" dirty="0"/>
           </a:p>
@@ -37652,11 +36506,11 @@
             </a:avLst>
           </a:prstGeom>
           <a:solidFill>
-            <a:srgbClr val="FEE2E2"/>
-          </a:solidFill>
-          <a:ln w="12700">
-            <a:solidFill>
-              <a:srgbClr val="DC2626"/>
+            <a:srgbClr val="DCFCE7"/>
+          </a:solidFill>
+          <a:ln w="12700">
+            <a:solidFill>
+              <a:srgbClr val="16A34A"/>
             </a:solidFill>
             <a:prstDash val="solid"/>
           </a:ln>
@@ -37689,13 +36543,13 @@
             <a:r>
               <a:rPr lang="en-US" sz="1100" b="1" dirty="0">
                 <a:solidFill>
-                  <a:srgbClr val="DC2626"/>
+                  <a:srgbClr val="16A34A"/>
                 </a:solidFill>
                 <a:latin typeface="Trebuchet MS" pitchFamily="34" charset="0"/>
                 <a:ea typeface="Trebuchet MS" pitchFamily="34" charset="-122"/>
                 <a:cs typeface="Trebuchet MS" pitchFamily="34" charset="-120"/>
               </a:rPr>
-              <a:t>FALSE</a:t>
+              <a:t>TRUE</a:t>
             </a:r>
             <a:endParaRPr lang="en-US" sz="1100" dirty="0"/>
           </a:p>
@@ -37768,7 +36622,7 @@
                 <a:ea typeface="Calibri" pitchFamily="34" charset="-122"/>
                 <a:cs typeface="Calibri" pitchFamily="34" charset="-120"/>
               </a:rPr>
-              <a:t>3.  The prefix 'out-' in 'outlive' means to do something more or beyond.</a:t>
+              <a:t>3.  The word 'alive' has the prefix 'al-' meaning all.</a:t>
             </a:r>
             <a:endParaRPr lang="en-US" sz="1300" dirty="0"/>
           </a:p>
@@ -37791,11 +36645,11 @@
             </a:avLst>
           </a:prstGeom>
           <a:solidFill>
-            <a:srgbClr val="DCFCE7"/>
-          </a:solidFill>
-          <a:ln w="12700">
-            <a:solidFill>
-              <a:srgbClr val="16A34A"/>
+            <a:srgbClr val="FEE2E2"/>
+          </a:solidFill>
+          <a:ln w="12700">
+            <a:solidFill>
+              <a:srgbClr val="DC2626"/>
             </a:solidFill>
             <a:prstDash val="solid"/>
           </a:ln>
@@ -37828,13 +36682,13 @@
             <a:r>
               <a:rPr lang="en-US" sz="1100" b="1" dirty="0">
                 <a:solidFill>
-                  <a:srgbClr val="16A34A"/>
+                  <a:srgbClr val="DC2626"/>
                 </a:solidFill>
                 <a:latin typeface="Trebuchet MS" pitchFamily="34" charset="0"/>
                 <a:ea typeface="Trebuchet MS" pitchFamily="34" charset="-122"/>
                 <a:cs typeface="Trebuchet MS" pitchFamily="34" charset="-120"/>
               </a:rPr>
-              <a:t>TRUE</a:t>
+              <a:t>FALSE</a:t>
             </a:r>
             <a:endParaRPr lang="en-US" sz="1100" dirty="0"/>
           </a:p>
@@ -37907,7 +36761,7 @@
                 <a:ea typeface="Calibri" pitchFamily="34" charset="-122"/>
                 <a:cs typeface="Calibri" pitchFamily="34" charset="-120"/>
               </a:rPr>
-              <a:t>4.  The word 'lively' means full of energy and life.</a:t>
+              <a:t>4.  The root 'live' comes from a Latin word meaning to be alive.</a:t>
             </a:r>
             <a:endParaRPr lang="en-US" sz="1300" dirty="0"/>
           </a:p>
@@ -38046,7 +36900,7 @@
                 <a:ea typeface="Calibri" pitchFamily="34" charset="-122"/>
                 <a:cs typeface="Calibri" pitchFamily="34" charset="-120"/>
               </a:rPr>
-              <a:t>5.  The root 'live' comes from a Greek word.</a:t>
+              <a:t>5.  Adding '-ly' to 'live' creates the word 'lively', meaning full of energy.</a:t>
             </a:r>
             <a:endParaRPr lang="en-US" sz="1300" dirty="0"/>
           </a:p>
@@ -38069,11 +36923,11 @@
             </a:avLst>
           </a:prstGeom>
           <a:solidFill>
-            <a:srgbClr val="FEE2E2"/>
-          </a:solidFill>
-          <a:ln w="12700">
-            <a:solidFill>
-              <a:srgbClr val="DC2626"/>
+            <a:srgbClr val="DCFCE7"/>
+          </a:solidFill>
+          <a:ln w="12700">
+            <a:solidFill>
+              <a:srgbClr val="16A34A"/>
             </a:solidFill>
             <a:prstDash val="solid"/>
           </a:ln>
@@ -38106,13 +36960,13 @@
             <a:r>
               <a:rPr lang="en-US" sz="1100" b="1" dirty="0">
                 <a:solidFill>
-                  <a:srgbClr val="DC2626"/>
+                  <a:srgbClr val="16A34A"/>
                 </a:solidFill>
                 <a:latin typeface="Trebuchet MS" pitchFamily="34" charset="0"/>
                 <a:ea typeface="Trebuchet MS" pitchFamily="34" charset="-122"/>
                 <a:cs typeface="Trebuchet MS" pitchFamily="34" charset="-120"/>
               </a:rPr>
-              <a:t>FALSE</a:t>
+              <a:t>TRUE</a:t>
             </a:r>
             <a:endParaRPr lang="en-US" sz="1100" dirty="0"/>
           </a:p>
@@ -38751,7 +37605,7 @@
                 <a:ea typeface="Trebuchet MS" pitchFamily="34" charset="-122"/>
                 <a:cs typeface="Trebuchet MS" pitchFamily="34" charset="-120"/>
               </a:rPr>
-              <a:t>lively</a:t>
+              <a:t>relive</a:t>
             </a:r>
             <a:endParaRPr lang="en-US" sz="1300" dirty="0"/>
           </a:p>
@@ -38817,7 +37671,7 @@
                 <a:ea typeface="Trebuchet MS" pitchFamily="34" charset="-122"/>
                 <a:cs typeface="Trebuchet MS" pitchFamily="34" charset="-120"/>
               </a:rPr>
-              <a:t>outlive</a:t>
+              <a:t>lively</a:t>
             </a:r>
             <a:endParaRPr lang="en-US" sz="1300" dirty="0"/>
           </a:p>
@@ -38883,7 +37737,7 @@
                 <a:ea typeface="Trebuchet MS" pitchFamily="34" charset="-122"/>
                 <a:cs typeface="Trebuchet MS" pitchFamily="34" charset="-120"/>
               </a:rPr>
-              <a:t>relive</a:t>
+              <a:t>outlive</a:t>
             </a:r>
             <a:endParaRPr lang="en-US" sz="1300" dirty="0"/>
           </a:p>
@@ -39015,7 +37869,7 @@
                 <a:ea typeface="Trebuchet MS" pitchFamily="34" charset="-122"/>
                 <a:cs typeface="Trebuchet MS" pitchFamily="34" charset="-120"/>
               </a:rPr>
-              <a:t>livestock</a:t>
+              <a:t>liver</a:t>
             </a:r>
             <a:endParaRPr lang="en-US" sz="1300" dirty="0"/>
           </a:p>
@@ -39081,7 +37935,7 @@
                 <a:ea typeface="Trebuchet MS" pitchFamily="34" charset="-122"/>
                 <a:cs typeface="Trebuchet MS" pitchFamily="34" charset="-120"/>
               </a:rPr>
-              <a:t>uplive</a:t>
+              <a:t>forlive</a:t>
             </a:r>
             <a:endParaRPr lang="en-US" sz="1300" dirty="0"/>
           </a:p>
@@ -39866,7 +38720,7 @@
                 <a:ea typeface="Trebuchet MS" pitchFamily="34" charset="-122"/>
                 <a:cs typeface="Trebuchet MS" pitchFamily="34" charset="-120"/>
               </a:rPr>
-              <a:t>out-</a:t>
+              <a:t>re-</a:t>
             </a:r>
             <a:endParaRPr lang="en-US" sz="1300" dirty="0"/>
           </a:p>
@@ -39955,7 +38809,7 @@
                 <a:ea typeface="Trebuchet MS" pitchFamily="34" charset="-122"/>
                 <a:cs typeface="Trebuchet MS" pitchFamily="34" charset="-120"/>
               </a:rPr>
-              <a:t>-ed</a:t>
+              <a:t>-d</a:t>
             </a:r>
             <a:endParaRPr lang="en-US" sz="1300" dirty="0"/>
           </a:p>
@@ -40019,7 +38873,7 @@
                 <a:ea typeface="Trebuchet MS" pitchFamily="34" charset="-122"/>
                 <a:cs typeface="Trebuchet MS" pitchFamily="34" charset="-120"/>
               </a:rPr>
-              <a:t>re-</a:t>
+              <a:t>out-</a:t>
             </a:r>
             <a:endParaRPr lang="en-US" sz="1300" dirty="0"/>
           </a:p>
@@ -40172,7 +39026,7 @@
                 <a:ea typeface="Trebuchet MS" pitchFamily="34" charset="-122"/>
                 <a:cs typeface="Trebuchet MS" pitchFamily="34" charset="-120"/>
               </a:rPr>
-              <a:t>up-</a:t>
+              <a:t>for-</a:t>
             </a:r>
             <a:endParaRPr lang="en-US" sz="1300" dirty="0"/>
           </a:p>
@@ -40261,7 +39115,7 @@
                 <a:ea typeface="Trebuchet MS" pitchFamily="34" charset="-122"/>
                 <a:cs typeface="Trebuchet MS" pitchFamily="34" charset="-120"/>
               </a:rPr>
-              <a:t>-lihood</a:t>
+              <a:t>-r</a:t>
             </a:r>
             <a:endParaRPr lang="en-US" sz="1300" dirty="0"/>
           </a:p>
@@ -40325,7 +39179,7 @@
                 <a:ea typeface="Trebuchet MS" pitchFamily="34" charset="-122"/>
                 <a:cs typeface="Trebuchet MS" pitchFamily="34" charset="-120"/>
               </a:rPr>
-              <a:t>long-</a:t>
+              <a:t>be-</a:t>
             </a:r>
             <a:endParaRPr lang="en-US" sz="1300" dirty="0"/>
           </a:p>
@@ -40414,7 +39268,7 @@
                 <a:ea typeface="Trebuchet MS" pitchFamily="34" charset="-122"/>
                 <a:cs typeface="Trebuchet MS" pitchFamily="34" charset="-120"/>
               </a:rPr>
-              <a:t>-stock</a:t>
+              <a:t>-lihood</a:t>
             </a:r>
             <a:endParaRPr lang="en-US" sz="1300" dirty="0"/>
           </a:p>
@@ -41325,7 +40179,7 @@
                 <a:ea typeface="Calibri" pitchFamily="34" charset="-122"/>
                 <a:cs typeface="Calibri" pitchFamily="34" charset="-120"/>
               </a:rPr>
-              <a:t>Still living and breathing; not dead.</a:t>
+              <a:t>Still living and breathing, not dead.</a:t>
             </a:r>
             <a:endParaRPr lang="en-US" sz="1200" dirty="0"/>
           </a:p>
@@ -41398,7 +40252,7 @@
                 <a:ea typeface="Trebuchet MS" pitchFamily="34" charset="-122"/>
                 <a:cs typeface="Trebuchet MS" pitchFamily="34" charset="-120"/>
               </a:rPr>
-              <a:t>lively</a:t>
+              <a:t>relive</a:t>
             </a:r>
             <a:endParaRPr lang="en-US" sz="1200" dirty="0"/>
           </a:p>
@@ -41464,7 +40318,7 @@
                 <a:ea typeface="Calibri" pitchFamily="34" charset="-122"/>
                 <a:cs typeface="Calibri" pitchFamily="34" charset="-120"/>
               </a:rPr>
-              <a:t>To live up to a standard or expectation.</a:t>
+              <a:t>An old word meaning to outlive or survive beyond others.</a:t>
             </a:r>
             <a:endParaRPr lang="en-US" sz="1200" dirty="0"/>
           </a:p>
@@ -41537,7 +40391,7 @@
                 <a:ea typeface="Trebuchet MS" pitchFamily="34" charset="-122"/>
                 <a:cs typeface="Trebuchet MS" pitchFamily="34" charset="-120"/>
               </a:rPr>
-              <a:t>outlive</a:t>
+              <a:t>lively</a:t>
             </a:r>
             <a:endParaRPr lang="en-US" sz="1200" dirty="0"/>
           </a:p>
@@ -41603,7 +40457,7 @@
                 <a:ea typeface="Calibri" pitchFamily="34" charset="-122"/>
                 <a:cs typeface="Calibri" pitchFamily="34" charset="-120"/>
               </a:rPr>
-              <a:t>To live longer than someone or something else.</a:t>
+              <a:t>Full of energy and excitement.</a:t>
             </a:r>
             <a:endParaRPr lang="en-US" sz="1200" dirty="0"/>
           </a:p>
@@ -41676,7 +40530,7 @@
                 <a:ea typeface="Trebuchet MS" pitchFamily="34" charset="-122"/>
                 <a:cs typeface="Trebuchet MS" pitchFamily="34" charset="-120"/>
               </a:rPr>
-              <a:t>relive</a:t>
+              <a:t>outlive</a:t>
             </a:r>
             <a:endParaRPr lang="en-US" sz="1200" dirty="0"/>
           </a:p>
@@ -41742,7 +40596,7 @@
                 <a:ea typeface="Calibri" pitchFamily="34" charset="-122"/>
                 <a:cs typeface="Calibri" pitchFamily="34" charset="-120"/>
               </a:rPr>
-              <a:t>The way someone earns money to pay for their life.</a:t>
+              <a:t>The way a person earns money to support themselves.</a:t>
             </a:r>
             <a:endParaRPr lang="en-US" sz="1200" dirty="0"/>
           </a:p>
@@ -41881,7 +40735,7 @@
                 <a:ea typeface="Calibri" pitchFamily="34" charset="-122"/>
                 <a:cs typeface="Calibri" pitchFamily="34" charset="-120"/>
               </a:rPr>
-              <a:t>To experience or remember something again in your mind.</a:t>
+              <a:t>To live longer than someone or something else.</a:t>
             </a:r>
             <a:endParaRPr lang="en-US" sz="1200" dirty="0"/>
           </a:p>
@@ -41954,7 +40808,7 @@
                 <a:ea typeface="Trebuchet MS" pitchFamily="34" charset="-122"/>
                 <a:cs typeface="Trebuchet MS" pitchFamily="34" charset="-120"/>
               </a:rPr>
-              <a:t>livestock</a:t>
+              <a:t>liver</a:t>
             </a:r>
             <a:endParaRPr lang="en-US" sz="1200" dirty="0"/>
           </a:p>
@@ -42020,7 +40874,7 @@
                 <a:ea typeface="Calibri" pitchFamily="34" charset="-122"/>
                 <a:cs typeface="Calibri" pitchFamily="34" charset="-120"/>
               </a:rPr>
-              <a:t>Animals kept on a farm, such as cows, sheep, and chickens.</a:t>
+              <a:t>An organ inside your body that cleans your blood, named for being vital to life.</a:t>
             </a:r>
             <a:endParaRPr lang="en-US" sz="1200" dirty="0"/>
           </a:p>
@@ -42093,7 +40947,7 @@
                 <a:ea typeface="Trebuchet MS" pitchFamily="34" charset="-122"/>
                 <a:cs typeface="Trebuchet MS" pitchFamily="34" charset="-120"/>
               </a:rPr>
-              <a:t>uplive</a:t>
+              <a:t>forlive</a:t>
             </a:r>
             <a:endParaRPr lang="en-US" sz="1200" dirty="0"/>
           </a:p>
@@ -42159,7 +41013,7 @@
                 <a:ea typeface="Calibri" pitchFamily="34" charset="-122"/>
                 <a:cs typeface="Calibri" pitchFamily="34" charset="-120"/>
               </a:rPr>
-              <a:t>Full of energy and excitement.</a:t>
+              <a:t>To experience something again in your memory or for real.</a:t>
             </a:r>
             <a:endParaRPr lang="en-US" sz="1200" dirty="0"/>
           </a:p>
@@ -42654,7 +41508,7 @@
                 <a:ea typeface="Calibri" pitchFamily="34" charset="-122"/>
                 <a:cs typeface="Calibri" pitchFamily="34" charset="-120"/>
               </a:rPr>
-              <a:t>The lively puppy bounded across the yard, wagging its tail at everyone it met.</a:t>
+              <a:t>The explorers had to outlive the harsh winter by finding shelter and food in the mountains.</a:t>
             </a:r>
             <a:endParaRPr lang="en-US" sz="1500" dirty="0"/>
           </a:p>
@@ -42818,7 +41672,7 @@
                 <a:ea typeface="Calibri" pitchFamily="34" charset="-122"/>
                 <a:cs typeface="Calibri" pitchFamily="34" charset="-120"/>
               </a:rPr>
-              <a:t>My grandmother outlived all of her brothers and sisters by many years.</a:t>
+              <a:t>She felt so alive after swimming in the cool ocean on a hot summer day.</a:t>
             </a:r>
             <a:endParaRPr lang="en-US" sz="1500" dirty="0"/>
           </a:p>
@@ -42982,7 +41836,7 @@
                 <a:ea typeface="Calibri" pitchFamily="34" charset="-122"/>
                 <a:cs typeface="Calibri" pitchFamily="34" charset="-120"/>
               </a:rPr>
-              <a:t>The farmer checked on his livestock every morning before breakfast.</a:t>
+              <a:t>The market was lively, with music playing and people laughing all around.</a:t>
             </a:r>
             <a:endParaRPr lang="en-US" sz="1500" dirty="0"/>
           </a:p>
